--- a/Presentaciones/IA_Matroneria_Parte_1.pptx
+++ b/Presentaciones/IA_Matroneria_Parte_1.pptx
@@ -5,12 +5,12 @@
     <p:sldMasterId id="2147483660" r:id="rId4"/>
   </p:sldMasterIdLst>
   <p:notesMasterIdLst>
-    <p:notesMasterId r:id="rId42"/>
+    <p:notesMasterId r:id="rId43"/>
   </p:notesMasterIdLst>
   <p:sldIdLst>
     <p:sldId id="256" r:id="rId5"/>
     <p:sldId id="257" r:id="rId6"/>
-    <p:sldId id="258" r:id="rId7"/>
+    <p:sldId id="293" r:id="rId7"/>
     <p:sldId id="259" r:id="rId8"/>
     <p:sldId id="260" r:id="rId9"/>
     <p:sldId id="261" r:id="rId10"/>
@@ -34,27 +34,28 @@
     <p:sldId id="279" r:id="rId28"/>
     <p:sldId id="280" r:id="rId29"/>
     <p:sldId id="281" r:id="rId30"/>
-    <p:sldId id="282" r:id="rId31"/>
-    <p:sldId id="283" r:id="rId32"/>
-    <p:sldId id="288" r:id="rId33"/>
-    <p:sldId id="286" r:id="rId34"/>
-    <p:sldId id="287" r:id="rId35"/>
-    <p:sldId id="284" r:id="rId36"/>
-    <p:sldId id="285" r:id="rId37"/>
-    <p:sldId id="289" r:id="rId38"/>
-    <p:sldId id="290" r:id="rId39"/>
-    <p:sldId id="291" r:id="rId40"/>
-    <p:sldId id="292" r:id="rId41"/>
+    <p:sldId id="294" r:id="rId31"/>
+    <p:sldId id="282" r:id="rId32"/>
+    <p:sldId id="283" r:id="rId33"/>
+    <p:sldId id="288" r:id="rId34"/>
+    <p:sldId id="286" r:id="rId35"/>
+    <p:sldId id="287" r:id="rId36"/>
+    <p:sldId id="284" r:id="rId37"/>
+    <p:sldId id="285" r:id="rId38"/>
+    <p:sldId id="289" r:id="rId39"/>
+    <p:sldId id="290" r:id="rId40"/>
+    <p:sldId id="291" r:id="rId41"/>
+    <p:sldId id="292" r:id="rId42"/>
   </p:sldIdLst>
   <p:sldSz cx="9144000" cy="5143500" type="screen16x9"/>
   <p:notesSz cx="6858000" cy="9144000"/>
   <p:embeddedFontLst>
     <p:embeddedFont>
       <p:font typeface="Swis721 Cn BT" panose="020B0506020202030204" pitchFamily="34" charset="0"/>
-      <p:regular r:id="rId43"/>
-      <p:bold r:id="rId44"/>
-      <p:italic r:id="rId45"/>
-      <p:boldItalic r:id="rId46"/>
+      <p:regular r:id="rId44"/>
+      <p:bold r:id="rId45"/>
+      <p:italic r:id="rId46"/>
+      <p:boldItalic r:id="rId47"/>
     </p:embeddedFont>
   </p:embeddedFontLst>
   <p:defaultTextStyle>
@@ -2085,7 +2086,13 @@
   <p:cSld>
     <p:spTree>
       <p:nvGrpSpPr>
-        <p:cNvPr id="1" name=""/>
+        <p:cNvPr id="1" name="">
+          <a:extLst>
+            <a:ext uri="{FF2B5EF4-FFF2-40B4-BE49-F238E27FC236}">
+              <a16:creationId xmlns:a16="http://schemas.microsoft.com/office/drawing/2014/main" id="{4DB36BBC-96EE-4719-B521-AF46DBB611C3}"/>
+            </a:ext>
+          </a:extLst>
+        </p:cNvPr>
         <p:cNvGrpSpPr/>
         <p:nvPr/>
       </p:nvGrpSpPr>
@@ -2099,7 +2106,13 @@
       </p:grpSpPr>
       <p:sp>
         <p:nvSpPr>
-          <p:cNvPr id="2" name="Slide Image Placeholder 1"/>
+          <p:cNvPr id="2" name="Slide Image Placeholder 1">
+            <a:extLst>
+              <a:ext uri="{FF2B5EF4-FFF2-40B4-BE49-F238E27FC236}">
+                <a16:creationId xmlns:a16="http://schemas.microsoft.com/office/drawing/2014/main" id="{BE15C161-E428-AE18-AEFF-70A535542254}"/>
+              </a:ext>
+            </a:extLst>
+          </p:cNvPr>
           <p:cNvSpPr>
             <a:spLocks noGrp="1" noRot="1" noChangeAspect="1"/>
           </p:cNvSpPr>
@@ -2111,7 +2124,13 @@
       </p:sp>
       <p:sp>
         <p:nvSpPr>
-          <p:cNvPr id="3" name="Notes Placeholder 2"/>
+          <p:cNvPr id="3" name="Notes Placeholder 2">
+            <a:extLst>
+              <a:ext uri="{FF2B5EF4-FFF2-40B4-BE49-F238E27FC236}">
+                <a16:creationId xmlns:a16="http://schemas.microsoft.com/office/drawing/2014/main" id="{439AC586-0458-3726-29FC-8548BCC63CE5}"/>
+              </a:ext>
+            </a:extLst>
+          </p:cNvPr>
           <p:cNvSpPr>
             <a:spLocks noGrp="1"/>
           </p:cNvSpPr>
@@ -2132,7 +2151,13 @@
       </p:sp>
       <p:sp>
         <p:nvSpPr>
-          <p:cNvPr id="4" name="Slide Number Placeholder 3"/>
+          <p:cNvPr id="4" name="Slide Number Placeholder 3">
+            <a:extLst>
+              <a:ext uri="{FF2B5EF4-FFF2-40B4-BE49-F238E27FC236}">
+                <a16:creationId xmlns:a16="http://schemas.microsoft.com/office/drawing/2014/main" id="{0F80C2CA-215C-38D8-95A5-8B1B1B114A4D}"/>
+              </a:ext>
+            </a:extLst>
+          </p:cNvPr>
           <p:cNvSpPr>
             <a:spLocks noGrp="1"/>
           </p:cNvSpPr>
@@ -2143,6 +2168,11 @@
         <p:spPr/>
       </p:sp>
     </p:spTree>
+    <p:extLst>
+      <p:ext uri="{BB962C8B-B14F-4D97-AF65-F5344CB8AC3E}">
+        <p14:creationId xmlns:p14="http://schemas.microsoft.com/office/powerpoint/2010/main" val="3267488196"/>
+      </p:ext>
+    </p:extLst>
   </p:cSld>
   <p:clrMapOvr>
     <a:masterClrMapping/>
@@ -20255,7 +20285,7 @@
         </p:nvSpPr>
         <p:spPr>
           <a:xfrm>
-            <a:off x="2606040" y="868680"/>
+            <a:off x="2606040" y="411479"/>
             <a:ext cx="6035040" cy="822960"/>
           </a:xfrm>
           <a:prstGeom prst="rect">
@@ -20294,7 +20324,7 @@
         </p:nvSpPr>
         <p:spPr>
           <a:xfrm>
-            <a:off x="2606040" y="1755648"/>
+            <a:off x="2606040" y="1298447"/>
             <a:ext cx="6035040" cy="658368"/>
           </a:xfrm>
           <a:prstGeom prst="rect">
@@ -20333,7 +20363,7 @@
         </p:nvSpPr>
         <p:spPr>
           <a:xfrm>
-            <a:off x="2606040" y="2487168"/>
+            <a:off x="2606040" y="1739821"/>
             <a:ext cx="6035040" cy="274320"/>
           </a:xfrm>
           <a:prstGeom prst="rect">
@@ -20372,7 +20402,7 @@
         </p:nvSpPr>
         <p:spPr>
           <a:xfrm>
-            <a:off x="2633472" y="2871215"/>
+            <a:off x="2633472" y="2123868"/>
             <a:ext cx="118872" cy="118872"/>
           </a:xfrm>
           <a:prstGeom prst="ellipse">
@@ -20402,7 +20432,7 @@
         </p:nvSpPr>
         <p:spPr>
           <a:xfrm>
-            <a:off x="2880360" y="2788920"/>
+            <a:off x="2880360" y="2041573"/>
             <a:ext cx="5669280" cy="292608"/>
           </a:xfrm>
           <a:prstGeom prst="rect">
@@ -20441,7 +20471,7 @@
         </p:nvSpPr>
         <p:spPr>
           <a:xfrm>
-            <a:off x="2633472" y="3182111"/>
+            <a:off x="2633472" y="2434764"/>
             <a:ext cx="118872" cy="118872"/>
           </a:xfrm>
           <a:prstGeom prst="ellipse">
@@ -20471,7 +20501,7 @@
         </p:nvSpPr>
         <p:spPr>
           <a:xfrm>
-            <a:off x="2880360" y="3099815"/>
+            <a:off x="2880360" y="2352468"/>
             <a:ext cx="5669280" cy="292608"/>
           </a:xfrm>
           <a:prstGeom prst="rect">
@@ -20510,7 +20540,7 @@
         </p:nvSpPr>
         <p:spPr>
           <a:xfrm>
-            <a:off x="2633472" y="3493008"/>
+            <a:off x="2633472" y="2745661"/>
             <a:ext cx="118872" cy="118872"/>
           </a:xfrm>
           <a:prstGeom prst="ellipse">
@@ -20540,7 +20570,7 @@
         </p:nvSpPr>
         <p:spPr>
           <a:xfrm>
-            <a:off x="2880360" y="3410712"/>
+            <a:off x="2880360" y="2663365"/>
             <a:ext cx="5669280" cy="292608"/>
           </a:xfrm>
           <a:prstGeom prst="rect">
@@ -20579,7 +20609,7 @@
         </p:nvSpPr>
         <p:spPr>
           <a:xfrm>
-            <a:off x="2633472" y="3803904"/>
+            <a:off x="2633472" y="3056557"/>
             <a:ext cx="118872" cy="118872"/>
           </a:xfrm>
           <a:prstGeom prst="ellipse">
@@ -20609,7 +20639,7 @@
         </p:nvSpPr>
         <p:spPr>
           <a:xfrm>
-            <a:off x="2880360" y="3721608"/>
+            <a:off x="2880360" y="2974261"/>
             <a:ext cx="5669280" cy="292608"/>
           </a:xfrm>
           <a:prstGeom prst="rect">
@@ -20640,6 +20670,37 @@
           </a:p>
         </p:txBody>
       </p:sp>
+      <p:pic>
+        <p:nvPicPr>
+          <p:cNvPr id="17" name="Imagen 16">
+            <a:extLst>
+              <a:ext uri="{FF2B5EF4-FFF2-40B4-BE49-F238E27FC236}">
+                <a16:creationId xmlns:a16="http://schemas.microsoft.com/office/drawing/2014/main" id="{731F6483-CEEA-17B3-B2AE-02E2AEF07F07}"/>
+              </a:ext>
+            </a:extLst>
+          </p:cNvPr>
+          <p:cNvPicPr>
+            <a:picLocks noChangeAspect="1"/>
+          </p:cNvPicPr>
+          <p:nvPr/>
+        </p:nvPicPr>
+        <p:blipFill>
+          <a:blip r:embed="rId4"/>
+          <a:srcRect l="4560" t="15574" r="63594" b="18601"/>
+          <a:stretch>
+            <a:fillRect/>
+          </a:stretch>
+        </p:blipFill>
+        <p:spPr>
+          <a:xfrm>
+            <a:off x="6646986" y="1549205"/>
+            <a:ext cx="2347110" cy="2725616"/>
+          </a:xfrm>
+          <a:prstGeom prst="rect">
+            <a:avLst/>
+          </a:prstGeom>
+        </p:spPr>
+      </p:pic>
     </p:spTree>
   </p:cSld>
   <p:clrMapOvr>
@@ -22117,6 +22178,135 @@
 
 <file path=ppt/slides/slide27.xml><?xml version="1.0" encoding="utf-8"?>
 <p:sld xmlns:a="http://schemas.openxmlformats.org/drawingml/2006/main" xmlns:r="http://schemas.openxmlformats.org/officeDocument/2006/relationships" xmlns:p="http://schemas.openxmlformats.org/presentationml/2006/main">
+  <p:cSld>
+    <p:spTree>
+      <p:nvGrpSpPr>
+        <p:cNvPr id="1" name=""/>
+        <p:cNvGrpSpPr/>
+        <p:nvPr/>
+      </p:nvGrpSpPr>
+      <p:grpSpPr>
+        <a:xfrm>
+          <a:off x="0" y="0"/>
+          <a:ext cx="0" cy="0"/>
+          <a:chOff x="0" y="0"/>
+          <a:chExt cx="0" cy="0"/>
+        </a:xfrm>
+      </p:grpSpPr>
+      <p:pic>
+        <p:nvPicPr>
+          <p:cNvPr id="5" name="Imagen 4">
+            <a:extLst>
+              <a:ext uri="{FF2B5EF4-FFF2-40B4-BE49-F238E27FC236}">
+                <a16:creationId xmlns:a16="http://schemas.microsoft.com/office/drawing/2014/main" id="{BF7EE845-432C-10DB-3BD8-750896650F63}"/>
+              </a:ext>
+            </a:extLst>
+          </p:cNvPr>
+          <p:cNvPicPr>
+            <a:picLocks noChangeAspect="1"/>
+          </p:cNvPicPr>
+          <p:nvPr/>
+        </p:nvPicPr>
+        <p:blipFill>
+          <a:blip r:embed="rId2"/>
+          <a:srcRect l="4560" t="15574" r="63594" b="18601"/>
+          <a:stretch>
+            <a:fillRect/>
+          </a:stretch>
+        </p:blipFill>
+        <p:spPr>
+          <a:xfrm>
+            <a:off x="1679330" y="791927"/>
+            <a:ext cx="3639539" cy="4226469"/>
+          </a:xfrm>
+          <a:prstGeom prst="rect">
+            <a:avLst/>
+          </a:prstGeom>
+        </p:spPr>
+      </p:pic>
+      <p:sp>
+        <p:nvSpPr>
+          <p:cNvPr id="6" name="CuadroTexto 5">
+            <a:extLst>
+              <a:ext uri="{FF2B5EF4-FFF2-40B4-BE49-F238E27FC236}">
+                <a16:creationId xmlns:a16="http://schemas.microsoft.com/office/drawing/2014/main" id="{3BC48EB6-14F2-EE44-76A6-AEDF4F6450E4}"/>
+              </a:ext>
+            </a:extLst>
+          </p:cNvPr>
+          <p:cNvSpPr txBox="1"/>
+          <p:nvPr/>
+        </p:nvSpPr>
+        <p:spPr>
+          <a:xfrm>
+            <a:off x="5318869" y="2340917"/>
+            <a:ext cx="3484031" cy="461665"/>
+          </a:xfrm>
+          <a:prstGeom prst="rect">
+            <a:avLst/>
+          </a:prstGeom>
+          <a:noFill/>
+        </p:spPr>
+        <p:txBody>
+          <a:bodyPr wrap="none" rtlCol="0">
+            <a:spAutoFit/>
+          </a:bodyPr>
+          <a:lstStyle/>
+          <a:p>
+            <a:r>
+              <a:rPr lang="es-ES_tradnl" sz="2400" b="1" dirty="0">
+                <a:solidFill>
+                  <a:srgbClr val="06717E"/>
+                </a:solidFill>
+              </a:rPr>
+              <a:t>https://</a:t>
+            </a:r>
+            <a:r>
+              <a:rPr lang="es-ES_tradnl" sz="2400" b="1" dirty="0" err="1">
+                <a:solidFill>
+                  <a:srgbClr val="06717E"/>
+                </a:solidFill>
+              </a:rPr>
+              <a:t>bit.ly</a:t>
+            </a:r>
+            <a:r>
+              <a:rPr lang="es-ES_tradnl" sz="2400" b="1" dirty="0">
+                <a:solidFill>
+                  <a:srgbClr val="06717E"/>
+                </a:solidFill>
+              </a:rPr>
+              <a:t>/</a:t>
+            </a:r>
+            <a:r>
+              <a:rPr lang="es-ES_tradnl" sz="2400" b="1" dirty="0" err="1">
+                <a:solidFill>
+                  <a:srgbClr val="06717E"/>
+                </a:solidFill>
+              </a:rPr>
+              <a:t>alumni_oyp</a:t>
+            </a:r>
+            <a:endParaRPr lang="es-ES_tradnl" sz="2400" b="1" dirty="0">
+              <a:solidFill>
+                <a:srgbClr val="06717E"/>
+              </a:solidFill>
+            </a:endParaRPr>
+          </a:p>
+        </p:txBody>
+      </p:sp>
+    </p:spTree>
+    <p:extLst>
+      <p:ext uri="{BB962C8B-B14F-4D97-AF65-F5344CB8AC3E}">
+        <p14:creationId xmlns:p14="http://schemas.microsoft.com/office/powerpoint/2010/main" val="3346101430"/>
+      </p:ext>
+    </p:extLst>
+  </p:cSld>
+  <p:clrMapOvr>
+    <a:masterClrMapping/>
+  </p:clrMapOvr>
+</p:sld>
+</file>
+
+<file path=ppt/slides/slide28.xml><?xml version="1.0" encoding="utf-8"?>
+<p:sld xmlns:a="http://schemas.openxmlformats.org/drawingml/2006/main" xmlns:r="http://schemas.openxmlformats.org/officeDocument/2006/relationships" xmlns:p="http://schemas.openxmlformats.org/presentationml/2006/main" show="0">
   <p:cSld>
     <p:spTree>
       <p:nvGrpSpPr>
@@ -22958,13 +23148,148 @@
               </a:spcAft>
             </a:pPr>
             <a:r>
-              <a:rPr sz="1050" b="0" i="0">
+              <a:rPr sz="1050" b="0" i="0" dirty="0" err="1">
                 <a:solidFill>
                   <a:srgbClr val="FFFFFF"/>
                 </a:solidFill>
                 <a:latin typeface="Swis721 Cn BT"/>
               </a:rPr>
-              <a:t>Actúa como matrona experta en prevención de IAAS y redacción de protocolos.</a:t>
+              <a:t>Actúa</a:t>
+            </a:r>
+            <a:r>
+              <a:rPr sz="1050" b="0" i="0" dirty="0">
+                <a:solidFill>
+                  <a:srgbClr val="FFFFFF"/>
+                </a:solidFill>
+                <a:latin typeface="Swis721 Cn BT"/>
+              </a:rPr>
+              <a:t> </a:t>
+            </a:r>
+            <a:r>
+              <a:rPr sz="1050" b="0" i="0" dirty="0" err="1">
+                <a:solidFill>
+                  <a:srgbClr val="FFFFFF"/>
+                </a:solidFill>
+                <a:latin typeface="Swis721 Cn BT"/>
+              </a:rPr>
+              <a:t>como</a:t>
+            </a:r>
+            <a:r>
+              <a:rPr sz="1050" b="0" i="0" dirty="0">
+                <a:solidFill>
+                  <a:srgbClr val="FFFFFF"/>
+                </a:solidFill>
+                <a:latin typeface="Swis721 Cn BT"/>
+              </a:rPr>
+              <a:t> </a:t>
+            </a:r>
+            <a:r>
+              <a:rPr sz="1050" b="0" i="0" dirty="0" err="1">
+                <a:solidFill>
+                  <a:srgbClr val="FFFFFF"/>
+                </a:solidFill>
+                <a:latin typeface="Swis721 Cn BT"/>
+              </a:rPr>
+              <a:t>matrona</a:t>
+            </a:r>
+            <a:r>
+              <a:rPr sz="1050" b="0" i="0" dirty="0">
+                <a:solidFill>
+                  <a:srgbClr val="FFFFFF"/>
+                </a:solidFill>
+                <a:latin typeface="Swis721 Cn BT"/>
+              </a:rPr>
+              <a:t> </a:t>
+            </a:r>
+            <a:r>
+              <a:rPr sz="1050" b="0" i="0" dirty="0" err="1">
+                <a:solidFill>
+                  <a:srgbClr val="FFFFFF"/>
+                </a:solidFill>
+                <a:latin typeface="Swis721 Cn BT"/>
+              </a:rPr>
+              <a:t>experta</a:t>
+            </a:r>
+            <a:r>
+              <a:rPr sz="1050" b="0" i="0" dirty="0">
+                <a:solidFill>
+                  <a:srgbClr val="FFFFFF"/>
+                </a:solidFill>
+                <a:latin typeface="Swis721 Cn BT"/>
+              </a:rPr>
+              <a:t> </a:t>
+            </a:r>
+            <a:r>
+              <a:rPr sz="1050" b="0" i="0" dirty="0" err="1">
+                <a:solidFill>
+                  <a:srgbClr val="FFFFFF"/>
+                </a:solidFill>
+                <a:latin typeface="Swis721 Cn BT"/>
+              </a:rPr>
+              <a:t>en</a:t>
+            </a:r>
+            <a:r>
+              <a:rPr sz="1050" b="0" i="0" dirty="0">
+                <a:solidFill>
+                  <a:srgbClr val="FFFFFF"/>
+                </a:solidFill>
+                <a:latin typeface="Swis721 Cn BT"/>
+              </a:rPr>
+              <a:t> </a:t>
+            </a:r>
+            <a:r>
+              <a:rPr sz="1050" b="0" i="0" dirty="0" err="1">
+                <a:solidFill>
+                  <a:srgbClr val="FFFFFF"/>
+                </a:solidFill>
+                <a:latin typeface="Swis721 Cn BT"/>
+              </a:rPr>
+              <a:t>prevención</a:t>
+            </a:r>
+            <a:r>
+              <a:rPr sz="1050" b="0" i="0" dirty="0">
+                <a:solidFill>
+                  <a:srgbClr val="FFFFFF"/>
+                </a:solidFill>
+                <a:latin typeface="Swis721 Cn BT"/>
+              </a:rPr>
+              <a:t> de IAAS y </a:t>
+            </a:r>
+            <a:r>
+              <a:rPr sz="1050" b="0" i="0" dirty="0" err="1">
+                <a:solidFill>
+                  <a:srgbClr val="FFFFFF"/>
+                </a:solidFill>
+                <a:latin typeface="Swis721 Cn BT"/>
+              </a:rPr>
+              <a:t>redacción</a:t>
+            </a:r>
+            <a:r>
+              <a:rPr sz="1050" b="0" i="0" dirty="0">
+                <a:solidFill>
+                  <a:srgbClr val="FFFFFF"/>
+                </a:solidFill>
+                <a:latin typeface="Swis721 Cn BT"/>
+              </a:rPr>
+              <a:t> de </a:t>
+            </a:r>
+            <a:r>
+              <a:rPr sz="1050" b="0" i="0" dirty="0" err="1">
+                <a:solidFill>
+                  <a:srgbClr val="FFFFFF"/>
+                </a:solidFill>
+                <a:latin typeface="Swis721 Cn BT"/>
+              </a:rPr>
+              <a:t>protocolos</a:t>
+            </a:r>
+            <a:r>
+              <a:rPr sz="1050" b="0" i="0" dirty="0">
+                <a:solidFill>
+                  <a:srgbClr val="FFFFFF"/>
+                </a:solidFill>
+                <a:latin typeface="Swis721 Cn BT"/>
+              </a:rPr>
+              <a:t>.</a:t>
             </a:r>
           </a:p>
           <a:p>
@@ -22974,13 +23299,130 @@
               </a:spcAft>
             </a:pPr>
             <a:r>
-              <a:rPr sz="1050" b="0" i="0">
+              <a:rPr sz="1050" b="0" i="0" dirty="0" err="1">
                 <a:solidFill>
                   <a:srgbClr val="FFFFFF"/>
                 </a:solidFill>
                 <a:latin typeface="Swis721 Cn BT"/>
               </a:rPr>
-              <a:t>Adjunto dos protocolos hospitalarios de prevención de endometritis puerperal (A y B, vencidos) y la normativa ministerial vigente.</a:t>
+              <a:t>Adjunto</a:t>
+            </a:r>
+            <a:r>
+              <a:rPr sz="1050" b="0" i="0" dirty="0">
+                <a:solidFill>
+                  <a:srgbClr val="FFFFFF"/>
+                </a:solidFill>
+                <a:latin typeface="Swis721 Cn BT"/>
+              </a:rPr>
+              <a:t> dos </a:t>
+            </a:r>
+            <a:r>
+              <a:rPr sz="1050" b="0" i="0" dirty="0" err="1">
+                <a:solidFill>
+                  <a:srgbClr val="FFFFFF"/>
+                </a:solidFill>
+                <a:latin typeface="Swis721 Cn BT"/>
+              </a:rPr>
+              <a:t>protocolos</a:t>
+            </a:r>
+            <a:r>
+              <a:rPr sz="1050" b="0" i="0" dirty="0">
+                <a:solidFill>
+                  <a:srgbClr val="FFFFFF"/>
+                </a:solidFill>
+                <a:latin typeface="Swis721 Cn BT"/>
+              </a:rPr>
+              <a:t> </a:t>
+            </a:r>
+            <a:r>
+              <a:rPr sz="1050" b="0" i="0" dirty="0" err="1">
+                <a:solidFill>
+                  <a:srgbClr val="FFFFFF"/>
+                </a:solidFill>
+                <a:latin typeface="Swis721 Cn BT"/>
+              </a:rPr>
+              <a:t>hospitalarios</a:t>
+            </a:r>
+            <a:r>
+              <a:rPr sz="1050" b="0" i="0" dirty="0">
+                <a:solidFill>
+                  <a:srgbClr val="FFFFFF"/>
+                </a:solidFill>
+                <a:latin typeface="Swis721 Cn BT"/>
+              </a:rPr>
+              <a:t> de </a:t>
+            </a:r>
+            <a:r>
+              <a:rPr sz="1050" b="0" i="0" dirty="0" err="1">
+                <a:solidFill>
+                  <a:srgbClr val="FFFFFF"/>
+                </a:solidFill>
+                <a:latin typeface="Swis721 Cn BT"/>
+              </a:rPr>
+              <a:t>prevención</a:t>
+            </a:r>
+            <a:r>
+              <a:rPr sz="1050" b="0" i="0" dirty="0">
+                <a:solidFill>
+                  <a:srgbClr val="FFFFFF"/>
+                </a:solidFill>
+                <a:latin typeface="Swis721 Cn BT"/>
+              </a:rPr>
+              <a:t> de endometritis puerperal (A y B, </a:t>
+            </a:r>
+            <a:r>
+              <a:rPr sz="1050" b="0" i="0" dirty="0" err="1">
+                <a:solidFill>
+                  <a:srgbClr val="FFFFFF"/>
+                </a:solidFill>
+                <a:latin typeface="Swis721 Cn BT"/>
+              </a:rPr>
+              <a:t>vencidos</a:t>
+            </a:r>
+            <a:r>
+              <a:rPr sz="1050" b="0" i="0" dirty="0">
+                <a:solidFill>
+                  <a:srgbClr val="FFFFFF"/>
+                </a:solidFill>
+                <a:latin typeface="Swis721 Cn BT"/>
+              </a:rPr>
+              <a:t>) y la </a:t>
+            </a:r>
+            <a:r>
+              <a:rPr sz="1050" b="0" i="0" dirty="0" err="1">
+                <a:solidFill>
+                  <a:srgbClr val="FFFFFF"/>
+                </a:solidFill>
+                <a:latin typeface="Swis721 Cn BT"/>
+              </a:rPr>
+              <a:t>normativa</a:t>
+            </a:r>
+            <a:r>
+              <a:rPr sz="1050" b="0" i="0" dirty="0">
+                <a:solidFill>
+                  <a:srgbClr val="FFFFFF"/>
+                </a:solidFill>
+                <a:latin typeface="Swis721 Cn BT"/>
+              </a:rPr>
+              <a:t> ministerial </a:t>
+            </a:r>
+            <a:r>
+              <a:rPr sz="1050" b="0" i="0" dirty="0" err="1">
+                <a:solidFill>
+                  <a:srgbClr val="FFFFFF"/>
+                </a:solidFill>
+                <a:latin typeface="Swis721 Cn BT"/>
+              </a:rPr>
+              <a:t>vigente</a:t>
+            </a:r>
+            <a:r>
+              <a:rPr sz="1050" b="0" i="0" dirty="0">
+                <a:solidFill>
+                  <a:srgbClr val="FFFFFF"/>
+                </a:solidFill>
+                <a:latin typeface="Swis721 Cn BT"/>
+              </a:rPr>
+              <a:t>.</a:t>
             </a:r>
           </a:p>
           <a:p>
@@ -22990,13 +23432,175 @@
               </a:spcAft>
             </a:pPr>
             <a:r>
-              <a:rPr sz="1050" b="0" i="0">
+              <a:rPr sz="1050" b="0" i="0" dirty="0">
                 <a:solidFill>
                   <a:srgbClr val="FFFFFF"/>
                 </a:solidFill>
                 <a:latin typeface="Swis721 Cn BT"/>
               </a:rPr>
-              <a:t>1) Construye una tabla: medida | protocolo A | protocolo B | normativa vigente | página.</a:t>
+              <a:t>1) </a:t>
+            </a:r>
+            <a:r>
+              <a:rPr sz="1050" b="0" i="0" dirty="0" err="1">
+                <a:solidFill>
+                  <a:srgbClr val="FFFFFF"/>
+                </a:solidFill>
+                <a:latin typeface="Swis721 Cn BT"/>
+              </a:rPr>
+              <a:t>Construye</a:t>
+            </a:r>
+            <a:r>
+              <a:rPr sz="1050" b="0" i="0" dirty="0">
+                <a:solidFill>
+                  <a:srgbClr val="FFFFFF"/>
+                </a:solidFill>
+                <a:latin typeface="Swis721 Cn BT"/>
+              </a:rPr>
+              <a:t> </a:t>
+            </a:r>
+            <a:r>
+              <a:rPr sz="1050" b="0" i="0" dirty="0" err="1">
+                <a:solidFill>
+                  <a:srgbClr val="FFFFFF"/>
+                </a:solidFill>
+                <a:latin typeface="Swis721 Cn BT"/>
+              </a:rPr>
+              <a:t>una</a:t>
+            </a:r>
+            <a:r>
+              <a:rPr sz="1050" b="0" i="0" dirty="0">
+                <a:solidFill>
+                  <a:srgbClr val="FFFFFF"/>
+                </a:solidFill>
+                <a:latin typeface="Swis721 Cn BT"/>
+              </a:rPr>
+              <a:t> </a:t>
+            </a:r>
+            <a:r>
+              <a:rPr sz="1050" b="0" i="0" dirty="0" err="1">
+                <a:solidFill>
+                  <a:srgbClr val="FFFFFF"/>
+                </a:solidFill>
+                <a:latin typeface="Swis721 Cn BT"/>
+              </a:rPr>
+              <a:t>tabla</a:t>
+            </a:r>
+            <a:r>
+              <a:rPr sz="1050" b="0" i="0" dirty="0">
+                <a:solidFill>
+                  <a:srgbClr val="FFFFFF"/>
+                </a:solidFill>
+                <a:latin typeface="Swis721 Cn BT"/>
+              </a:rPr>
+              <a:t>: </a:t>
+            </a:r>
+            <a:r>
+              <a:rPr sz="1050" b="0" i="0" dirty="0" err="1">
+                <a:solidFill>
+                  <a:srgbClr val="FFFFFF"/>
+                </a:solidFill>
+                <a:latin typeface="Swis721 Cn BT"/>
+              </a:rPr>
+              <a:t>medida</a:t>
+            </a:r>
+            <a:r>
+              <a:rPr sz="1050" b="0" i="0" dirty="0">
+                <a:solidFill>
+                  <a:srgbClr val="FFFFFF"/>
+                </a:solidFill>
+                <a:latin typeface="Swis721 Cn BT"/>
+              </a:rPr>
+              <a:t> | </a:t>
+            </a:r>
+            <a:r>
+              <a:rPr sz="1050" b="0" i="0" dirty="0" err="1">
+                <a:solidFill>
+                  <a:srgbClr val="FFFFFF"/>
+                </a:solidFill>
+                <a:latin typeface="Swis721 Cn BT"/>
+              </a:rPr>
+              <a:t>protocolo</a:t>
+            </a:r>
+            <a:r>
+              <a:rPr sz="1050" b="0" i="0" dirty="0">
+                <a:solidFill>
+                  <a:srgbClr val="FFFFFF"/>
+                </a:solidFill>
+                <a:latin typeface="Swis721 Cn BT"/>
+              </a:rPr>
+              <a:t> A | </a:t>
+            </a:r>
+            <a:r>
+              <a:rPr sz="1050" b="0" i="0" dirty="0" err="1">
+                <a:solidFill>
+                  <a:srgbClr val="FFFFFF"/>
+                </a:solidFill>
+                <a:latin typeface="Swis721 Cn BT"/>
+              </a:rPr>
+              <a:t>protocolo</a:t>
+            </a:r>
+            <a:r>
+              <a:rPr sz="1050" b="0" i="0" dirty="0">
+                <a:solidFill>
+                  <a:srgbClr val="FFFFFF"/>
+                </a:solidFill>
+                <a:latin typeface="Swis721 Cn BT"/>
+              </a:rPr>
+              <a:t> B | </a:t>
+            </a:r>
+            <a:r>
+              <a:rPr sz="1050" b="0" i="0" dirty="0" err="1">
+                <a:solidFill>
+                  <a:srgbClr val="FFFFFF"/>
+                </a:solidFill>
+                <a:latin typeface="Swis721 Cn BT"/>
+              </a:rPr>
+              <a:t>normativa</a:t>
+            </a:r>
+            <a:r>
+              <a:rPr sz="1050" b="0" i="0" dirty="0">
+                <a:solidFill>
+                  <a:srgbClr val="FFFFFF"/>
+                </a:solidFill>
+                <a:latin typeface="Swis721 Cn BT"/>
+              </a:rPr>
+              <a:t> </a:t>
+            </a:r>
+            <a:r>
+              <a:rPr sz="1050" b="0" i="0" dirty="0" err="1">
+                <a:solidFill>
+                  <a:srgbClr val="FFFFFF"/>
+                </a:solidFill>
+                <a:latin typeface="Swis721 Cn BT"/>
+              </a:rPr>
+              <a:t>vigente</a:t>
+            </a:r>
+            <a:r>
+              <a:rPr sz="1050" b="0" i="0" dirty="0">
+                <a:solidFill>
+                  <a:srgbClr val="FFFFFF"/>
+                </a:solidFill>
+                <a:latin typeface="Swis721 Cn BT"/>
+              </a:rPr>
+              <a:t> | </a:t>
+            </a:r>
+            <a:r>
+              <a:rPr sz="1050" b="0" i="0" dirty="0" err="1">
+                <a:solidFill>
+                  <a:srgbClr val="FFFFFF"/>
+                </a:solidFill>
+                <a:latin typeface="Swis721 Cn BT"/>
+              </a:rPr>
+              <a:t>página</a:t>
+            </a:r>
+            <a:r>
+              <a:rPr sz="1050" b="0" i="0" dirty="0">
+                <a:solidFill>
+                  <a:srgbClr val="FFFFFF"/>
+                </a:solidFill>
+                <a:latin typeface="Swis721 Cn BT"/>
+              </a:rPr>
+              <a:t>.</a:t>
             </a:r>
           </a:p>
           <a:p>
@@ -23006,13 +23610,67 @@
               </a:spcAft>
             </a:pPr>
             <a:r>
-              <a:rPr sz="1050" b="0" i="0">
+              <a:rPr sz="1050" b="0" i="0" dirty="0">
                 <a:solidFill>
                   <a:srgbClr val="FFFFFF"/>
                 </a:solidFill>
                 <a:latin typeface="Swis721 Cn BT"/>
               </a:rPr>
-              <a:t>2) Señala discrepancias y vacíos.</a:t>
+              <a:t>2) </a:t>
+            </a:r>
+            <a:r>
+              <a:rPr sz="1050" b="0" i="0" dirty="0" err="1">
+                <a:solidFill>
+                  <a:srgbClr val="FFFFFF"/>
+                </a:solidFill>
+                <a:latin typeface="Swis721 Cn BT"/>
+              </a:rPr>
+              <a:t>Señala</a:t>
+            </a:r>
+            <a:r>
+              <a:rPr sz="1050" b="0" i="0" dirty="0">
+                <a:solidFill>
+                  <a:srgbClr val="FFFFFF"/>
+                </a:solidFill>
+                <a:latin typeface="Swis721 Cn BT"/>
+              </a:rPr>
+              <a:t> </a:t>
+            </a:r>
+            <a:r>
+              <a:rPr sz="1050" b="0" i="0" dirty="0" err="1">
+                <a:solidFill>
+                  <a:srgbClr val="FFFFFF"/>
+                </a:solidFill>
+                <a:latin typeface="Swis721 Cn BT"/>
+              </a:rPr>
+              <a:t>discrepancias</a:t>
+            </a:r>
+            <a:r>
+              <a:rPr sz="1050" b="0" i="0" dirty="0">
+                <a:solidFill>
+                  <a:srgbClr val="FFFFFF"/>
+                </a:solidFill>
+                <a:latin typeface="Swis721 Cn BT"/>
+              </a:rPr>
+              <a:t> y </a:t>
+            </a:r>
+            <a:r>
+              <a:rPr sz="1050" b="0" i="0" dirty="0" err="1">
+                <a:solidFill>
+                  <a:srgbClr val="FFFFFF"/>
+                </a:solidFill>
+                <a:latin typeface="Swis721 Cn BT"/>
+              </a:rPr>
+              <a:t>vacíos</a:t>
+            </a:r>
+            <a:r>
+              <a:rPr sz="1050" b="0" i="0" dirty="0">
+                <a:solidFill>
+                  <a:srgbClr val="FFFFFF"/>
+                </a:solidFill>
+                <a:latin typeface="Swis721 Cn BT"/>
+              </a:rPr>
+              <a:t>.</a:t>
             </a:r>
           </a:p>
           <a:p>
@@ -23022,13 +23680,193 @@
               </a:spcAft>
             </a:pPr>
             <a:r>
-              <a:rPr sz="1050" b="0" i="0">
+              <a:rPr sz="1050" b="0" i="0" dirty="0">
                 <a:solidFill>
                   <a:srgbClr val="FFFFFF"/>
                 </a:solidFill>
                 <a:latin typeface="Swis721 Cn BT"/>
               </a:rPr>
-              <a:t>3) Propón un borrador actualizado con objetivo, alcance, responsables, desarrollo, indicador y pauta de supervisión.</a:t>
+              <a:t>3) </a:t>
+            </a:r>
+            <a:r>
+              <a:rPr sz="1050" b="0" i="0" dirty="0" err="1">
+                <a:solidFill>
+                  <a:srgbClr val="FFFFFF"/>
+                </a:solidFill>
+                <a:latin typeface="Swis721 Cn BT"/>
+              </a:rPr>
+              <a:t>Propón</a:t>
+            </a:r>
+            <a:r>
+              <a:rPr sz="1050" b="0" i="0" dirty="0">
+                <a:solidFill>
+                  <a:srgbClr val="FFFFFF"/>
+                </a:solidFill>
+                <a:latin typeface="Swis721 Cn BT"/>
+              </a:rPr>
+              <a:t> un </a:t>
+            </a:r>
+            <a:r>
+              <a:rPr sz="1050" b="0" i="0" dirty="0" err="1">
+                <a:solidFill>
+                  <a:srgbClr val="FFFFFF"/>
+                </a:solidFill>
+                <a:latin typeface="Swis721 Cn BT"/>
+              </a:rPr>
+              <a:t>borrador</a:t>
+            </a:r>
+            <a:r>
+              <a:rPr sz="1050" b="0" i="0" dirty="0">
+                <a:solidFill>
+                  <a:srgbClr val="FFFFFF"/>
+                </a:solidFill>
+                <a:latin typeface="Swis721 Cn BT"/>
+              </a:rPr>
+              <a:t> </a:t>
+            </a:r>
+            <a:r>
+              <a:rPr sz="1050" b="0" i="0" dirty="0" err="1">
+                <a:solidFill>
+                  <a:srgbClr val="FFFFFF"/>
+                </a:solidFill>
+                <a:latin typeface="Swis721 Cn BT"/>
+              </a:rPr>
+              <a:t>actualizado</a:t>
+            </a:r>
+            <a:r>
+              <a:rPr sz="1050" b="0" i="0" dirty="0">
+                <a:solidFill>
+                  <a:srgbClr val="FFFFFF"/>
+                </a:solidFill>
+                <a:latin typeface="Swis721 Cn BT"/>
+              </a:rPr>
+              <a:t> con </a:t>
+            </a:r>
+            <a:r>
+              <a:rPr sz="1050" b="0" i="0" dirty="0" err="1">
+                <a:solidFill>
+                  <a:srgbClr val="FFFFFF"/>
+                </a:solidFill>
+                <a:latin typeface="Swis721 Cn BT"/>
+              </a:rPr>
+              <a:t>objetivo</a:t>
+            </a:r>
+            <a:r>
+              <a:rPr sz="1050" b="0" i="0" dirty="0">
+                <a:solidFill>
+                  <a:srgbClr val="FFFFFF"/>
+                </a:solidFill>
+                <a:latin typeface="Swis721 Cn BT"/>
+              </a:rPr>
+              <a:t>, </a:t>
+            </a:r>
+            <a:r>
+              <a:rPr sz="1050" b="0" i="0" dirty="0" err="1">
+                <a:solidFill>
+                  <a:srgbClr val="FFFFFF"/>
+                </a:solidFill>
+                <a:latin typeface="Swis721 Cn BT"/>
+              </a:rPr>
+              <a:t>alcance</a:t>
+            </a:r>
+            <a:r>
+              <a:rPr sz="1050" b="0" i="0" dirty="0">
+                <a:solidFill>
+                  <a:srgbClr val="FFFFFF"/>
+                </a:solidFill>
+                <a:latin typeface="Swis721 Cn BT"/>
+              </a:rPr>
+              <a:t>, </a:t>
+            </a:r>
+            <a:r>
+              <a:rPr sz="1050" b="0" i="0" dirty="0" err="1">
+                <a:solidFill>
+                  <a:srgbClr val="FFFFFF"/>
+                </a:solidFill>
+                <a:latin typeface="Swis721 Cn BT"/>
+              </a:rPr>
+              <a:t>responsables</a:t>
+            </a:r>
+            <a:r>
+              <a:rPr sz="1050" b="0" i="0" dirty="0">
+                <a:solidFill>
+                  <a:srgbClr val="FFFFFF"/>
+                </a:solidFill>
+                <a:latin typeface="Swis721 Cn BT"/>
+              </a:rPr>
+              <a:t>, </a:t>
+            </a:r>
+            <a:r>
+              <a:rPr sz="1050" b="0" i="0" dirty="0" err="1">
+                <a:solidFill>
+                  <a:srgbClr val="FFFFFF"/>
+                </a:solidFill>
+                <a:latin typeface="Swis721 Cn BT"/>
+              </a:rPr>
+              <a:t>desarrollo</a:t>
+            </a:r>
+            <a:r>
+              <a:rPr sz="1050" b="0" i="0" dirty="0">
+                <a:solidFill>
+                  <a:srgbClr val="FFFFFF"/>
+                </a:solidFill>
+                <a:latin typeface="Swis721 Cn BT"/>
+              </a:rPr>
+              <a:t>, </a:t>
+            </a:r>
+            <a:r>
+              <a:rPr sz="1050" b="0" i="0" dirty="0" err="1">
+                <a:solidFill>
+                  <a:srgbClr val="FFFFFF"/>
+                </a:solidFill>
+                <a:latin typeface="Swis721 Cn BT"/>
+              </a:rPr>
+              <a:t>indicador</a:t>
+            </a:r>
+            <a:r>
+              <a:rPr sz="1050" b="0" i="0" dirty="0">
+                <a:solidFill>
+                  <a:srgbClr val="FFFFFF"/>
+                </a:solidFill>
+                <a:latin typeface="Swis721 Cn BT"/>
+              </a:rPr>
+              <a:t> y </a:t>
+            </a:r>
+            <a:r>
+              <a:rPr sz="1050" b="0" i="0" dirty="0" err="1">
+                <a:solidFill>
+                  <a:srgbClr val="FFFFFF"/>
+                </a:solidFill>
+                <a:latin typeface="Swis721 Cn BT"/>
+              </a:rPr>
+              <a:t>pauta</a:t>
+            </a:r>
+            <a:r>
+              <a:rPr sz="1050" b="0" i="0" dirty="0">
+                <a:solidFill>
+                  <a:srgbClr val="FFFFFF"/>
+                </a:solidFill>
+                <a:latin typeface="Swis721 Cn BT"/>
+              </a:rPr>
+              <a:t> de </a:t>
+            </a:r>
+            <a:r>
+              <a:rPr sz="1050" b="0" i="0" dirty="0" err="1">
+                <a:solidFill>
+                  <a:srgbClr val="FFFFFF"/>
+                </a:solidFill>
+                <a:latin typeface="Swis721 Cn BT"/>
+              </a:rPr>
+              <a:t>supervisión</a:t>
+            </a:r>
+            <a:r>
+              <a:rPr sz="1050" b="0" i="0" dirty="0">
+                <a:solidFill>
+                  <a:srgbClr val="FFFFFF"/>
+                </a:solidFill>
+                <a:latin typeface="Swis721 Cn BT"/>
+              </a:rPr>
+              <a:t>.</a:t>
             </a:r>
           </a:p>
           <a:p>
@@ -23038,13 +23876,193 @@
               </a:spcAft>
             </a:pPr>
             <a:r>
-              <a:rPr sz="1050" b="0" i="0">
+              <a:rPr sz="1050" b="0" i="0" dirty="0">
                 <a:solidFill>
                   <a:srgbClr val="FFFFFF"/>
                 </a:solidFill>
                 <a:latin typeface="Swis721 Cn BT"/>
               </a:rPr>
-              <a:t>Usa solo los adjuntos. Marca [VERIFICAR] lo que no puedas respaldar con una página. No agregues referencias externas.</a:t>
+              <a:t>Usa solo </a:t>
+            </a:r>
+            <a:r>
+              <a:rPr sz="1050" b="0" i="0" dirty="0" err="1">
+                <a:solidFill>
+                  <a:srgbClr val="FFFFFF"/>
+                </a:solidFill>
+                <a:latin typeface="Swis721 Cn BT"/>
+              </a:rPr>
+              <a:t>los</a:t>
+            </a:r>
+            <a:r>
+              <a:rPr sz="1050" b="0" i="0" dirty="0">
+                <a:solidFill>
+                  <a:srgbClr val="FFFFFF"/>
+                </a:solidFill>
+                <a:latin typeface="Swis721 Cn BT"/>
+              </a:rPr>
+              <a:t> </a:t>
+            </a:r>
+            <a:r>
+              <a:rPr sz="1050" b="0" i="0" dirty="0" err="1">
+                <a:solidFill>
+                  <a:srgbClr val="FFFFFF"/>
+                </a:solidFill>
+                <a:latin typeface="Swis721 Cn BT"/>
+              </a:rPr>
+              <a:t>adjuntos</a:t>
+            </a:r>
+            <a:r>
+              <a:rPr sz="1050" b="0" i="0" dirty="0">
+                <a:solidFill>
+                  <a:srgbClr val="FFFFFF"/>
+                </a:solidFill>
+                <a:latin typeface="Swis721 Cn BT"/>
+              </a:rPr>
+              <a:t>. Marca [VERIFICAR] lo </a:t>
+            </a:r>
+            <a:r>
+              <a:rPr sz="1050" b="0" i="0" dirty="0" err="1">
+                <a:solidFill>
+                  <a:srgbClr val="FFFFFF"/>
+                </a:solidFill>
+                <a:latin typeface="Swis721 Cn BT"/>
+              </a:rPr>
+              <a:t>que</a:t>
+            </a:r>
+            <a:r>
+              <a:rPr sz="1050" b="0" i="0" dirty="0">
+                <a:solidFill>
+                  <a:srgbClr val="FFFFFF"/>
+                </a:solidFill>
+                <a:latin typeface="Swis721 Cn BT"/>
+              </a:rPr>
+              <a:t> no </a:t>
+            </a:r>
+            <a:r>
+              <a:rPr sz="1050" b="0" i="0" dirty="0" err="1">
+                <a:solidFill>
+                  <a:srgbClr val="FFFFFF"/>
+                </a:solidFill>
+                <a:latin typeface="Swis721 Cn BT"/>
+              </a:rPr>
+              <a:t>puedas</a:t>
+            </a:r>
+            <a:r>
+              <a:rPr sz="1050" b="0" i="0" dirty="0">
+                <a:solidFill>
+                  <a:srgbClr val="FFFFFF"/>
+                </a:solidFill>
+                <a:latin typeface="Swis721 Cn BT"/>
+              </a:rPr>
+              <a:t> </a:t>
+            </a:r>
+            <a:r>
+              <a:rPr sz="1050" b="0" i="0" dirty="0" err="1">
+                <a:solidFill>
+                  <a:srgbClr val="FFFFFF"/>
+                </a:solidFill>
+                <a:latin typeface="Swis721 Cn BT"/>
+              </a:rPr>
+              <a:t>respaldar</a:t>
+            </a:r>
+            <a:r>
+              <a:rPr sz="1050" b="0" i="0" dirty="0">
+                <a:solidFill>
+                  <a:srgbClr val="FFFFFF"/>
+                </a:solidFill>
+                <a:latin typeface="Swis721 Cn BT"/>
+              </a:rPr>
+              <a:t> con </a:t>
+            </a:r>
+            <a:r>
+              <a:rPr sz="1050" b="0" i="0" dirty="0" err="1">
+                <a:solidFill>
+                  <a:srgbClr val="FFFFFF"/>
+                </a:solidFill>
+                <a:latin typeface="Swis721 Cn BT"/>
+              </a:rPr>
+              <a:t>una</a:t>
+            </a:r>
+            <a:r>
+              <a:rPr sz="1050" b="0" i="0" dirty="0">
+                <a:solidFill>
+                  <a:srgbClr val="FFFFFF"/>
+                </a:solidFill>
+                <a:latin typeface="Swis721 Cn BT"/>
+              </a:rPr>
+              <a:t> </a:t>
+            </a:r>
+            <a:r>
+              <a:rPr sz="1050" b="0" i="0" dirty="0" err="1">
+                <a:solidFill>
+                  <a:srgbClr val="FFFFFF"/>
+                </a:solidFill>
+                <a:latin typeface="Swis721 Cn BT"/>
+              </a:rPr>
+              <a:t>página</a:t>
+            </a:r>
+            <a:r>
+              <a:rPr sz="1050" b="0" i="0" dirty="0">
+                <a:solidFill>
+                  <a:srgbClr val="FFFFFF"/>
+                </a:solidFill>
+                <a:latin typeface="Swis721 Cn BT"/>
+              </a:rPr>
+              <a:t>. No </a:t>
+            </a:r>
+            <a:r>
+              <a:rPr sz="1050" b="0" i="0" dirty="0" err="1">
+                <a:solidFill>
+                  <a:srgbClr val="FFFFFF"/>
+                </a:solidFill>
+                <a:latin typeface="Swis721 Cn BT"/>
+              </a:rPr>
+              <a:t>agregues</a:t>
+            </a:r>
+            <a:r>
+              <a:rPr sz="1050" b="0" i="0" dirty="0">
+                <a:solidFill>
+                  <a:srgbClr val="FFFFFF"/>
+                </a:solidFill>
+                <a:latin typeface="Swis721 Cn BT"/>
+              </a:rPr>
+              <a:t> </a:t>
+            </a:r>
+            <a:r>
+              <a:rPr sz="1050" b="0" i="0" dirty="0" err="1">
+                <a:solidFill>
+                  <a:srgbClr val="FFFFFF"/>
+                </a:solidFill>
+                <a:latin typeface="Swis721 Cn BT"/>
+              </a:rPr>
+              <a:t>referencias</a:t>
+            </a:r>
+            <a:r>
+              <a:rPr sz="1050" b="0" i="0" dirty="0">
+                <a:solidFill>
+                  <a:srgbClr val="FFFFFF"/>
+                </a:solidFill>
+                <a:latin typeface="Swis721 Cn BT"/>
+              </a:rPr>
+              <a:t> </a:t>
+            </a:r>
+            <a:r>
+              <a:rPr sz="1050" b="0" i="0" dirty="0" err="1">
+                <a:solidFill>
+                  <a:srgbClr val="FFFFFF"/>
+                </a:solidFill>
+                <a:latin typeface="Swis721 Cn BT"/>
+              </a:rPr>
+              <a:t>externas</a:t>
+            </a:r>
+            <a:r>
+              <a:rPr sz="1050" b="0" i="0" dirty="0">
+                <a:solidFill>
+                  <a:srgbClr val="FFFFFF"/>
+                </a:solidFill>
+                <a:latin typeface="Swis721 Cn BT"/>
+              </a:rPr>
+              <a:t>.</a:t>
             </a:r>
           </a:p>
         </p:txBody>
@@ -23057,8 +24075,8 @@
 </p:sld>
 </file>
 
-<file path=ppt/slides/slide28.xml><?xml version="1.0" encoding="utf-8"?>
-<p:sld xmlns:a="http://schemas.openxmlformats.org/drawingml/2006/main" xmlns:r="http://schemas.openxmlformats.org/officeDocument/2006/relationships" xmlns:p="http://schemas.openxmlformats.org/presentationml/2006/main">
+<file path=ppt/slides/slide29.xml><?xml version="1.0" encoding="utf-8"?>
+<p:sld xmlns:a="http://schemas.openxmlformats.org/drawingml/2006/main" xmlns:r="http://schemas.openxmlformats.org/officeDocument/2006/relationships" xmlns:p="http://schemas.openxmlformats.org/presentationml/2006/main" show="0">
   <p:cSld>
     <p:spTree>
       <p:nvGrpSpPr>
@@ -23910,12 +24928,18 @@
 </p:sld>
 </file>
 
-<file path=ppt/slides/slide29.xml><?xml version="1.0" encoding="utf-8"?>
+<file path=ppt/slides/slide3.xml><?xml version="1.0" encoding="utf-8"?>
 <p:sld xmlns:a="http://schemas.openxmlformats.org/drawingml/2006/main" xmlns:r="http://schemas.openxmlformats.org/officeDocument/2006/relationships" xmlns:p="http://schemas.openxmlformats.org/presentationml/2006/main">
   <p:cSld>
     <p:spTree>
       <p:nvGrpSpPr>
-        <p:cNvPr id="1" name=""/>
+        <p:cNvPr id="1" name="">
+          <a:extLst>
+            <a:ext uri="{FF2B5EF4-FFF2-40B4-BE49-F238E27FC236}">
+              <a16:creationId xmlns:a16="http://schemas.microsoft.com/office/drawing/2014/main" id="{3490C6A5-A10A-1803-4D0A-EA4CE4FA9388}"/>
+            </a:ext>
+          </a:extLst>
+        </p:cNvPr>
         <p:cNvGrpSpPr/>
         <p:nvPr/>
       </p:nvGrpSpPr>
@@ -23929,7 +24953,13 @@
       </p:grpSpPr>
       <p:sp>
         <p:nvSpPr>
-          <p:cNvPr id="2" name="Title 1"/>
+          <p:cNvPr id="2" name="Title 1">
+            <a:extLst>
+              <a:ext uri="{FF2B5EF4-FFF2-40B4-BE49-F238E27FC236}">
+                <a16:creationId xmlns:a16="http://schemas.microsoft.com/office/drawing/2014/main" id="{DBBC24D6-FF27-0482-50CC-8F1B8C24D92B}"/>
+              </a:ext>
+            </a:extLst>
+          </p:cNvPr>
           <p:cNvSpPr>
             <a:spLocks noGrp="1"/>
           </p:cNvSpPr>
@@ -23943,25 +24973,112 @@
           <a:lstStyle/>
           <a:p>
             <a:r>
-              <a:t>Tres ideas para llevar</a:t>
-            </a:r>
-          </a:p>
-        </p:txBody>
-      </p:sp>
-      <p:sp>
-        <p:nvSpPr>
-          <p:cNvPr id="3" name="Rounded Rectangle 2"/>
+              <a:rPr dirty="0"/>
+              <a:t>La </a:t>
+            </a:r>
+            <a:r>
+              <a:rPr dirty="0" err="1"/>
+              <a:t>evidencia</a:t>
+            </a:r>
+            <a:r>
+              <a:rPr dirty="0"/>
+              <a:t> </a:t>
+            </a:r>
+            <a:r>
+              <a:rPr dirty="0" err="1"/>
+              <a:t>sobre</a:t>
+            </a:r>
+            <a:r>
+              <a:rPr dirty="0"/>
+              <a:t> IA </a:t>
+            </a:r>
+            <a:r>
+              <a:rPr dirty="0" err="1"/>
+              <a:t>en</a:t>
+            </a:r>
+            <a:r>
+              <a:rPr dirty="0"/>
+              <a:t> </a:t>
+            </a:r>
+            <a:r>
+              <a:rPr dirty="0" err="1"/>
+              <a:t>matronería</a:t>
+            </a:r>
+            <a:r>
+              <a:rPr dirty="0"/>
+              <a:t> es </a:t>
+            </a:r>
+            <a:r>
+              <a:rPr dirty="0" err="1"/>
+              <a:t>incipiente</a:t>
+            </a:r>
+            <a:endParaRPr dirty="0"/>
+          </a:p>
+        </p:txBody>
+      </p:sp>
+      <p:sp>
+        <p:nvSpPr>
+          <p:cNvPr id="4" name="Text Placeholder 3">
+            <a:extLst>
+              <a:ext uri="{FF2B5EF4-FFF2-40B4-BE49-F238E27FC236}">
+                <a16:creationId xmlns:a16="http://schemas.microsoft.com/office/drawing/2014/main" id="{1E81522F-1D85-2C6E-21F0-468816FD55F5}"/>
+              </a:ext>
+            </a:extLst>
+          </p:cNvPr>
+          <p:cNvSpPr>
+            <a:spLocks noGrp="1"/>
+          </p:cNvSpPr>
+          <p:nvPr>
+            <p:ph type="body" sz="quarter" idx="11"/>
+          </p:nvPr>
+        </p:nvSpPr>
+        <p:spPr>
+          <a:xfrm>
+            <a:off x="1618488" y="4480560"/>
+            <a:ext cx="4983480" cy="457200"/>
+          </a:xfrm>
+        </p:spPr>
+        <p:txBody>
+          <a:bodyPr/>
+          <a:lstStyle/>
+          <a:p>
+            <a:pPr algn="l">
+              <a:spcAft>
+                <a:spcPts val="0"/>
+              </a:spcAft>
+            </a:pPr>
+            <a:r>
+              <a:rPr sz="900" b="0" i="0">
+                <a:solidFill>
+                  <a:srgbClr val="003C58"/>
+                </a:solidFill>
+                <a:latin typeface="Swis721 Cn BT"/>
+              </a:rPr>
+              <a:t>Fuentes: [1] Giaxi et al., Cureus 2025 · [2] Giaxi et al., Healthcare 2025 · [3] Unlu Bidik, 2025 · [4] Kranz y Abele, 2024</a:t>
+            </a:r>
+          </a:p>
+        </p:txBody>
+      </p:sp>
+      <p:sp>
+        <p:nvSpPr>
+          <p:cNvPr id="10" name="Rounded Rectangle 9">
+            <a:extLst>
+              <a:ext uri="{FF2B5EF4-FFF2-40B4-BE49-F238E27FC236}">
+                <a16:creationId xmlns:a16="http://schemas.microsoft.com/office/drawing/2014/main" id="{F1153D4E-653C-FE68-907F-0E2883F81584}"/>
+              </a:ext>
+            </a:extLst>
+          </p:cNvPr>
           <p:cNvSpPr/>
           <p:nvPr/>
         </p:nvSpPr>
         <p:spPr>
           <a:xfrm>
-            <a:off x="502920" y="868680"/>
-            <a:ext cx="8138159" cy="960120"/>
+            <a:off x="3268980" y="868680"/>
+            <a:ext cx="2606040" cy="2377440"/>
           </a:xfrm>
           <a:prstGeom prst="roundRect">
             <a:avLst>
-              <a:gd name="adj" fmla="val 11428"/>
+              <a:gd name="adj" fmla="val 4615"/>
             </a:avLst>
           </a:prstGeom>
           <a:solidFill>
@@ -23982,14 +25099,20 @@
       </p:sp>
       <p:sp>
         <p:nvSpPr>
-          <p:cNvPr id="4" name="TextBox 3"/>
+          <p:cNvPr id="11" name="TextBox 10">
+            <a:extLst>
+              <a:ext uri="{FF2B5EF4-FFF2-40B4-BE49-F238E27FC236}">
+                <a16:creationId xmlns:a16="http://schemas.microsoft.com/office/drawing/2014/main" id="{DDA8AABB-E9D2-A334-909B-2776D29D8659}"/>
+              </a:ext>
+            </a:extLst>
+          </p:cNvPr>
           <p:cNvSpPr txBox="1"/>
           <p:nvPr/>
         </p:nvSpPr>
         <p:spPr>
           <a:xfrm>
-            <a:off x="731520" y="868680"/>
-            <a:ext cx="914400" cy="960120"/>
+            <a:off x="3470148" y="978407"/>
+            <a:ext cx="2194560" cy="685800"/>
           </a:xfrm>
           <a:prstGeom prst="rect">
             <a:avLst/>
@@ -23997,7 +25120,7 @@
           <a:noFill/>
         </p:spPr>
         <p:txBody>
-          <a:bodyPr wrap="square" lIns="0" tIns="0" rIns="0" bIns="0" anchor="ctr">
+          <a:bodyPr wrap="square" lIns="0" tIns="0" rIns="0" bIns="0" anchor="t">
             <a:noAutofit/>
           </a:bodyPr>
           <a:lstStyle/>
@@ -24008,27 +25131,33 @@
               </a:spcAft>
             </a:pPr>
             <a:r>
-              <a:rPr sz="4400" b="1" i="0">
+              <a:rPr sz="4000" b="1" i="0">
                 <a:solidFill>
                   <a:srgbClr val="BF210C"/>
                 </a:solidFill>
                 <a:latin typeface="Swis721 Cn BT"/>
               </a:rPr>
-              <a:t>1</a:t>
-            </a:r>
-          </a:p>
-        </p:txBody>
-      </p:sp>
-      <p:sp>
-        <p:nvSpPr>
-          <p:cNvPr id="5" name="TextBox 4"/>
+              <a:t>8</a:t>
+            </a:r>
+          </a:p>
+        </p:txBody>
+      </p:sp>
+      <p:sp>
+        <p:nvSpPr>
+          <p:cNvPr id="12" name="TextBox 11">
+            <a:extLst>
+              <a:ext uri="{FF2B5EF4-FFF2-40B4-BE49-F238E27FC236}">
+                <a16:creationId xmlns:a16="http://schemas.microsoft.com/office/drawing/2014/main" id="{95D81DBA-05F2-4D7C-D74F-A8E728480C4E}"/>
+              </a:ext>
+            </a:extLst>
+          </p:cNvPr>
           <p:cNvSpPr txBox="1"/>
           <p:nvPr/>
         </p:nvSpPr>
         <p:spPr>
           <a:xfrm>
-            <a:off x="1600200" y="868680"/>
-            <a:ext cx="6858000" cy="960120"/>
+            <a:off x="3470148" y="1673352"/>
+            <a:ext cx="2240280" cy="292608"/>
           </a:xfrm>
           <a:prstGeom prst="rect">
             <a:avLst/>
@@ -24036,7 +25165,7 @@
           <a:noFill/>
         </p:spPr>
         <p:txBody>
-          <a:bodyPr wrap="square" lIns="0" tIns="0" rIns="0" bIns="0" anchor="ctr">
+          <a:bodyPr wrap="square" lIns="0" tIns="0" rIns="0" bIns="0" anchor="t">
             <a:noAutofit/>
           </a:bodyPr>
           <a:lstStyle/>
@@ -24047,50 +25176,164 @@
               </a:spcAft>
             </a:pPr>
             <a:r>
-              <a:rPr sz="1900" b="0" i="0">
+              <a:rPr sz="1400" b="1" i="0">
                 <a:solidFill>
                   <a:srgbClr val="003C58"/>
                 </a:solidFill>
                 <a:latin typeface="Swis721 Cn BT"/>
               </a:rPr>
-              <a:t>La IA predice texto plausible; </a:t>
-            </a:r>
-            <a:r>
-              <a:rPr sz="1900" b="1" i="0">
-                <a:solidFill>
-                  <a:srgbClr val="BF210C"/>
-                </a:solidFill>
-                <a:latin typeface="Swis721 Cn BT"/>
-              </a:rPr>
-              <a:t>la verdad clínica la pones tú</a:t>
-            </a:r>
-            <a:r>
-              <a:rPr sz="1900" b="0" i="0">
-                <a:solidFill>
-                  <a:srgbClr val="003C58"/>
-                </a:solidFill>
-                <a:latin typeface="Swis721 Cn BT"/>
-              </a:rPr>
-              <a:t>.</a:t>
-            </a:r>
-          </a:p>
-        </p:txBody>
-      </p:sp>
-      <p:sp>
-        <p:nvSpPr>
-          <p:cNvPr id="6" name="Rounded Rectangle 5"/>
+              <a:t>estudios en matronería</a:t>
+            </a:r>
+          </a:p>
+        </p:txBody>
+      </p:sp>
+      <p:sp>
+        <p:nvSpPr>
+          <p:cNvPr id="13" name="TextBox 12">
+            <a:extLst>
+              <a:ext uri="{FF2B5EF4-FFF2-40B4-BE49-F238E27FC236}">
+                <a16:creationId xmlns:a16="http://schemas.microsoft.com/office/drawing/2014/main" id="{8AE87791-7907-6CF7-486A-10815160E9D2}"/>
+              </a:ext>
+            </a:extLst>
+          </p:cNvPr>
+          <p:cNvSpPr txBox="1"/>
+          <p:nvPr/>
+        </p:nvSpPr>
+        <p:spPr>
+          <a:xfrm>
+            <a:off x="3470148" y="1984248"/>
+            <a:ext cx="2240280" cy="914400"/>
+          </a:xfrm>
+          <a:prstGeom prst="rect">
+            <a:avLst/>
+          </a:prstGeom>
+          <a:noFill/>
+        </p:spPr>
+        <p:txBody>
+          <a:bodyPr wrap="square" lIns="0" tIns="0" rIns="0" bIns="0" anchor="t">
+            <a:noAutofit/>
+          </a:bodyPr>
+          <a:lstStyle/>
+          <a:p>
+            <a:pPr algn="l">
+              <a:spcAft>
+                <a:spcPts val="0"/>
+              </a:spcAft>
+            </a:pPr>
+            <a:r>
+              <a:rPr sz="1150" b="0" i="0">
+                <a:solidFill>
+                  <a:srgbClr val="1F2A30"/>
+                </a:solidFill>
+                <a:latin typeface="Swis721 Cn BT"/>
+              </a:rPr>
+              <a:t>en una revisión de alcance, todos de un mismo país. Actitud positiva, junto al temor de perder la empatía y el trato humano.</a:t>
+            </a:r>
+          </a:p>
+        </p:txBody>
+      </p:sp>
+      <p:sp>
+        <p:nvSpPr>
+          <p:cNvPr id="14" name="TextBox 13">
+            <a:extLst>
+              <a:ext uri="{FF2B5EF4-FFF2-40B4-BE49-F238E27FC236}">
+                <a16:creationId xmlns:a16="http://schemas.microsoft.com/office/drawing/2014/main" id="{9BF235EE-CEEE-EB4A-3DA7-05432A22FC61}"/>
+              </a:ext>
+            </a:extLst>
+          </p:cNvPr>
+          <p:cNvSpPr txBox="1"/>
+          <p:nvPr/>
+        </p:nvSpPr>
+        <p:spPr>
+          <a:xfrm>
+            <a:off x="3470148" y="2898648"/>
+            <a:ext cx="2240280" cy="256032"/>
+          </a:xfrm>
+          <a:prstGeom prst="rect">
+            <a:avLst/>
+          </a:prstGeom>
+          <a:noFill/>
+        </p:spPr>
+        <p:txBody>
+          <a:bodyPr wrap="square" lIns="0" tIns="0" rIns="0" bIns="0" anchor="t">
+            <a:noAutofit/>
+          </a:bodyPr>
+          <a:lstStyle/>
+          <a:p>
+            <a:pPr algn="l">
+              <a:spcAft>
+                <a:spcPts val="0"/>
+              </a:spcAft>
+            </a:pPr>
+            <a:r>
+              <a:rPr sz="1000" b="0" i="1">
+                <a:solidFill>
+                  <a:srgbClr val="5B6B73"/>
+                </a:solidFill>
+                <a:latin typeface="Swis721 Cn BT"/>
+              </a:rPr>
+              <a:t>Revisión de alcance · Healthcare 2025</a:t>
+            </a:r>
+          </a:p>
+        </p:txBody>
+      </p:sp>
+      <p:sp>
+        <p:nvSpPr>
+          <p:cNvPr id="20" name="Rounded Rectangle 19">
+            <a:extLst>
+              <a:ext uri="{FF2B5EF4-FFF2-40B4-BE49-F238E27FC236}">
+                <a16:creationId xmlns:a16="http://schemas.microsoft.com/office/drawing/2014/main" id="{55891791-088E-2487-3205-7BE2F48F050F}"/>
+              </a:ext>
+            </a:extLst>
+          </p:cNvPr>
           <p:cNvSpPr/>
           <p:nvPr/>
         </p:nvSpPr>
         <p:spPr>
           <a:xfrm>
-            <a:off x="502920" y="1947672"/>
-            <a:ext cx="8138159" cy="960120"/>
+            <a:off x="502920" y="3401568"/>
+            <a:ext cx="8138159" cy="667512"/>
           </a:xfrm>
           <a:prstGeom prst="roundRect">
             <a:avLst>
-              <a:gd name="adj" fmla="val 11428"/>
+              <a:gd name="adj" fmla="val 13698"/>
             </a:avLst>
+          </a:prstGeom>
+          <a:solidFill>
+            <a:srgbClr val="FFF3C4"/>
+          </a:solidFill>
+          <a:ln>
+            <a:noFill/>
+          </a:ln>
+        </p:spPr>
+        <p:txBody>
+          <a:bodyPr rtlCol="0" anchor="ctr"/>
+          <a:lstStyle/>
+          <a:p>
+            <a:pPr algn="ctr"/>
+            <a:endParaRPr/>
+          </a:p>
+        </p:txBody>
+      </p:sp>
+      <p:sp>
+        <p:nvSpPr>
+          <p:cNvPr id="21" name="Oval 20">
+            <a:extLst>
+              <a:ext uri="{FF2B5EF4-FFF2-40B4-BE49-F238E27FC236}">
+                <a16:creationId xmlns:a16="http://schemas.microsoft.com/office/drawing/2014/main" id="{6A123172-0F07-711D-B8D5-FFC7C2D4DCE1}"/>
+              </a:ext>
+            </a:extLst>
+          </p:cNvPr>
+          <p:cNvSpPr/>
+          <p:nvPr/>
+        </p:nvSpPr>
+        <p:spPr>
+          <a:xfrm>
+            <a:off x="658368" y="3506724"/>
+            <a:ext cx="457200" cy="457200"/>
+          </a:xfrm>
+          <a:prstGeom prst="ellipse">
+            <a:avLst/>
           </a:prstGeom>
           <a:solidFill>
             <a:srgbClr val="003C58"/>
@@ -24108,1077 +25351,15 @@
           </a:p>
         </p:txBody>
       </p:sp>
-      <p:sp>
-        <p:nvSpPr>
-          <p:cNvPr id="7" name="TextBox 6"/>
-          <p:cNvSpPr txBox="1"/>
-          <p:nvPr/>
-        </p:nvSpPr>
-        <p:spPr>
-          <a:xfrm>
-            <a:off x="731520" y="1947672"/>
-            <a:ext cx="914400" cy="960120"/>
-          </a:xfrm>
-          <a:prstGeom prst="rect">
-            <a:avLst/>
-          </a:prstGeom>
-          <a:noFill/>
-        </p:spPr>
-        <p:txBody>
-          <a:bodyPr wrap="square" lIns="0" tIns="0" rIns="0" bIns="0" anchor="ctr">
-            <a:noAutofit/>
-          </a:bodyPr>
-          <a:lstStyle/>
-          <a:p>
-            <a:pPr algn="l">
-              <a:spcAft>
-                <a:spcPts val="0"/>
-              </a:spcAft>
-            </a:pPr>
-            <a:r>
-              <a:rPr sz="4400" b="1" i="0" dirty="0">
-                <a:solidFill>
-                  <a:schemeClr val="bg1"/>
-                </a:solidFill>
-                <a:latin typeface="Swis721 Cn BT"/>
-              </a:rPr>
-              <a:t>2</a:t>
-            </a:r>
-          </a:p>
-        </p:txBody>
-      </p:sp>
-      <p:sp>
-        <p:nvSpPr>
-          <p:cNvPr id="8" name="TextBox 7"/>
-          <p:cNvSpPr txBox="1"/>
-          <p:nvPr/>
-        </p:nvSpPr>
-        <p:spPr>
-          <a:xfrm>
-            <a:off x="1600200" y="1947672"/>
-            <a:ext cx="6858000" cy="960120"/>
-          </a:xfrm>
-          <a:prstGeom prst="rect">
-            <a:avLst/>
-          </a:prstGeom>
-          <a:noFill/>
-        </p:spPr>
-        <p:txBody>
-          <a:bodyPr wrap="square" lIns="0" tIns="0" rIns="0" bIns="0" anchor="ctr">
-            <a:noAutofit/>
-          </a:bodyPr>
-          <a:lstStyle/>
-          <a:p>
-            <a:pPr algn="l">
-              <a:spcAft>
-                <a:spcPts val="0"/>
-              </a:spcAft>
-            </a:pPr>
-            <a:r>
-              <a:rPr sz="1900" b="1" i="0" dirty="0" err="1">
-                <a:solidFill>
-                  <a:srgbClr val="FFFFFF"/>
-                </a:solidFill>
-                <a:latin typeface="Swis721 Cn BT"/>
-              </a:rPr>
-              <a:t>Método</a:t>
-            </a:r>
-            <a:r>
-              <a:rPr sz="1900" b="1" i="0" dirty="0">
-                <a:solidFill>
-                  <a:srgbClr val="FFFFFF"/>
-                </a:solidFill>
-                <a:latin typeface="Swis721 Cn BT"/>
-              </a:rPr>
-              <a:t> antes </a:t>
-            </a:r>
-            <a:r>
-              <a:rPr sz="1900" b="1" i="0" dirty="0" err="1">
-                <a:solidFill>
-                  <a:srgbClr val="FFFFFF"/>
-                </a:solidFill>
-                <a:latin typeface="Swis721 Cn BT"/>
-              </a:rPr>
-              <a:t>que</a:t>
-            </a:r>
-            <a:r>
-              <a:rPr sz="1900" b="1" i="0" dirty="0">
-                <a:solidFill>
-                  <a:srgbClr val="FFFFFF"/>
-                </a:solidFill>
-                <a:latin typeface="Swis721 Cn BT"/>
-              </a:rPr>
-              <a:t> </a:t>
-            </a:r>
-            <a:r>
-              <a:rPr sz="1900" b="1" i="0" dirty="0" err="1">
-                <a:solidFill>
-                  <a:srgbClr val="FFFFFF"/>
-                </a:solidFill>
-                <a:latin typeface="Swis721 Cn BT"/>
-              </a:rPr>
-              <a:t>marca</a:t>
-            </a:r>
-            <a:r>
-              <a:rPr sz="1900" b="1" i="0" dirty="0">
-                <a:solidFill>
-                  <a:srgbClr val="FFFFFF"/>
-                </a:solidFill>
-                <a:latin typeface="Swis721 Cn BT"/>
-              </a:rPr>
-              <a:t>: </a:t>
-            </a:r>
-            <a:r>
-              <a:rPr sz="1900" b="1" i="0" dirty="0" err="1">
-                <a:solidFill>
-                  <a:srgbClr val="FFFFFF"/>
-                </a:solidFill>
-                <a:latin typeface="Swis721 Cn BT"/>
-              </a:rPr>
-              <a:t>fuentes</a:t>
-            </a:r>
-            <a:r>
-              <a:rPr sz="1900" b="1" i="0" dirty="0">
-                <a:solidFill>
-                  <a:srgbClr val="FFFFFF"/>
-                </a:solidFill>
-                <a:latin typeface="Swis721 Cn BT"/>
-              </a:rPr>
-              <a:t> + </a:t>
-            </a:r>
-            <a:r>
-              <a:rPr sz="1900" b="1" i="0" dirty="0">
-                <a:solidFill>
-                  <a:srgbClr val="FFC000"/>
-                </a:solidFill>
-                <a:latin typeface="Swis721 Cn BT"/>
-              </a:rPr>
-              <a:t>PARTO</a:t>
-            </a:r>
-            <a:r>
-              <a:rPr sz="1900" b="1" i="0" dirty="0">
-                <a:solidFill>
-                  <a:srgbClr val="FFFFFF"/>
-                </a:solidFill>
-                <a:latin typeface="Swis721 Cn BT"/>
-              </a:rPr>
-              <a:t> + </a:t>
-            </a:r>
-            <a:r>
-              <a:rPr sz="1900" b="1" i="0" dirty="0" err="1">
-                <a:solidFill>
-                  <a:srgbClr val="FFFFFF"/>
-                </a:solidFill>
-                <a:latin typeface="Swis721 Cn BT"/>
-              </a:rPr>
-              <a:t>verificación</a:t>
-            </a:r>
-            <a:r>
-              <a:rPr sz="1900" b="1" i="0" dirty="0">
-                <a:solidFill>
-                  <a:srgbClr val="FFFFFF"/>
-                </a:solidFill>
-                <a:latin typeface="Swis721 Cn BT"/>
-              </a:rPr>
-              <a:t> </a:t>
-            </a:r>
-            <a:r>
-              <a:rPr sz="1900" b="1" i="0" dirty="0" err="1">
-                <a:solidFill>
-                  <a:srgbClr val="FFFFFF"/>
-                </a:solidFill>
-                <a:latin typeface="Swis721 Cn BT"/>
-              </a:rPr>
-              <a:t>funcionan</a:t>
-            </a:r>
-            <a:r>
-              <a:rPr sz="1900" b="1" i="0" dirty="0">
-                <a:solidFill>
-                  <a:srgbClr val="FFFFFF"/>
-                </a:solidFill>
-                <a:latin typeface="Swis721 Cn BT"/>
-              </a:rPr>
-              <a:t> </a:t>
-            </a:r>
-            <a:r>
-              <a:rPr sz="1900" b="1" i="0" dirty="0" err="1">
-                <a:solidFill>
-                  <a:srgbClr val="FFFFFF"/>
-                </a:solidFill>
-                <a:latin typeface="Swis721 Cn BT"/>
-              </a:rPr>
-              <a:t>en</a:t>
-            </a:r>
-            <a:r>
-              <a:rPr sz="1900" b="1" i="0" dirty="0">
-                <a:solidFill>
-                  <a:srgbClr val="FFFFFF"/>
-                </a:solidFill>
-                <a:latin typeface="Swis721 Cn BT"/>
-              </a:rPr>
-              <a:t> </a:t>
-            </a:r>
-            <a:r>
-              <a:rPr sz="1900" b="1" i="0" dirty="0" err="1">
-                <a:solidFill>
-                  <a:srgbClr val="FFFFFF"/>
-                </a:solidFill>
-                <a:latin typeface="Swis721 Cn BT"/>
-              </a:rPr>
-              <a:t>cualquier</a:t>
-            </a:r>
-            <a:r>
-              <a:rPr sz="1900" b="1" i="0" dirty="0">
-                <a:solidFill>
-                  <a:srgbClr val="FFFFFF"/>
-                </a:solidFill>
-                <a:latin typeface="Swis721 Cn BT"/>
-              </a:rPr>
-              <a:t> </a:t>
-            </a:r>
-            <a:r>
-              <a:rPr sz="1900" b="1" i="0" dirty="0" err="1">
-                <a:solidFill>
-                  <a:srgbClr val="FFFFFF"/>
-                </a:solidFill>
-                <a:latin typeface="Swis721 Cn BT"/>
-              </a:rPr>
-              <a:t>modelo</a:t>
-            </a:r>
-            <a:r>
-              <a:rPr sz="1900" b="1" i="0" dirty="0">
-                <a:solidFill>
-                  <a:srgbClr val="FFFFFF"/>
-                </a:solidFill>
-                <a:latin typeface="Swis721 Cn BT"/>
-              </a:rPr>
-              <a:t>.</a:t>
-            </a:r>
-          </a:p>
-        </p:txBody>
-      </p:sp>
-      <p:sp>
-        <p:nvSpPr>
-          <p:cNvPr id="9" name="Rounded Rectangle 8"/>
-          <p:cNvSpPr/>
-          <p:nvPr/>
-        </p:nvSpPr>
-        <p:spPr>
-          <a:xfrm>
-            <a:off x="502920" y="3026663"/>
-            <a:ext cx="8138159" cy="960120"/>
-          </a:xfrm>
-          <a:prstGeom prst="roundRect">
-            <a:avLst>
-              <a:gd name="adj" fmla="val 11428"/>
-            </a:avLst>
-          </a:prstGeom>
-          <a:solidFill>
-            <a:srgbClr val="E8F0F4"/>
-          </a:solidFill>
-          <a:ln>
-            <a:noFill/>
-          </a:ln>
-        </p:spPr>
-        <p:txBody>
-          <a:bodyPr rtlCol="0" anchor="ctr"/>
-          <a:lstStyle/>
-          <a:p>
-            <a:pPr algn="ctr"/>
-            <a:endParaRPr/>
-          </a:p>
-        </p:txBody>
-      </p:sp>
-      <p:sp>
-        <p:nvSpPr>
-          <p:cNvPr id="10" name="TextBox 9"/>
-          <p:cNvSpPr txBox="1"/>
-          <p:nvPr/>
-        </p:nvSpPr>
-        <p:spPr>
-          <a:xfrm>
-            <a:off x="731520" y="3026663"/>
-            <a:ext cx="914400" cy="960120"/>
-          </a:xfrm>
-          <a:prstGeom prst="rect">
-            <a:avLst/>
-          </a:prstGeom>
-          <a:noFill/>
-        </p:spPr>
-        <p:txBody>
-          <a:bodyPr wrap="square" lIns="0" tIns="0" rIns="0" bIns="0" anchor="ctr">
-            <a:noAutofit/>
-          </a:bodyPr>
-          <a:lstStyle/>
-          <a:p>
-            <a:pPr algn="l">
-              <a:spcAft>
-                <a:spcPts val="0"/>
-              </a:spcAft>
-            </a:pPr>
-            <a:r>
-              <a:rPr sz="4400" b="1" i="0">
-                <a:solidFill>
-                  <a:srgbClr val="BF210C"/>
-                </a:solidFill>
-                <a:latin typeface="Swis721 Cn BT"/>
-              </a:rPr>
-              <a:t>3</a:t>
-            </a:r>
-          </a:p>
-        </p:txBody>
-      </p:sp>
-      <p:sp>
-        <p:nvSpPr>
-          <p:cNvPr id="11" name="TextBox 10"/>
-          <p:cNvSpPr txBox="1"/>
-          <p:nvPr/>
-        </p:nvSpPr>
-        <p:spPr>
-          <a:xfrm>
-            <a:off x="1600200" y="3026663"/>
-            <a:ext cx="6858000" cy="960120"/>
-          </a:xfrm>
-          <a:prstGeom prst="rect">
-            <a:avLst/>
-          </a:prstGeom>
-          <a:noFill/>
-        </p:spPr>
-        <p:txBody>
-          <a:bodyPr wrap="square" lIns="0" tIns="0" rIns="0" bIns="0" anchor="ctr">
-            <a:noAutofit/>
-          </a:bodyPr>
-          <a:lstStyle/>
-          <a:p>
-            <a:pPr algn="l">
-              <a:spcAft>
-                <a:spcPts val="0"/>
-              </a:spcAft>
-            </a:pPr>
-            <a:r>
-              <a:rPr sz="1900" b="0" i="0">
-                <a:solidFill>
-                  <a:srgbClr val="003C58"/>
-                </a:solidFill>
-                <a:latin typeface="Swis721 Cn BT"/>
-              </a:rPr>
-              <a:t>Todo lo que produce la IA es un borrador hasta que una matrona lo valida.</a:t>
-            </a:r>
-          </a:p>
-        </p:txBody>
-      </p:sp>
-    </p:spTree>
-  </p:cSld>
-  <p:clrMapOvr>
-    <a:masterClrMapping/>
-  </p:clrMapOvr>
-</p:sld>
-</file>
-
-<file path=ppt/slides/slide3.xml><?xml version="1.0" encoding="utf-8"?>
-<p:sld xmlns:a="http://schemas.openxmlformats.org/drawingml/2006/main" xmlns:r="http://schemas.openxmlformats.org/officeDocument/2006/relationships" xmlns:p="http://schemas.openxmlformats.org/presentationml/2006/main">
-  <p:cSld>
-    <p:spTree>
-      <p:nvGrpSpPr>
-        <p:cNvPr id="1" name=""/>
-        <p:cNvGrpSpPr/>
-        <p:nvPr/>
-      </p:nvGrpSpPr>
-      <p:grpSpPr>
-        <a:xfrm>
-          <a:off x="0" y="0"/>
-          <a:ext cx="0" cy="0"/>
-          <a:chOff x="0" y="0"/>
-          <a:chExt cx="0" cy="0"/>
-        </a:xfrm>
-      </p:grpSpPr>
-      <p:sp>
-        <p:nvSpPr>
-          <p:cNvPr id="2" name="Title 1"/>
-          <p:cNvSpPr>
-            <a:spLocks noGrp="1"/>
-          </p:cNvSpPr>
-          <p:nvPr>
-            <p:ph type="title"/>
-          </p:nvPr>
-        </p:nvSpPr>
-        <p:spPr/>
-        <p:txBody>
-          <a:bodyPr/>
-          <a:lstStyle/>
-          <a:p>
-            <a:r>
-              <a:t>La evidencia sobre IA en matronería es incipiente</a:t>
-            </a:r>
-          </a:p>
-        </p:txBody>
-      </p:sp>
-      <p:sp>
-        <p:nvSpPr>
-          <p:cNvPr id="4" name="Text Placeholder 3"/>
-          <p:cNvSpPr>
-            <a:spLocks noGrp="1"/>
-          </p:cNvSpPr>
-          <p:nvPr>
-            <p:ph type="body" sz="quarter" idx="11"/>
-          </p:nvPr>
-        </p:nvSpPr>
-        <p:spPr>
-          <a:xfrm>
-            <a:off x="1618488" y="4480560"/>
-            <a:ext cx="4983480" cy="457200"/>
-          </a:xfrm>
-        </p:spPr>
-        <p:txBody>
-          <a:bodyPr/>
-          <a:lstStyle/>
-          <a:p>
-            <a:pPr algn="l">
-              <a:spcAft>
-                <a:spcPts val="0"/>
-              </a:spcAft>
-            </a:pPr>
-            <a:r>
-              <a:rPr sz="900" b="0" i="0">
-                <a:solidFill>
-                  <a:srgbClr val="003C58"/>
-                </a:solidFill>
-                <a:latin typeface="Swis721 Cn BT"/>
-              </a:rPr>
-              <a:t>Fuentes: [1] Giaxi et al., Cureus 2025 · [2] Giaxi et al., Healthcare 2025 · [3] Unlu Bidik, 2025 · [4] Kranz y Abele, 2024</a:t>
-            </a:r>
-          </a:p>
-        </p:txBody>
-      </p:sp>
-      <p:sp>
-        <p:nvSpPr>
-          <p:cNvPr id="5" name="Rounded Rectangle 4"/>
-          <p:cNvSpPr/>
-          <p:nvPr/>
-        </p:nvSpPr>
-        <p:spPr>
-          <a:xfrm>
-            <a:off x="502920" y="868680"/>
-            <a:ext cx="2606040" cy="2377440"/>
-          </a:xfrm>
-          <a:prstGeom prst="roundRect">
-            <a:avLst>
-              <a:gd name="adj" fmla="val 4615"/>
-            </a:avLst>
-          </a:prstGeom>
-          <a:solidFill>
-            <a:srgbClr val="E8F0F4"/>
-          </a:solidFill>
-          <a:ln>
-            <a:noFill/>
-          </a:ln>
-        </p:spPr>
-        <p:txBody>
-          <a:bodyPr rtlCol="0" anchor="ctr"/>
-          <a:lstStyle/>
-          <a:p>
-            <a:pPr algn="ctr"/>
-            <a:endParaRPr/>
-          </a:p>
-        </p:txBody>
-      </p:sp>
-      <p:sp>
-        <p:nvSpPr>
-          <p:cNvPr id="6" name="TextBox 5"/>
-          <p:cNvSpPr txBox="1"/>
-          <p:nvPr/>
-        </p:nvSpPr>
-        <p:spPr>
-          <a:xfrm>
-            <a:off x="704088" y="978407"/>
-            <a:ext cx="2194560" cy="685800"/>
-          </a:xfrm>
-          <a:prstGeom prst="rect">
-            <a:avLst/>
-          </a:prstGeom>
-          <a:noFill/>
-        </p:spPr>
-        <p:txBody>
-          <a:bodyPr wrap="square" lIns="0" tIns="0" rIns="0" bIns="0" anchor="t">
-            <a:noAutofit/>
-          </a:bodyPr>
-          <a:lstStyle/>
-          <a:p>
-            <a:pPr algn="l">
-              <a:spcAft>
-                <a:spcPts val="0"/>
-              </a:spcAft>
-            </a:pPr>
-            <a:r>
-              <a:rPr sz="4000" b="1" i="0">
-                <a:solidFill>
-                  <a:srgbClr val="003C58"/>
-                </a:solidFill>
-                <a:latin typeface="Swis721 Cn BT"/>
-              </a:rPr>
-              <a:t>64</a:t>
-            </a:r>
-          </a:p>
-        </p:txBody>
-      </p:sp>
-      <p:sp>
-        <p:nvSpPr>
-          <p:cNvPr id="7" name="TextBox 6"/>
-          <p:cNvSpPr txBox="1"/>
-          <p:nvPr/>
-        </p:nvSpPr>
-        <p:spPr>
-          <a:xfrm>
-            <a:off x="704088" y="1673352"/>
-            <a:ext cx="2240280" cy="292608"/>
-          </a:xfrm>
-          <a:prstGeom prst="rect">
-            <a:avLst/>
-          </a:prstGeom>
-          <a:noFill/>
-        </p:spPr>
-        <p:txBody>
-          <a:bodyPr wrap="square" lIns="0" tIns="0" rIns="0" bIns="0" anchor="t">
-            <a:noAutofit/>
-          </a:bodyPr>
-          <a:lstStyle/>
-          <a:p>
-            <a:pPr algn="l">
-              <a:spcAft>
-                <a:spcPts val="0"/>
-              </a:spcAft>
-            </a:pPr>
-            <a:r>
-              <a:rPr sz="1400" b="1" i="0">
-                <a:solidFill>
-                  <a:srgbClr val="003C58"/>
-                </a:solidFill>
-                <a:latin typeface="Swis721 Cn BT"/>
-              </a:rPr>
-              <a:t>estudios (2022–2025)</a:t>
-            </a:r>
-          </a:p>
-        </p:txBody>
-      </p:sp>
-      <p:sp>
-        <p:nvSpPr>
-          <p:cNvPr id="8" name="TextBox 7"/>
-          <p:cNvSpPr txBox="1"/>
-          <p:nvPr/>
-        </p:nvSpPr>
-        <p:spPr>
-          <a:xfrm>
-            <a:off x="704088" y="1984248"/>
-            <a:ext cx="2240280" cy="914400"/>
-          </a:xfrm>
-          <a:prstGeom prst="rect">
-            <a:avLst/>
-          </a:prstGeom>
-          <a:noFill/>
-        </p:spPr>
-        <p:txBody>
-          <a:bodyPr wrap="square" lIns="0" tIns="0" rIns="0" bIns="0" anchor="t">
-            <a:noAutofit/>
-          </a:bodyPr>
-          <a:lstStyle/>
-          <a:p>
-            <a:pPr algn="l">
-              <a:spcAft>
-                <a:spcPts val="0"/>
-              </a:spcAft>
-            </a:pPr>
-            <a:r>
-              <a:rPr sz="1150" b="0" i="0">
-                <a:solidFill>
-                  <a:srgbClr val="1F2A30"/>
-                </a:solidFill>
-                <a:latin typeface="Swis721 Cn BT"/>
-              </a:rPr>
-              <a:t>sobre IA en obstetricia y matronería: predicción de riesgo, monitorización fetal y resultados neonatales.</a:t>
-            </a:r>
-          </a:p>
-        </p:txBody>
-      </p:sp>
-      <p:sp>
-        <p:nvSpPr>
-          <p:cNvPr id="9" name="TextBox 8"/>
-          <p:cNvSpPr txBox="1"/>
-          <p:nvPr/>
-        </p:nvSpPr>
-        <p:spPr>
-          <a:xfrm>
-            <a:off x="704088" y="2898648"/>
-            <a:ext cx="2240280" cy="256032"/>
-          </a:xfrm>
-          <a:prstGeom prst="rect">
-            <a:avLst/>
-          </a:prstGeom>
-          <a:noFill/>
-        </p:spPr>
-        <p:txBody>
-          <a:bodyPr wrap="square" lIns="0" tIns="0" rIns="0" bIns="0" anchor="t">
-            <a:noAutofit/>
-          </a:bodyPr>
-          <a:lstStyle/>
-          <a:p>
-            <a:pPr algn="l">
-              <a:spcAft>
-                <a:spcPts val="0"/>
-              </a:spcAft>
-            </a:pPr>
-            <a:r>
-              <a:rPr sz="1000" b="0" i="1">
-                <a:solidFill>
-                  <a:srgbClr val="5B6B73"/>
-                </a:solidFill>
-                <a:latin typeface="Swis721 Cn BT"/>
-              </a:rPr>
-              <a:t>Revisión sistemática · Cureus 2025</a:t>
-            </a:r>
-          </a:p>
-        </p:txBody>
-      </p:sp>
-      <p:sp>
-        <p:nvSpPr>
-          <p:cNvPr id="10" name="Rounded Rectangle 9"/>
-          <p:cNvSpPr/>
-          <p:nvPr/>
-        </p:nvSpPr>
-        <p:spPr>
-          <a:xfrm>
-            <a:off x="3268980" y="868680"/>
-            <a:ext cx="2606040" cy="2377440"/>
-          </a:xfrm>
-          <a:prstGeom prst="roundRect">
-            <a:avLst>
-              <a:gd name="adj" fmla="val 4615"/>
-            </a:avLst>
-          </a:prstGeom>
-          <a:solidFill>
-            <a:srgbClr val="E8F0F4"/>
-          </a:solidFill>
-          <a:ln>
-            <a:noFill/>
-          </a:ln>
-        </p:spPr>
-        <p:txBody>
-          <a:bodyPr rtlCol="0" anchor="ctr"/>
-          <a:lstStyle/>
-          <a:p>
-            <a:pPr algn="ctr"/>
-            <a:endParaRPr/>
-          </a:p>
-        </p:txBody>
-      </p:sp>
-      <p:sp>
-        <p:nvSpPr>
-          <p:cNvPr id="11" name="TextBox 10"/>
-          <p:cNvSpPr txBox="1"/>
-          <p:nvPr/>
-        </p:nvSpPr>
-        <p:spPr>
-          <a:xfrm>
-            <a:off x="3470148" y="978407"/>
-            <a:ext cx="2194560" cy="685800"/>
-          </a:xfrm>
-          <a:prstGeom prst="rect">
-            <a:avLst/>
-          </a:prstGeom>
-          <a:noFill/>
-        </p:spPr>
-        <p:txBody>
-          <a:bodyPr wrap="square" lIns="0" tIns="0" rIns="0" bIns="0" anchor="t">
-            <a:noAutofit/>
-          </a:bodyPr>
-          <a:lstStyle/>
-          <a:p>
-            <a:pPr algn="l">
-              <a:spcAft>
-                <a:spcPts val="0"/>
-              </a:spcAft>
-            </a:pPr>
-            <a:r>
-              <a:rPr sz="4000" b="1" i="0">
-                <a:solidFill>
-                  <a:srgbClr val="BF210C"/>
-                </a:solidFill>
-                <a:latin typeface="Swis721 Cn BT"/>
-              </a:rPr>
-              <a:t>8</a:t>
-            </a:r>
-          </a:p>
-        </p:txBody>
-      </p:sp>
-      <p:sp>
-        <p:nvSpPr>
-          <p:cNvPr id="12" name="TextBox 11"/>
-          <p:cNvSpPr txBox="1"/>
-          <p:nvPr/>
-        </p:nvSpPr>
-        <p:spPr>
-          <a:xfrm>
-            <a:off x="3470148" y="1673352"/>
-            <a:ext cx="2240280" cy="292608"/>
-          </a:xfrm>
-          <a:prstGeom prst="rect">
-            <a:avLst/>
-          </a:prstGeom>
-          <a:noFill/>
-        </p:spPr>
-        <p:txBody>
-          <a:bodyPr wrap="square" lIns="0" tIns="0" rIns="0" bIns="0" anchor="t">
-            <a:noAutofit/>
-          </a:bodyPr>
-          <a:lstStyle/>
-          <a:p>
-            <a:pPr algn="l">
-              <a:spcAft>
-                <a:spcPts val="0"/>
-              </a:spcAft>
-            </a:pPr>
-            <a:r>
-              <a:rPr sz="1400" b="1" i="0">
-                <a:solidFill>
-                  <a:srgbClr val="003C58"/>
-                </a:solidFill>
-                <a:latin typeface="Swis721 Cn BT"/>
-              </a:rPr>
-              <a:t>estudios en matronería</a:t>
-            </a:r>
-          </a:p>
-        </p:txBody>
-      </p:sp>
-      <p:sp>
-        <p:nvSpPr>
-          <p:cNvPr id="13" name="TextBox 12"/>
-          <p:cNvSpPr txBox="1"/>
-          <p:nvPr/>
-        </p:nvSpPr>
-        <p:spPr>
-          <a:xfrm>
-            <a:off x="3470148" y="1984248"/>
-            <a:ext cx="2240280" cy="914400"/>
-          </a:xfrm>
-          <a:prstGeom prst="rect">
-            <a:avLst/>
-          </a:prstGeom>
-          <a:noFill/>
-        </p:spPr>
-        <p:txBody>
-          <a:bodyPr wrap="square" lIns="0" tIns="0" rIns="0" bIns="0" anchor="t">
-            <a:noAutofit/>
-          </a:bodyPr>
-          <a:lstStyle/>
-          <a:p>
-            <a:pPr algn="l">
-              <a:spcAft>
-                <a:spcPts val="0"/>
-              </a:spcAft>
-            </a:pPr>
-            <a:r>
-              <a:rPr sz="1150" b="0" i="0">
-                <a:solidFill>
-                  <a:srgbClr val="1F2A30"/>
-                </a:solidFill>
-                <a:latin typeface="Swis721 Cn BT"/>
-              </a:rPr>
-              <a:t>en una revisión de alcance, todos de un mismo país. Actitud positiva, junto al temor de perder la empatía y el trato humano.</a:t>
-            </a:r>
-          </a:p>
-        </p:txBody>
-      </p:sp>
-      <p:sp>
-        <p:nvSpPr>
-          <p:cNvPr id="14" name="TextBox 13"/>
-          <p:cNvSpPr txBox="1"/>
-          <p:nvPr/>
-        </p:nvSpPr>
-        <p:spPr>
-          <a:xfrm>
-            <a:off x="3470148" y="2898648"/>
-            <a:ext cx="2240280" cy="256032"/>
-          </a:xfrm>
-          <a:prstGeom prst="rect">
-            <a:avLst/>
-          </a:prstGeom>
-          <a:noFill/>
-        </p:spPr>
-        <p:txBody>
-          <a:bodyPr wrap="square" lIns="0" tIns="0" rIns="0" bIns="0" anchor="t">
-            <a:noAutofit/>
-          </a:bodyPr>
-          <a:lstStyle/>
-          <a:p>
-            <a:pPr algn="l">
-              <a:spcAft>
-                <a:spcPts val="0"/>
-              </a:spcAft>
-            </a:pPr>
-            <a:r>
-              <a:rPr sz="1000" b="0" i="1">
-                <a:solidFill>
-                  <a:srgbClr val="5B6B73"/>
-                </a:solidFill>
-                <a:latin typeface="Swis721 Cn BT"/>
-              </a:rPr>
-              <a:t>Revisión de alcance · Healthcare 2025</a:t>
-            </a:r>
-          </a:p>
-        </p:txBody>
-      </p:sp>
-      <p:sp>
-        <p:nvSpPr>
-          <p:cNvPr id="15" name="Rounded Rectangle 14"/>
-          <p:cNvSpPr/>
-          <p:nvPr/>
-        </p:nvSpPr>
-        <p:spPr>
-          <a:xfrm>
-            <a:off x="6035040" y="868680"/>
-            <a:ext cx="2606040" cy="2377440"/>
-          </a:xfrm>
-          <a:prstGeom prst="roundRect">
-            <a:avLst>
-              <a:gd name="adj" fmla="val 4615"/>
-            </a:avLst>
-          </a:prstGeom>
-          <a:solidFill>
-            <a:srgbClr val="E8F0F4"/>
-          </a:solidFill>
-          <a:ln>
-            <a:noFill/>
-          </a:ln>
-        </p:spPr>
-        <p:txBody>
-          <a:bodyPr rtlCol="0" anchor="ctr"/>
-          <a:lstStyle/>
-          <a:p>
-            <a:pPr algn="ctr"/>
-            <a:endParaRPr/>
-          </a:p>
-        </p:txBody>
-      </p:sp>
-      <p:sp>
-        <p:nvSpPr>
-          <p:cNvPr id="16" name="TextBox 15"/>
-          <p:cNvSpPr txBox="1"/>
-          <p:nvPr/>
-        </p:nvSpPr>
-        <p:spPr>
-          <a:xfrm>
-            <a:off x="6236207" y="978407"/>
-            <a:ext cx="2194560" cy="685800"/>
-          </a:xfrm>
-          <a:prstGeom prst="rect">
-            <a:avLst/>
-          </a:prstGeom>
-          <a:noFill/>
-        </p:spPr>
-        <p:txBody>
-          <a:bodyPr wrap="square" lIns="0" tIns="0" rIns="0" bIns="0" anchor="t">
-            <a:noAutofit/>
-          </a:bodyPr>
-          <a:lstStyle/>
-          <a:p>
-            <a:pPr algn="l">
-              <a:spcAft>
-                <a:spcPts val="0"/>
-              </a:spcAft>
-            </a:pPr>
-            <a:r>
-              <a:rPr sz="4000" b="1" i="0">
-                <a:solidFill>
-                  <a:srgbClr val="003C58"/>
-                </a:solidFill>
-                <a:latin typeface="Swis721 Cn BT"/>
-              </a:rPr>
-              <a:t>17</a:t>
-            </a:r>
-          </a:p>
-        </p:txBody>
-      </p:sp>
-      <p:sp>
-        <p:nvSpPr>
-          <p:cNvPr id="17" name="TextBox 16"/>
-          <p:cNvSpPr txBox="1"/>
-          <p:nvPr/>
-        </p:nvSpPr>
-        <p:spPr>
-          <a:xfrm>
-            <a:off x="6236207" y="1673352"/>
-            <a:ext cx="2240280" cy="292608"/>
-          </a:xfrm>
-          <a:prstGeom prst="rect">
-            <a:avLst/>
-          </a:prstGeom>
-          <a:noFill/>
-        </p:spPr>
-        <p:txBody>
-          <a:bodyPr wrap="square" lIns="0" tIns="0" rIns="0" bIns="0" anchor="t">
-            <a:noAutofit/>
-          </a:bodyPr>
-          <a:lstStyle/>
-          <a:p>
-            <a:pPr algn="l">
-              <a:spcAft>
-                <a:spcPts val="0"/>
-              </a:spcAft>
-            </a:pPr>
-            <a:r>
-              <a:rPr sz="1400" b="1" i="0">
-                <a:solidFill>
-                  <a:srgbClr val="003C58"/>
-                </a:solidFill>
-                <a:latin typeface="Swis721 Cn BT"/>
-              </a:rPr>
-              <a:t>estudiantes</a:t>
-            </a:r>
-          </a:p>
-        </p:txBody>
-      </p:sp>
-      <p:sp>
-        <p:nvSpPr>
-          <p:cNvPr id="18" name="TextBox 17"/>
-          <p:cNvSpPr txBox="1"/>
-          <p:nvPr/>
-        </p:nvSpPr>
-        <p:spPr>
-          <a:xfrm>
-            <a:off x="6236207" y="1984248"/>
-            <a:ext cx="2240280" cy="914400"/>
-          </a:xfrm>
-          <a:prstGeom prst="rect">
-            <a:avLst/>
-          </a:prstGeom>
-          <a:noFill/>
-        </p:spPr>
-        <p:txBody>
-          <a:bodyPr wrap="square" lIns="0" tIns="0" rIns="0" bIns="0" anchor="t">
-            <a:noAutofit/>
-          </a:bodyPr>
-          <a:lstStyle/>
-          <a:p>
-            <a:pPr algn="l">
-              <a:spcAft>
-                <a:spcPts val="0"/>
-              </a:spcAft>
-            </a:pPr>
-            <a:r>
-              <a:rPr sz="1150" b="0" i="0">
-                <a:solidFill>
-                  <a:srgbClr val="1F2A30"/>
-                </a:solidFill>
-                <a:latin typeface="Swis721 Cn BT"/>
-              </a:rPr>
-              <a:t>de matronería valoran ChatGPT para ahorrar tiempo y aprender de forma más práctica, aunque expresan inquietudes.</a:t>
-            </a:r>
-          </a:p>
-        </p:txBody>
-      </p:sp>
-      <p:sp>
-        <p:nvSpPr>
-          <p:cNvPr id="19" name="TextBox 18"/>
-          <p:cNvSpPr txBox="1"/>
-          <p:nvPr/>
-        </p:nvSpPr>
-        <p:spPr>
-          <a:xfrm>
-            <a:off x="6236207" y="2898648"/>
-            <a:ext cx="2240280" cy="256032"/>
-          </a:xfrm>
-          <a:prstGeom prst="rect">
-            <a:avLst/>
-          </a:prstGeom>
-          <a:noFill/>
-        </p:spPr>
-        <p:txBody>
-          <a:bodyPr wrap="square" lIns="0" tIns="0" rIns="0" bIns="0" anchor="t">
-            <a:noAutofit/>
-          </a:bodyPr>
-          <a:lstStyle/>
-          <a:p>
-            <a:pPr algn="l">
-              <a:spcAft>
-                <a:spcPts val="0"/>
-              </a:spcAft>
-            </a:pPr>
-            <a:r>
-              <a:rPr sz="1000" b="0" i="1">
-                <a:solidFill>
-                  <a:srgbClr val="5B6B73"/>
-                </a:solidFill>
-                <a:latin typeface="Swis721 Cn BT"/>
-              </a:rPr>
-              <a:t>Estudio cualitativo · Eur J Educ 2025</a:t>
-            </a:r>
-          </a:p>
-        </p:txBody>
-      </p:sp>
-      <p:sp>
-        <p:nvSpPr>
-          <p:cNvPr id="20" name="Rounded Rectangle 19"/>
-          <p:cNvSpPr/>
-          <p:nvPr/>
-        </p:nvSpPr>
-        <p:spPr>
-          <a:xfrm>
-            <a:off x="502920" y="3401568"/>
-            <a:ext cx="8138159" cy="667512"/>
-          </a:xfrm>
-          <a:prstGeom prst="roundRect">
-            <a:avLst>
-              <a:gd name="adj" fmla="val 13698"/>
-            </a:avLst>
-          </a:prstGeom>
-          <a:solidFill>
-            <a:srgbClr val="FFF3C4"/>
-          </a:solidFill>
-          <a:ln>
-            <a:noFill/>
-          </a:ln>
-        </p:spPr>
-        <p:txBody>
-          <a:bodyPr rtlCol="0" anchor="ctr"/>
-          <a:lstStyle/>
-          <a:p>
-            <a:pPr algn="ctr"/>
-            <a:endParaRPr/>
-          </a:p>
-        </p:txBody>
-      </p:sp>
-      <p:sp>
-        <p:nvSpPr>
-          <p:cNvPr id="21" name="Oval 20"/>
-          <p:cNvSpPr/>
-          <p:nvPr/>
-        </p:nvSpPr>
-        <p:spPr>
-          <a:xfrm>
-            <a:off x="658368" y="3506724"/>
-            <a:ext cx="457200" cy="457200"/>
-          </a:xfrm>
-          <a:prstGeom prst="ellipse">
-            <a:avLst/>
-          </a:prstGeom>
-          <a:solidFill>
-            <a:srgbClr val="003C58"/>
-          </a:solidFill>
-          <a:ln>
-            <a:noFill/>
-          </a:ln>
-        </p:spPr>
-        <p:txBody>
-          <a:bodyPr rtlCol="0" anchor="ctr"/>
-          <a:lstStyle/>
-          <a:p>
-            <a:pPr algn="ctr"/>
-            <a:endParaRPr/>
-          </a:p>
-        </p:txBody>
-      </p:sp>
       <p:pic>
         <p:nvPicPr>
-          <p:cNvPr id="22" name="Picture 21" descr="MdSchool_blanco.png"/>
+          <p:cNvPr id="22" name="Picture 21" descr="MdSchool_blanco.png">
+            <a:extLst>
+              <a:ext uri="{FF2B5EF4-FFF2-40B4-BE49-F238E27FC236}">
+                <a16:creationId xmlns:a16="http://schemas.microsoft.com/office/drawing/2014/main" id="{68DCC099-B98E-FE88-5637-3D88E1B14E91}"/>
+              </a:ext>
+            </a:extLst>
+          </p:cNvPr>
           <p:cNvPicPr>
             <a:picLocks noChangeAspect="1"/>
           </p:cNvPicPr>
@@ -25202,7 +25383,13 @@
       </p:pic>
       <p:sp>
         <p:nvSpPr>
-          <p:cNvPr id="23" name="TextBox 22"/>
+          <p:cNvPr id="23" name="TextBox 22">
+            <a:extLst>
+              <a:ext uri="{FF2B5EF4-FFF2-40B4-BE49-F238E27FC236}">
+                <a16:creationId xmlns:a16="http://schemas.microsoft.com/office/drawing/2014/main" id="{CE469093-DB3D-8774-A7AF-D77D48E36514}"/>
+              </a:ext>
+            </a:extLst>
+          </p:cNvPr>
           <p:cNvSpPr txBox="1"/>
           <p:nvPr/>
         </p:nvSpPr>
@@ -25491,7 +25678,72 @@
           </a:p>
         </p:txBody>
       </p:sp>
+      <p:pic>
+        <p:nvPicPr>
+          <p:cNvPr id="3" name="Imagen 2">
+            <a:extLst>
+              <a:ext uri="{FF2B5EF4-FFF2-40B4-BE49-F238E27FC236}">
+                <a16:creationId xmlns:a16="http://schemas.microsoft.com/office/drawing/2014/main" id="{317D1A0F-92D2-97F8-7654-62C5806A4809}"/>
+              </a:ext>
+            </a:extLst>
+          </p:cNvPr>
+          <p:cNvPicPr>
+            <a:picLocks noChangeAspect="1"/>
+          </p:cNvPicPr>
+          <p:nvPr/>
+        </p:nvPicPr>
+        <p:blipFill>
+          <a:blip r:embed="rId4"/>
+          <a:stretch>
+            <a:fillRect/>
+          </a:stretch>
+        </p:blipFill>
+        <p:spPr>
+          <a:xfrm>
+            <a:off x="398464" y="582873"/>
+            <a:ext cx="2802635" cy="2772820"/>
+          </a:xfrm>
+          <a:prstGeom prst="rect">
+            <a:avLst/>
+          </a:prstGeom>
+        </p:spPr>
+      </p:pic>
+      <p:pic>
+        <p:nvPicPr>
+          <p:cNvPr id="24" name="Imagen 23">
+            <a:extLst>
+              <a:ext uri="{FF2B5EF4-FFF2-40B4-BE49-F238E27FC236}">
+                <a16:creationId xmlns:a16="http://schemas.microsoft.com/office/drawing/2014/main" id="{4D104D30-A6F3-4F80-F8E1-F448EAE47EB7}"/>
+              </a:ext>
+            </a:extLst>
+          </p:cNvPr>
+          <p:cNvPicPr>
+            <a:picLocks noChangeAspect="1"/>
+          </p:cNvPicPr>
+          <p:nvPr/>
+        </p:nvPicPr>
+        <p:blipFill>
+          <a:blip r:embed="rId5"/>
+          <a:stretch>
+            <a:fillRect/>
+          </a:stretch>
+        </p:blipFill>
+        <p:spPr>
+          <a:xfrm>
+            <a:off x="5942901" y="606704"/>
+            <a:ext cx="2888078" cy="2763592"/>
+          </a:xfrm>
+          <a:prstGeom prst="rect">
+            <a:avLst/>
+          </a:prstGeom>
+        </p:spPr>
+      </p:pic>
     </p:spTree>
+    <p:extLst>
+      <p:ext uri="{BB962C8B-B14F-4D97-AF65-F5344CB8AC3E}">
+        <p14:creationId xmlns:p14="http://schemas.microsoft.com/office/powerpoint/2010/main" val="3835640607"/>
+      </p:ext>
+    </p:extLst>
   </p:cSld>
   <p:clrMapOvr>
     <a:masterClrMapping/>
@@ -25532,62 +25784,25 @@
           <a:lstStyle/>
           <a:p>
             <a:r>
-              <a:t>Ética, autoría y transparencia</a:t>
-            </a:r>
-          </a:p>
-        </p:txBody>
-      </p:sp>
-      <p:sp>
-        <p:nvSpPr>
-          <p:cNvPr id="4" name="Text Placeholder 3"/>
-          <p:cNvSpPr>
-            <a:spLocks noGrp="1"/>
-          </p:cNvSpPr>
-          <p:nvPr>
-            <p:ph type="body" sz="quarter" idx="11"/>
-          </p:nvPr>
-        </p:nvSpPr>
-        <p:spPr>
-          <a:xfrm>
-            <a:off x="1618488" y="4480560"/>
-            <a:ext cx="4983480" cy="457200"/>
-          </a:xfrm>
-        </p:spPr>
-        <p:txBody>
-          <a:bodyPr/>
-          <a:lstStyle/>
-          <a:p>
-            <a:pPr algn="l">
-              <a:spcAft>
-                <a:spcPts val="0"/>
-              </a:spcAft>
-            </a:pPr>
-            <a:r>
-              <a:rPr sz="900" b="0" i="0">
-                <a:solidFill>
-                  <a:srgbClr val="003C58"/>
-                </a:solidFill>
-                <a:latin typeface="Swis721 Cn BT"/>
-              </a:rPr>
-              <a:t>Fuentes: [24] Zaghir et al., 2024 · [7] Omiye et al., 2024 · [22] Gallifant et al., 2025</a:t>
-            </a:r>
-          </a:p>
-        </p:txBody>
-      </p:sp>
-      <p:sp>
-        <p:nvSpPr>
-          <p:cNvPr id="5" name="Rounded Rectangle 4"/>
+              <a:t>Tres ideas para llevar</a:t>
+            </a:r>
+          </a:p>
+        </p:txBody>
+      </p:sp>
+      <p:sp>
+        <p:nvSpPr>
+          <p:cNvPr id="3" name="Rounded Rectangle 2"/>
           <p:cNvSpPr/>
           <p:nvPr/>
         </p:nvSpPr>
         <p:spPr>
           <a:xfrm>
             <a:off x="502920" y="868680"/>
-            <a:ext cx="1920240" cy="3200400"/>
+            <a:ext cx="8138159" cy="960120"/>
           </a:xfrm>
           <a:prstGeom prst="roundRect">
             <a:avLst>
-              <a:gd name="adj" fmla="val 5714"/>
+              <a:gd name="adj" fmla="val 11428"/>
             </a:avLst>
           </a:prstGeom>
           <a:solidFill>
@@ -25608,20 +25823,118 @@
       </p:sp>
       <p:sp>
         <p:nvSpPr>
-          <p:cNvPr id="6" name="Oval 5"/>
+          <p:cNvPr id="4" name="TextBox 3"/>
+          <p:cNvSpPr txBox="1"/>
+          <p:nvPr/>
+        </p:nvSpPr>
+        <p:spPr>
+          <a:xfrm>
+            <a:off x="731520" y="868680"/>
+            <a:ext cx="914400" cy="960120"/>
+          </a:xfrm>
+          <a:prstGeom prst="rect">
+            <a:avLst/>
+          </a:prstGeom>
+          <a:noFill/>
+        </p:spPr>
+        <p:txBody>
+          <a:bodyPr wrap="square" lIns="0" tIns="0" rIns="0" bIns="0" anchor="ctr">
+            <a:noAutofit/>
+          </a:bodyPr>
+          <a:lstStyle/>
+          <a:p>
+            <a:pPr algn="l">
+              <a:spcAft>
+                <a:spcPts val="0"/>
+              </a:spcAft>
+            </a:pPr>
+            <a:r>
+              <a:rPr sz="4400" b="1" i="0">
+                <a:solidFill>
+                  <a:srgbClr val="BF210C"/>
+                </a:solidFill>
+                <a:latin typeface="Swis721 Cn BT"/>
+              </a:rPr>
+              <a:t>1</a:t>
+            </a:r>
+          </a:p>
+        </p:txBody>
+      </p:sp>
+      <p:sp>
+        <p:nvSpPr>
+          <p:cNvPr id="5" name="TextBox 4"/>
+          <p:cNvSpPr txBox="1"/>
+          <p:nvPr/>
+        </p:nvSpPr>
+        <p:spPr>
+          <a:xfrm>
+            <a:off x="1600200" y="868680"/>
+            <a:ext cx="6858000" cy="960120"/>
+          </a:xfrm>
+          <a:prstGeom prst="rect">
+            <a:avLst/>
+          </a:prstGeom>
+          <a:noFill/>
+        </p:spPr>
+        <p:txBody>
+          <a:bodyPr wrap="square" lIns="0" tIns="0" rIns="0" bIns="0" anchor="ctr">
+            <a:noAutofit/>
+          </a:bodyPr>
+          <a:lstStyle/>
+          <a:p>
+            <a:pPr algn="l">
+              <a:spcAft>
+                <a:spcPts val="0"/>
+              </a:spcAft>
+            </a:pPr>
+            <a:r>
+              <a:rPr sz="1900" b="0" i="0">
+                <a:solidFill>
+                  <a:srgbClr val="003C58"/>
+                </a:solidFill>
+                <a:latin typeface="Swis721 Cn BT"/>
+              </a:rPr>
+              <a:t>La IA predice texto plausible; </a:t>
+            </a:r>
+            <a:r>
+              <a:rPr sz="1900" b="1" i="0">
+                <a:solidFill>
+                  <a:srgbClr val="BF210C"/>
+                </a:solidFill>
+                <a:latin typeface="Swis721 Cn BT"/>
+              </a:rPr>
+              <a:t>la verdad clínica la pones tú</a:t>
+            </a:r>
+            <a:r>
+              <a:rPr sz="1900" b="0" i="0">
+                <a:solidFill>
+                  <a:srgbClr val="003C58"/>
+                </a:solidFill>
+                <a:latin typeface="Swis721 Cn BT"/>
+              </a:rPr>
+              <a:t>.</a:t>
+            </a:r>
+          </a:p>
+        </p:txBody>
+      </p:sp>
+      <p:sp>
+        <p:nvSpPr>
+          <p:cNvPr id="6" name="Rounded Rectangle 5"/>
           <p:cNvSpPr/>
           <p:nvPr/>
         </p:nvSpPr>
         <p:spPr>
           <a:xfrm>
-            <a:off x="1097280" y="1097280"/>
-            <a:ext cx="731520" cy="731520"/>
-          </a:xfrm>
-          <a:prstGeom prst="ellipse">
-            <a:avLst/>
+            <a:off x="502920" y="1947672"/>
+            <a:ext cx="8138159" cy="960120"/>
+          </a:xfrm>
+          <a:prstGeom prst="roundRect">
+            <a:avLst>
+              <a:gd name="adj" fmla="val 11428"/>
+            </a:avLst>
           </a:prstGeom>
           <a:solidFill>
-            <a:srgbClr val="BF210C"/>
+            <a:srgbClr val="003C58"/>
           </a:solidFill>
           <a:ln>
             <a:noFill/>
@@ -25636,30 +25949,45 @@
           </a:p>
         </p:txBody>
       </p:sp>
-      <p:pic>
-        <p:nvPicPr>
-          <p:cNvPr id="7" name="Picture 6" descr="MdPrivacyTip_blanco.png"/>
-          <p:cNvPicPr>
-            <a:picLocks noChangeAspect="1"/>
-          </p:cNvPicPr>
-          <p:nvPr/>
-        </p:nvPicPr>
-        <p:blipFill>
-          <a:blip r:embed="rId3"/>
-          <a:stretch>
-            <a:fillRect/>
-          </a:stretch>
-        </p:blipFill>
-        <p:spPr>
-          <a:xfrm>
-            <a:off x="1250899" y="1250899"/>
-            <a:ext cx="424281" cy="424281"/>
+      <p:sp>
+        <p:nvSpPr>
+          <p:cNvPr id="7" name="TextBox 6"/>
+          <p:cNvSpPr txBox="1"/>
+          <p:nvPr/>
+        </p:nvSpPr>
+        <p:spPr>
+          <a:xfrm>
+            <a:off x="731520" y="1947672"/>
+            <a:ext cx="914400" cy="960120"/>
           </a:xfrm>
           <a:prstGeom prst="rect">
             <a:avLst/>
           </a:prstGeom>
-        </p:spPr>
-      </p:pic>
+          <a:noFill/>
+        </p:spPr>
+        <p:txBody>
+          <a:bodyPr wrap="square" lIns="0" tIns="0" rIns="0" bIns="0" anchor="ctr">
+            <a:noAutofit/>
+          </a:bodyPr>
+          <a:lstStyle/>
+          <a:p>
+            <a:pPr algn="l">
+              <a:spcAft>
+                <a:spcPts val="0"/>
+              </a:spcAft>
+            </a:pPr>
+            <a:r>
+              <a:rPr sz="4400" b="1" i="0" dirty="0">
+                <a:solidFill>
+                  <a:schemeClr val="bg1"/>
+                </a:solidFill>
+                <a:latin typeface="Swis721 Cn BT"/>
+              </a:rPr>
+              <a:t>2</a:t>
+            </a:r>
+          </a:p>
+        </p:txBody>
+      </p:sp>
       <p:sp>
         <p:nvSpPr>
           <p:cNvPr id="8" name="TextBox 7"/>
@@ -25668,8 +25996,8 @@
         </p:nvSpPr>
         <p:spPr>
           <a:xfrm>
-            <a:off x="612648" y="2011680"/>
-            <a:ext cx="1700784" cy="365760"/>
+            <a:off x="1600200" y="1947672"/>
+            <a:ext cx="6858000" cy="960120"/>
           </a:xfrm>
           <a:prstGeom prst="rect">
             <a:avLst/>
@@ -25677,81 +26005,114 @@
           <a:noFill/>
         </p:spPr>
         <p:txBody>
-          <a:bodyPr wrap="square" lIns="0" tIns="0" rIns="0" bIns="0" anchor="t">
+          <a:bodyPr wrap="square" lIns="0" tIns="0" rIns="0" bIns="0" anchor="ctr">
             <a:noAutofit/>
           </a:bodyPr>
           <a:lstStyle/>
           <a:p>
-            <a:pPr algn="ctr">
-              <a:spcAft>
-                <a:spcPts val="0"/>
-              </a:spcAft>
-            </a:pPr>
-            <a:r>
-              <a:rPr sz="1500" b="1" i="0">
-                <a:solidFill>
-                  <a:srgbClr val="003C58"/>
-                </a:solidFill>
-                <a:latin typeface="Swis721 Cn BT"/>
-              </a:rPr>
-              <a:t>Privacidad</a:t>
-            </a:r>
-          </a:p>
-        </p:txBody>
-      </p:sp>
-      <p:sp>
-        <p:nvSpPr>
-          <p:cNvPr id="9" name="TextBox 8"/>
-          <p:cNvSpPr txBox="1"/>
-          <p:nvPr/>
-        </p:nvSpPr>
-        <p:spPr>
-          <a:xfrm>
-            <a:off x="667512" y="2441448"/>
-            <a:ext cx="1591056" cy="1554480"/>
-          </a:xfrm>
-          <a:prstGeom prst="rect">
-            <a:avLst/>
-          </a:prstGeom>
-          <a:noFill/>
-        </p:spPr>
-        <p:txBody>
-          <a:bodyPr wrap="square" lIns="0" tIns="0" rIns="0" bIns="0" anchor="t">
-            <a:noAutofit/>
-          </a:bodyPr>
-          <a:lstStyle/>
-          <a:p>
-            <a:pPr algn="ctr">
-              <a:spcAft>
-                <a:spcPts val="0"/>
-              </a:spcAft>
-            </a:pPr>
-            <a:r>
-              <a:rPr sz="1200" b="0" i="0">
-                <a:solidFill>
-                  <a:srgbClr val="1F2A30"/>
-                </a:solidFill>
-                <a:latin typeface="Swis721 Cn BT"/>
-              </a:rPr>
-              <a:t>Nunca datos identificables. Para información sensible, modelos locales o institucionales.</a:t>
-            </a:r>
-          </a:p>
-        </p:txBody>
-      </p:sp>
-      <p:sp>
-        <p:nvSpPr>
-          <p:cNvPr id="10" name="Rounded Rectangle 9"/>
+            <a:pPr algn="l">
+              <a:spcAft>
+                <a:spcPts val="0"/>
+              </a:spcAft>
+            </a:pPr>
+            <a:r>
+              <a:rPr sz="1900" b="1" i="0" dirty="0" err="1">
+                <a:solidFill>
+                  <a:srgbClr val="FFFFFF"/>
+                </a:solidFill>
+                <a:latin typeface="Swis721 Cn BT"/>
+              </a:rPr>
+              <a:t>Método</a:t>
+            </a:r>
+            <a:r>
+              <a:rPr lang="es-419" sz="1900" b="1" i="0" dirty="0">
+                <a:solidFill>
+                  <a:srgbClr val="FFFFFF"/>
+                </a:solidFill>
+                <a:latin typeface="Swis721 Cn BT"/>
+              </a:rPr>
+              <a:t> antes de aceptar</a:t>
+            </a:r>
+            <a:r>
+              <a:rPr sz="1900" b="1" i="0" dirty="0">
+                <a:solidFill>
+                  <a:srgbClr val="FFFFFF"/>
+                </a:solidFill>
+                <a:latin typeface="Swis721 Cn BT"/>
+              </a:rPr>
+              <a:t>: </a:t>
+            </a:r>
+            <a:r>
+              <a:rPr sz="1900" b="1" i="0" dirty="0" err="1">
+                <a:solidFill>
+                  <a:srgbClr val="FFFFFF"/>
+                </a:solidFill>
+                <a:latin typeface="Swis721 Cn BT"/>
+              </a:rPr>
+              <a:t>fuentes</a:t>
+            </a:r>
+            <a:r>
+              <a:rPr sz="1900" b="1" i="0" dirty="0">
+                <a:solidFill>
+                  <a:srgbClr val="FFFFFF"/>
+                </a:solidFill>
+                <a:latin typeface="Swis721 Cn BT"/>
+              </a:rPr>
+              <a:t> + </a:t>
+            </a:r>
+            <a:r>
+              <a:rPr sz="1900" b="1" i="0" dirty="0">
+                <a:solidFill>
+                  <a:srgbClr val="FFC000"/>
+                </a:solidFill>
+                <a:latin typeface="Swis721 Cn BT"/>
+              </a:rPr>
+              <a:t>PARTO</a:t>
+            </a:r>
+            <a:r>
+              <a:rPr sz="1900" b="1" i="0" dirty="0">
+                <a:solidFill>
+                  <a:srgbClr val="FFFFFF"/>
+                </a:solidFill>
+                <a:latin typeface="Swis721 Cn BT"/>
+              </a:rPr>
+              <a:t> + </a:t>
+            </a:r>
+            <a:r>
+              <a:rPr sz="1900" b="1" i="0" dirty="0" err="1">
+                <a:solidFill>
+                  <a:srgbClr val="FFFFFF"/>
+                </a:solidFill>
+                <a:latin typeface="Swis721 Cn BT"/>
+              </a:rPr>
+              <a:t>verificación</a:t>
+            </a:r>
+            <a:r>
+              <a:rPr sz="1900" b="1" i="0" dirty="0">
+                <a:solidFill>
+                  <a:srgbClr val="FFFFFF"/>
+                </a:solidFill>
+                <a:latin typeface="Swis721 Cn BT"/>
+              </a:rPr>
+              <a:t>.</a:t>
+            </a:r>
+          </a:p>
+        </p:txBody>
+      </p:sp>
+      <p:sp>
+        <p:nvSpPr>
+          <p:cNvPr id="9" name="Rounded Rectangle 8"/>
           <p:cNvSpPr/>
           <p:nvPr/>
         </p:nvSpPr>
         <p:spPr>
           <a:xfrm>
-            <a:off x="2564891" y="868680"/>
-            <a:ext cx="1920240" cy="3200400"/>
+            <a:off x="502920" y="3026663"/>
+            <a:ext cx="8138159" cy="960120"/>
           </a:xfrm>
           <a:prstGeom prst="roundRect">
             <a:avLst>
-              <a:gd name="adj" fmla="val 5714"/>
+              <a:gd name="adj" fmla="val 11428"/>
             </a:avLst>
           </a:prstGeom>
           <a:solidFill>
@@ -25772,107 +26133,53 @@
       </p:sp>
       <p:sp>
         <p:nvSpPr>
-          <p:cNvPr id="11" name="Oval 10"/>
-          <p:cNvSpPr/>
-          <p:nvPr/>
-        </p:nvSpPr>
-        <p:spPr>
-          <a:xfrm>
-            <a:off x="3159251" y="1097280"/>
-            <a:ext cx="731520" cy="731520"/>
-          </a:xfrm>
-          <a:prstGeom prst="ellipse">
-            <a:avLst/>
-          </a:prstGeom>
-          <a:solidFill>
-            <a:srgbClr val="003C58"/>
-          </a:solidFill>
-          <a:ln>
-            <a:noFill/>
-          </a:ln>
-        </p:spPr>
-        <p:txBody>
-          <a:bodyPr rtlCol="0" anchor="ctr"/>
-          <a:lstStyle/>
-          <a:p>
-            <a:pPr algn="ctr"/>
-            <a:endParaRPr/>
-          </a:p>
-        </p:txBody>
-      </p:sp>
-      <p:pic>
-        <p:nvPicPr>
-          <p:cNvPr id="12" name="Picture 11" descr="MdGavel_blanco.png"/>
-          <p:cNvPicPr>
-            <a:picLocks noChangeAspect="1"/>
-          </p:cNvPicPr>
-          <p:nvPr/>
-        </p:nvPicPr>
-        <p:blipFill>
-          <a:blip r:embed="rId4"/>
-          <a:stretch>
-            <a:fillRect/>
-          </a:stretch>
-        </p:blipFill>
-        <p:spPr>
-          <a:xfrm>
-            <a:off x="3312871" y="1250899"/>
-            <a:ext cx="424281" cy="424281"/>
+          <p:cNvPr id="10" name="TextBox 9"/>
+          <p:cNvSpPr txBox="1"/>
+          <p:nvPr/>
+        </p:nvSpPr>
+        <p:spPr>
+          <a:xfrm>
+            <a:off x="731520" y="3026663"/>
+            <a:ext cx="914400" cy="960120"/>
           </a:xfrm>
           <a:prstGeom prst="rect">
             <a:avLst/>
           </a:prstGeom>
-        </p:spPr>
-      </p:pic>
-      <p:sp>
-        <p:nvSpPr>
-          <p:cNvPr id="13" name="TextBox 12"/>
-          <p:cNvSpPr txBox="1"/>
-          <p:nvPr/>
-        </p:nvSpPr>
-        <p:spPr>
-          <a:xfrm>
-            <a:off x="2674620" y="2011680"/>
-            <a:ext cx="1700784" cy="365760"/>
-          </a:xfrm>
-          <a:prstGeom prst="rect">
-            <a:avLst/>
-          </a:prstGeom>
           <a:noFill/>
         </p:spPr>
         <p:txBody>
-          <a:bodyPr wrap="square" lIns="0" tIns="0" rIns="0" bIns="0" anchor="t">
+          <a:bodyPr wrap="square" lIns="0" tIns="0" rIns="0" bIns="0" anchor="ctr">
             <a:noAutofit/>
           </a:bodyPr>
           <a:lstStyle/>
           <a:p>
-            <a:pPr algn="ctr">
-              <a:spcAft>
-                <a:spcPts val="0"/>
-              </a:spcAft>
-            </a:pPr>
-            <a:r>
-              <a:rPr sz="1500" b="1" i="0">
-                <a:solidFill>
-                  <a:srgbClr val="003C58"/>
-                </a:solidFill>
-                <a:latin typeface="Swis721 Cn BT"/>
-              </a:rPr>
-              <a:t>Responsabilidad</a:t>
-            </a:r>
-          </a:p>
-        </p:txBody>
-      </p:sp>
-      <p:sp>
-        <p:nvSpPr>
-          <p:cNvPr id="14" name="TextBox 13"/>
+            <a:pPr algn="l">
+              <a:spcAft>
+                <a:spcPts val="0"/>
+              </a:spcAft>
+            </a:pPr>
+            <a:r>
+              <a:rPr sz="4400" b="1" i="0">
+                <a:solidFill>
+                  <a:srgbClr val="BF210C"/>
+                </a:solidFill>
+                <a:latin typeface="Swis721 Cn BT"/>
+              </a:rPr>
+              <a:t>3</a:t>
+            </a:r>
+          </a:p>
+        </p:txBody>
+      </p:sp>
+      <p:sp>
+        <p:nvSpPr>
+          <p:cNvPr id="11" name="TextBox 10"/>
           <p:cNvSpPr txBox="1"/>
           <p:nvPr/>
         </p:nvSpPr>
         <p:spPr>
           <a:xfrm>
-            <a:off x="2729484" y="2441448"/>
-            <a:ext cx="1591056" cy="1554480"/>
+            <a:off x="1600200" y="3026663"/>
+            <a:ext cx="6858000" cy="960120"/>
           </a:xfrm>
           <a:prstGeom prst="rect">
             <a:avLst/>
@@ -25880,352 +26187,141 @@
           <a:noFill/>
         </p:spPr>
         <p:txBody>
-          <a:bodyPr wrap="square" lIns="0" tIns="0" rIns="0" bIns="0" anchor="t">
+          <a:bodyPr wrap="square" lIns="0" tIns="0" rIns="0" bIns="0" anchor="ctr">
             <a:noAutofit/>
           </a:bodyPr>
           <a:lstStyle/>
           <a:p>
-            <a:pPr algn="ctr">
-              <a:spcAft>
-                <a:spcPts val="0"/>
-              </a:spcAft>
-            </a:pPr>
-            <a:r>
-              <a:rPr sz="1200" b="0" i="0">
-                <a:solidFill>
-                  <a:srgbClr val="1F2A30"/>
-                </a:solidFill>
-                <a:latin typeface="Swis721 Cn BT"/>
-              </a:rPr>
-              <a:t>La IA no es autora ni responsable: la firma y el juicio clínico son humanos.</a:t>
-            </a:r>
-          </a:p>
-        </p:txBody>
-      </p:sp>
-      <p:sp>
-        <p:nvSpPr>
-          <p:cNvPr id="15" name="Rounded Rectangle 14"/>
-          <p:cNvSpPr/>
-          <p:nvPr/>
-        </p:nvSpPr>
-        <p:spPr>
-          <a:xfrm>
-            <a:off x="4626864" y="868680"/>
-            <a:ext cx="1920240" cy="3200400"/>
-          </a:xfrm>
-          <a:prstGeom prst="roundRect">
-            <a:avLst>
-              <a:gd name="adj" fmla="val 5714"/>
-            </a:avLst>
-          </a:prstGeom>
-          <a:solidFill>
-            <a:srgbClr val="E8F0F4"/>
-          </a:solidFill>
-          <a:ln>
-            <a:noFill/>
-          </a:ln>
-        </p:spPr>
-        <p:txBody>
-          <a:bodyPr rtlCol="0" anchor="ctr"/>
-          <a:lstStyle/>
-          <a:p>
-            <a:pPr algn="ctr"/>
-            <a:endParaRPr/>
-          </a:p>
-        </p:txBody>
-      </p:sp>
-      <p:sp>
-        <p:nvSpPr>
-          <p:cNvPr id="16" name="Oval 15"/>
-          <p:cNvSpPr/>
-          <p:nvPr/>
-        </p:nvSpPr>
-        <p:spPr>
-          <a:xfrm>
-            <a:off x="5221223" y="1097280"/>
-            <a:ext cx="731520" cy="731520"/>
-          </a:xfrm>
-          <a:prstGeom prst="ellipse">
-            <a:avLst/>
-          </a:prstGeom>
-          <a:solidFill>
-            <a:srgbClr val="06717E"/>
-          </a:solidFill>
-          <a:ln>
-            <a:noFill/>
-          </a:ln>
-        </p:spPr>
-        <p:txBody>
-          <a:bodyPr rtlCol="0" anchor="ctr"/>
-          <a:lstStyle/>
-          <a:p>
-            <a:pPr algn="ctr"/>
-            <a:endParaRPr/>
-          </a:p>
-        </p:txBody>
-      </p:sp>
-      <p:pic>
-        <p:nvPicPr>
-          <p:cNvPr id="17" name="Picture 16" descr="MdVisibility_blanco.png"/>
-          <p:cNvPicPr>
-            <a:picLocks noChangeAspect="1"/>
-          </p:cNvPicPr>
-          <p:nvPr/>
-        </p:nvPicPr>
-        <p:blipFill>
-          <a:blip r:embed="rId5"/>
-          <a:stretch>
-            <a:fillRect/>
-          </a:stretch>
-        </p:blipFill>
-        <p:spPr>
-          <a:xfrm>
-            <a:off x="5374843" y="1250899"/>
-            <a:ext cx="424281" cy="424281"/>
-          </a:xfrm>
-          <a:prstGeom prst="rect">
-            <a:avLst/>
-          </a:prstGeom>
-        </p:spPr>
-      </p:pic>
-      <p:sp>
-        <p:nvSpPr>
-          <p:cNvPr id="18" name="TextBox 17"/>
-          <p:cNvSpPr txBox="1"/>
-          <p:nvPr/>
-        </p:nvSpPr>
-        <p:spPr>
-          <a:xfrm>
-            <a:off x="4736592" y="2011680"/>
-            <a:ext cx="1700784" cy="365760"/>
-          </a:xfrm>
-          <a:prstGeom prst="rect">
-            <a:avLst/>
-          </a:prstGeom>
-          <a:noFill/>
-        </p:spPr>
-        <p:txBody>
-          <a:bodyPr wrap="square" lIns="0" tIns="0" rIns="0" bIns="0" anchor="t">
-            <a:noAutofit/>
-          </a:bodyPr>
-          <a:lstStyle/>
-          <a:p>
-            <a:pPr algn="ctr">
-              <a:spcAft>
-                <a:spcPts val="0"/>
-              </a:spcAft>
-            </a:pPr>
-            <a:r>
-              <a:rPr sz="1500" b="1" i="0">
+            <a:pPr algn="l">
+              <a:spcAft>
+                <a:spcPts val="0"/>
+              </a:spcAft>
+            </a:pPr>
+            <a:r>
+              <a:rPr sz="1900" b="0" i="0" dirty="0">
                 <a:solidFill>
                   <a:srgbClr val="003C58"/>
                 </a:solidFill>
                 <a:latin typeface="Swis721 Cn BT"/>
               </a:rPr>
-              <a:t>Transparencia</a:t>
-            </a:r>
-          </a:p>
-        </p:txBody>
-      </p:sp>
-      <p:sp>
-        <p:nvSpPr>
-          <p:cNvPr id="19" name="TextBox 18"/>
-          <p:cNvSpPr txBox="1"/>
-          <p:nvPr/>
-        </p:nvSpPr>
-        <p:spPr>
-          <a:xfrm>
-            <a:off x="4791455" y="2441448"/>
-            <a:ext cx="1591056" cy="1554480"/>
-          </a:xfrm>
-          <a:prstGeom prst="rect">
-            <a:avLst/>
-          </a:prstGeom>
-          <a:noFill/>
-        </p:spPr>
-        <p:txBody>
-          <a:bodyPr wrap="square" lIns="0" tIns="0" rIns="0" bIns="0" anchor="t">
-            <a:noAutofit/>
-          </a:bodyPr>
-          <a:lstStyle/>
-          <a:p>
-            <a:pPr algn="ctr">
-              <a:spcAft>
-                <a:spcPts val="0"/>
-              </a:spcAft>
-            </a:pPr>
-            <a:r>
-              <a:rPr sz="1200" b="0" i="0">
-                <a:solidFill>
-                  <a:srgbClr val="1F2A30"/>
-                </a:solidFill>
-                <a:latin typeface="Swis721 Cn BT"/>
-              </a:rPr>
-              <a:t>Declara plataforma, versión, fecha y uso. En investigación, sigue TRIPOD-LLM.</a:t>
-            </a:r>
-          </a:p>
-        </p:txBody>
-      </p:sp>
-      <p:sp>
-        <p:nvSpPr>
-          <p:cNvPr id="20" name="Rounded Rectangle 19"/>
-          <p:cNvSpPr/>
-          <p:nvPr/>
-        </p:nvSpPr>
-        <p:spPr>
-          <a:xfrm>
-            <a:off x="6688836" y="868680"/>
-            <a:ext cx="1920240" cy="3200400"/>
-          </a:xfrm>
-          <a:prstGeom prst="roundRect">
-            <a:avLst>
-              <a:gd name="adj" fmla="val 5714"/>
-            </a:avLst>
-          </a:prstGeom>
-          <a:solidFill>
-            <a:srgbClr val="E8F0F4"/>
-          </a:solidFill>
-          <a:ln>
-            <a:noFill/>
-          </a:ln>
-        </p:spPr>
-        <p:txBody>
-          <a:bodyPr rtlCol="0" anchor="ctr"/>
-          <a:lstStyle/>
-          <a:p>
-            <a:pPr algn="ctr"/>
-            <a:endParaRPr/>
-          </a:p>
-        </p:txBody>
-      </p:sp>
-      <p:sp>
-        <p:nvSpPr>
-          <p:cNvPr id="21" name="Oval 20"/>
-          <p:cNvSpPr/>
-          <p:nvPr/>
-        </p:nvSpPr>
-        <p:spPr>
-          <a:xfrm>
-            <a:off x="7283196" y="1097280"/>
-            <a:ext cx="731520" cy="731520"/>
-          </a:xfrm>
-          <a:prstGeom prst="ellipse">
-            <a:avLst/>
-          </a:prstGeom>
-          <a:solidFill>
-            <a:srgbClr val="003C58"/>
-          </a:solidFill>
-          <a:ln>
-            <a:noFill/>
-          </a:ln>
-        </p:spPr>
-        <p:txBody>
-          <a:bodyPr rtlCol="0" anchor="ctr"/>
-          <a:lstStyle/>
-          <a:p>
-            <a:pPr algn="ctr"/>
-            <a:endParaRPr/>
-          </a:p>
-        </p:txBody>
-      </p:sp>
-      <p:pic>
-        <p:nvPicPr>
-          <p:cNvPr id="22" name="Picture 21" descr="MdBalance_blanco.png"/>
-          <p:cNvPicPr>
-            <a:picLocks noChangeAspect="1"/>
-          </p:cNvPicPr>
-          <p:nvPr/>
-        </p:nvPicPr>
-        <p:blipFill>
-          <a:blip r:embed="rId6"/>
-          <a:stretch>
-            <a:fillRect/>
-          </a:stretch>
-        </p:blipFill>
-        <p:spPr>
-          <a:xfrm>
-            <a:off x="7436815" y="1250899"/>
-            <a:ext cx="424281" cy="424281"/>
-          </a:xfrm>
-          <a:prstGeom prst="rect">
-            <a:avLst/>
-          </a:prstGeom>
-        </p:spPr>
-      </p:pic>
-      <p:sp>
-        <p:nvSpPr>
-          <p:cNvPr id="23" name="TextBox 22"/>
-          <p:cNvSpPr txBox="1"/>
-          <p:nvPr/>
-        </p:nvSpPr>
-        <p:spPr>
-          <a:xfrm>
-            <a:off x="6798564" y="2011680"/>
-            <a:ext cx="1700784" cy="365760"/>
-          </a:xfrm>
-          <a:prstGeom prst="rect">
-            <a:avLst/>
-          </a:prstGeom>
-          <a:noFill/>
-        </p:spPr>
-        <p:txBody>
-          <a:bodyPr wrap="square" lIns="0" tIns="0" rIns="0" bIns="0" anchor="t">
-            <a:noAutofit/>
-          </a:bodyPr>
-          <a:lstStyle/>
-          <a:p>
-            <a:pPr algn="ctr">
-              <a:spcAft>
-                <a:spcPts val="0"/>
-              </a:spcAft>
-            </a:pPr>
-            <a:r>
-              <a:rPr sz="1500" b="1" i="0">
+              <a:t>Todo lo </a:t>
+            </a:r>
+            <a:r>
+              <a:rPr sz="1900" b="0" i="0" dirty="0" err="1">
                 <a:solidFill>
                   <a:srgbClr val="003C58"/>
                 </a:solidFill>
                 <a:latin typeface="Swis721 Cn BT"/>
               </a:rPr>
-              <a:t>Equidad</a:t>
-            </a:r>
-          </a:p>
-        </p:txBody>
-      </p:sp>
-      <p:sp>
-        <p:nvSpPr>
-          <p:cNvPr id="24" name="TextBox 23"/>
-          <p:cNvSpPr txBox="1"/>
-          <p:nvPr/>
-        </p:nvSpPr>
-        <p:spPr>
-          <a:xfrm>
-            <a:off x="6853427" y="2441448"/>
-            <a:ext cx="1591056" cy="1554480"/>
-          </a:xfrm>
-          <a:prstGeom prst="rect">
-            <a:avLst/>
-          </a:prstGeom>
-          <a:noFill/>
-        </p:spPr>
-        <p:txBody>
-          <a:bodyPr wrap="square" lIns="0" tIns="0" rIns="0" bIns="0" anchor="t">
-            <a:noAutofit/>
-          </a:bodyPr>
-          <a:lstStyle/>
-          <a:p>
-            <a:pPr algn="ctr">
-              <a:spcAft>
-                <a:spcPts val="0"/>
-              </a:spcAft>
-            </a:pPr>
-            <a:r>
-              <a:rPr sz="1200" b="0" i="0">
-                <a:solidFill>
-                  <a:srgbClr val="1F2A30"/>
-                </a:solidFill>
-                <a:latin typeface="Swis721 Cn BT"/>
-              </a:rPr>
-              <a:t>La IA reproduce sesgos de sus datos: revisa lenguaje, supuestos e interculturalidad.</a:t>
+              <a:t>que</a:t>
+            </a:r>
+            <a:r>
+              <a:rPr sz="1900" b="0" i="0" dirty="0">
+                <a:solidFill>
+                  <a:srgbClr val="003C58"/>
+                </a:solidFill>
+                <a:latin typeface="Swis721 Cn BT"/>
+              </a:rPr>
+              <a:t> produce la IA es un </a:t>
+            </a:r>
+            <a:r>
+              <a:rPr lang="es-CL" sz="1900" b="1" i="0" dirty="0">
+                <a:solidFill>
+                  <a:srgbClr val="003C58"/>
+                </a:solidFill>
+                <a:latin typeface="Swis721 Cn BT"/>
+              </a:rPr>
+              <a:t>BORRADOR</a:t>
+            </a:r>
+            <a:r>
+              <a:rPr sz="1900" b="0" i="0" dirty="0">
+                <a:solidFill>
+                  <a:srgbClr val="003C58"/>
+                </a:solidFill>
+                <a:latin typeface="Swis721 Cn BT"/>
+              </a:rPr>
+              <a:t> </a:t>
+            </a:r>
+            <a:r>
+              <a:rPr sz="1900" i="0" dirty="0">
+                <a:solidFill>
+                  <a:srgbClr val="003C58"/>
+                </a:solidFill>
+                <a:latin typeface="Swis721 Cn BT"/>
+              </a:rPr>
+              <a:t>hasta </a:t>
+            </a:r>
+            <a:r>
+              <a:rPr sz="1900" i="0" dirty="0" err="1">
+                <a:solidFill>
+                  <a:srgbClr val="003C58"/>
+                </a:solidFill>
+                <a:latin typeface="Swis721 Cn BT"/>
+              </a:rPr>
+              <a:t>que</a:t>
+            </a:r>
+            <a:r>
+              <a:rPr sz="1900" i="0" dirty="0">
+                <a:solidFill>
+                  <a:srgbClr val="003C58"/>
+                </a:solidFill>
+                <a:latin typeface="Swis721 Cn BT"/>
+              </a:rPr>
+              <a:t> </a:t>
+            </a:r>
+            <a:r>
+              <a:rPr sz="1900" i="0" dirty="0" err="1">
+                <a:solidFill>
+                  <a:srgbClr val="003C58"/>
+                </a:solidFill>
+                <a:latin typeface="Swis721 Cn BT"/>
+              </a:rPr>
+              <a:t>una</a:t>
+            </a:r>
+            <a:r>
+              <a:rPr sz="1900" i="0" dirty="0">
+                <a:solidFill>
+                  <a:srgbClr val="003C58"/>
+                </a:solidFill>
+                <a:latin typeface="Swis721 Cn BT"/>
+              </a:rPr>
+              <a:t> </a:t>
+            </a:r>
+            <a:r>
+              <a:rPr sz="1900" i="0" dirty="0" err="1">
+                <a:solidFill>
+                  <a:srgbClr val="003C58"/>
+                </a:solidFill>
+                <a:latin typeface="Swis721 Cn BT"/>
+              </a:rPr>
+              <a:t>matrona</a:t>
+            </a:r>
+            <a:r>
+              <a:rPr sz="1900" i="0" dirty="0">
+                <a:solidFill>
+                  <a:srgbClr val="003C58"/>
+                </a:solidFill>
+                <a:latin typeface="Swis721 Cn BT"/>
+              </a:rPr>
+              <a:t> lo </a:t>
+            </a:r>
+            <a:r>
+              <a:rPr sz="1900" i="0" dirty="0" err="1">
+                <a:solidFill>
+                  <a:srgbClr val="003C58"/>
+                </a:solidFill>
+                <a:latin typeface="Swis721 Cn BT"/>
+              </a:rPr>
+              <a:t>valida</a:t>
+            </a:r>
+            <a:r>
+              <a:rPr sz="1900" b="0" i="0" dirty="0">
+                <a:solidFill>
+                  <a:srgbClr val="003C58"/>
+                </a:solidFill>
+                <a:latin typeface="Swis721 Cn BT"/>
+              </a:rPr>
+              <a:t>.</a:t>
             </a:r>
           </a:p>
         </p:txBody>
@@ -26271,613 +26367,66 @@
           <a:lstStyle/>
           <a:p>
             <a:r>
-              <a:t>Lista de cotejo antes de usar un producto generado con IA</a:t>
-            </a:r>
-          </a:p>
-        </p:txBody>
-      </p:sp>
-      <p:sp>
-        <p:nvSpPr>
-          <p:cNvPr id="3" name="Rounded Rectangle 2"/>
+              <a:t>Ética, autoría y transparencia</a:t>
+            </a:r>
+          </a:p>
+        </p:txBody>
+      </p:sp>
+      <p:sp>
+        <p:nvSpPr>
+          <p:cNvPr id="4" name="Text Placeholder 3"/>
+          <p:cNvSpPr>
+            <a:spLocks noGrp="1"/>
+          </p:cNvSpPr>
+          <p:nvPr>
+            <p:ph type="body" sz="quarter" idx="11"/>
+          </p:nvPr>
+        </p:nvSpPr>
+        <p:spPr>
+          <a:xfrm>
+            <a:off x="1618488" y="4480560"/>
+            <a:ext cx="4983480" cy="457200"/>
+          </a:xfrm>
+        </p:spPr>
+        <p:txBody>
+          <a:bodyPr/>
+          <a:lstStyle/>
+          <a:p>
+            <a:pPr algn="l">
+              <a:spcAft>
+                <a:spcPts val="0"/>
+              </a:spcAft>
+            </a:pPr>
+            <a:r>
+              <a:rPr sz="900" b="0" i="0">
+                <a:solidFill>
+                  <a:srgbClr val="003C58"/>
+                </a:solidFill>
+                <a:latin typeface="Swis721 Cn BT"/>
+              </a:rPr>
+              <a:t>Fuentes: [24] Zaghir et al., 2024 · [7] Omiye et al., 2024 · [22] Gallifant et al., 2025</a:t>
+            </a:r>
+          </a:p>
+        </p:txBody>
+      </p:sp>
+      <p:sp>
+        <p:nvSpPr>
+          <p:cNvPr id="5" name="Rounded Rectangle 4"/>
           <p:cNvSpPr/>
           <p:nvPr/>
         </p:nvSpPr>
         <p:spPr>
           <a:xfrm>
-            <a:off x="502920" y="941832"/>
-            <a:ext cx="329184" cy="329184"/>
+            <a:off x="502920" y="868680"/>
+            <a:ext cx="1920240" cy="3200400"/>
           </a:xfrm>
           <a:prstGeom prst="roundRect">
             <a:avLst>
-              <a:gd name="adj" fmla="val 16666"/>
+              <a:gd name="adj" fmla="val 5714"/>
             </a:avLst>
           </a:prstGeom>
           <a:solidFill>
-            <a:srgbClr val="FFFFFF"/>
-          </a:solidFill>
-          <a:ln w="25400">
-            <a:solidFill>
-              <a:srgbClr val="003C58"/>
-            </a:solidFill>
-          </a:ln>
-        </p:spPr>
-        <p:txBody>
-          <a:bodyPr rtlCol="0" anchor="ctr"/>
-          <a:lstStyle/>
-          <a:p>
-            <a:pPr algn="ctr"/>
-            <a:endParaRPr/>
-          </a:p>
-        </p:txBody>
-      </p:sp>
-      <p:sp>
-        <p:nvSpPr>
-          <p:cNvPr id="4" name="TextBox 3"/>
-          <p:cNvSpPr txBox="1"/>
-          <p:nvPr/>
-        </p:nvSpPr>
-        <p:spPr>
-          <a:xfrm>
-            <a:off x="978408" y="868680"/>
-            <a:ext cx="3520440" cy="566928"/>
-          </a:xfrm>
-          <a:prstGeom prst="rect">
-            <a:avLst/>
-          </a:prstGeom>
-          <a:noFill/>
-        </p:spPr>
-        <p:txBody>
-          <a:bodyPr wrap="square" lIns="0" tIns="0" rIns="0" bIns="0" anchor="ctr">
-            <a:noAutofit/>
-          </a:bodyPr>
-          <a:lstStyle/>
-          <a:p>
-            <a:pPr algn="l">
-              <a:spcAft>
-                <a:spcPts val="0"/>
-              </a:spcAft>
-            </a:pPr>
-            <a:r>
-              <a:rPr sz="1300" b="0" i="0">
-                <a:solidFill>
-                  <a:srgbClr val="1F2A30"/>
-                </a:solidFill>
-                <a:latin typeface="Swis721 Cn BT"/>
-              </a:rPr>
-              <a:t>Cada afirmación clínica tiene respaldo en una fuente oficial vigente (página).</a:t>
-            </a:r>
-          </a:p>
-        </p:txBody>
-      </p:sp>
-      <p:sp>
-        <p:nvSpPr>
-          <p:cNvPr id="5" name="Rounded Rectangle 4"/>
-          <p:cNvSpPr/>
-          <p:nvPr/>
-        </p:nvSpPr>
-        <p:spPr>
-          <a:xfrm>
-            <a:off x="502920" y="1600200"/>
-            <a:ext cx="329184" cy="329184"/>
-          </a:xfrm>
-          <a:prstGeom prst="roundRect">
-            <a:avLst>
-              <a:gd name="adj" fmla="val 16666"/>
-            </a:avLst>
-          </a:prstGeom>
-          <a:solidFill>
-            <a:srgbClr val="FFFFFF"/>
-          </a:solidFill>
-          <a:ln w="25400">
-            <a:solidFill>
-              <a:srgbClr val="003C58"/>
-            </a:solidFill>
-          </a:ln>
-        </p:spPr>
-        <p:txBody>
-          <a:bodyPr rtlCol="0" anchor="ctr"/>
-          <a:lstStyle/>
-          <a:p>
-            <a:pPr algn="ctr"/>
-            <a:endParaRPr/>
-          </a:p>
-        </p:txBody>
-      </p:sp>
-      <p:sp>
-        <p:nvSpPr>
-          <p:cNvPr id="6" name="TextBox 5"/>
-          <p:cNvSpPr txBox="1"/>
-          <p:nvPr/>
-        </p:nvSpPr>
-        <p:spPr>
-          <a:xfrm>
-            <a:off x="978408" y="1527048"/>
-            <a:ext cx="3520440" cy="566928"/>
-          </a:xfrm>
-          <a:prstGeom prst="rect">
-            <a:avLst/>
-          </a:prstGeom>
-          <a:noFill/>
-        </p:spPr>
-        <p:txBody>
-          <a:bodyPr wrap="square" lIns="0" tIns="0" rIns="0" bIns="0" anchor="ctr">
-            <a:noAutofit/>
-          </a:bodyPr>
-          <a:lstStyle/>
-          <a:p>
-            <a:pPr algn="l">
-              <a:spcAft>
-                <a:spcPts val="0"/>
-              </a:spcAft>
-            </a:pPr>
-            <a:r>
-              <a:rPr sz="1300" b="0" i="0">
-                <a:solidFill>
-                  <a:srgbClr val="1F2A30"/>
-                </a:solidFill>
-                <a:latin typeface="Swis721 Cn BT"/>
-              </a:rPr>
-              <a:t>Cada referencia existe y su DOI resuelve.</a:t>
-            </a:r>
-          </a:p>
-        </p:txBody>
-      </p:sp>
-      <p:sp>
-        <p:nvSpPr>
-          <p:cNvPr id="7" name="Rounded Rectangle 6"/>
-          <p:cNvSpPr/>
-          <p:nvPr/>
-        </p:nvSpPr>
-        <p:spPr>
-          <a:xfrm>
-            <a:off x="502920" y="2258568"/>
-            <a:ext cx="329184" cy="329184"/>
-          </a:xfrm>
-          <a:prstGeom prst="roundRect">
-            <a:avLst>
-              <a:gd name="adj" fmla="val 16666"/>
-            </a:avLst>
-          </a:prstGeom>
-          <a:solidFill>
-            <a:srgbClr val="FFFFFF"/>
-          </a:solidFill>
-          <a:ln w="25400">
-            <a:solidFill>
-              <a:srgbClr val="003C58"/>
-            </a:solidFill>
-          </a:ln>
-        </p:spPr>
-        <p:txBody>
-          <a:bodyPr rtlCol="0" anchor="ctr"/>
-          <a:lstStyle/>
-          <a:p>
-            <a:pPr algn="ctr"/>
-            <a:endParaRPr/>
-          </a:p>
-        </p:txBody>
-      </p:sp>
-      <p:sp>
-        <p:nvSpPr>
-          <p:cNvPr id="8" name="TextBox 7"/>
-          <p:cNvSpPr txBox="1"/>
-          <p:nvPr/>
-        </p:nvSpPr>
-        <p:spPr>
-          <a:xfrm>
-            <a:off x="978408" y="2185415"/>
-            <a:ext cx="3520440" cy="566928"/>
-          </a:xfrm>
-          <a:prstGeom prst="rect">
-            <a:avLst/>
-          </a:prstGeom>
-          <a:noFill/>
-        </p:spPr>
-        <p:txBody>
-          <a:bodyPr wrap="square" lIns="0" tIns="0" rIns="0" bIns="0" anchor="ctr">
-            <a:noAutofit/>
-          </a:bodyPr>
-          <a:lstStyle/>
-          <a:p>
-            <a:pPr algn="l">
-              <a:spcAft>
-                <a:spcPts val="0"/>
-              </a:spcAft>
-            </a:pPr>
-            <a:r>
-              <a:rPr sz="1300" b="0" i="0">
-                <a:solidFill>
-                  <a:srgbClr val="1F2A30"/>
-                </a:solidFill>
-                <a:latin typeface="Swis721 Cn BT"/>
-              </a:rPr>
-              <a:t>No se ingresaron datos identificables de pacientes.</a:t>
-            </a:r>
-          </a:p>
-        </p:txBody>
-      </p:sp>
-      <p:sp>
-        <p:nvSpPr>
-          <p:cNvPr id="9" name="Rounded Rectangle 8"/>
-          <p:cNvSpPr/>
-          <p:nvPr/>
-        </p:nvSpPr>
-        <p:spPr>
-          <a:xfrm>
-            <a:off x="502920" y="2916936"/>
-            <a:ext cx="329184" cy="329184"/>
-          </a:xfrm>
-          <a:prstGeom prst="roundRect">
-            <a:avLst>
-              <a:gd name="adj" fmla="val 16666"/>
-            </a:avLst>
-          </a:prstGeom>
-          <a:solidFill>
-            <a:srgbClr val="FFFFFF"/>
-          </a:solidFill>
-          <a:ln w="25400">
-            <a:solidFill>
-              <a:srgbClr val="003C58"/>
-            </a:solidFill>
-          </a:ln>
-        </p:spPr>
-        <p:txBody>
-          <a:bodyPr rtlCol="0" anchor="ctr"/>
-          <a:lstStyle/>
-          <a:p>
-            <a:pPr algn="ctr"/>
-            <a:endParaRPr/>
-          </a:p>
-        </p:txBody>
-      </p:sp>
-      <p:sp>
-        <p:nvSpPr>
-          <p:cNvPr id="10" name="TextBox 9"/>
-          <p:cNvSpPr txBox="1"/>
-          <p:nvPr/>
-        </p:nvSpPr>
-        <p:spPr>
-          <a:xfrm>
-            <a:off x="978408" y="2843784"/>
-            <a:ext cx="3520440" cy="566928"/>
-          </a:xfrm>
-          <a:prstGeom prst="rect">
-            <a:avLst/>
-          </a:prstGeom>
-          <a:noFill/>
-        </p:spPr>
-        <p:txBody>
-          <a:bodyPr wrap="square" lIns="0" tIns="0" rIns="0" bIns="0" anchor="ctr">
-            <a:noAutofit/>
-          </a:bodyPr>
-          <a:lstStyle/>
-          <a:p>
-            <a:pPr algn="l">
-              <a:spcAft>
-                <a:spcPts val="0"/>
-              </a:spcAft>
-            </a:pPr>
-            <a:r>
-              <a:rPr sz="1300" b="0" i="0">
-                <a:solidFill>
-                  <a:srgbClr val="1F2A30"/>
-                </a:solidFill>
-                <a:latin typeface="Swis721 Cn BT"/>
-              </a:rPr>
-              <a:t>El prompt se probó en al menos dos modelos o repeticiones.</a:t>
-            </a:r>
-          </a:p>
-        </p:txBody>
-      </p:sp>
-      <p:sp>
-        <p:nvSpPr>
-          <p:cNvPr id="11" name="Rounded Rectangle 10"/>
-          <p:cNvSpPr/>
-          <p:nvPr/>
-        </p:nvSpPr>
-        <p:spPr>
-          <a:xfrm>
-            <a:off x="4617720" y="941832"/>
-            <a:ext cx="329184" cy="329184"/>
-          </a:xfrm>
-          <a:prstGeom prst="roundRect">
-            <a:avLst>
-              <a:gd name="adj" fmla="val 16666"/>
-            </a:avLst>
-          </a:prstGeom>
-          <a:solidFill>
-            <a:srgbClr val="FFFFFF"/>
-          </a:solidFill>
-          <a:ln w="25400">
-            <a:solidFill>
-              <a:srgbClr val="003C58"/>
-            </a:solidFill>
-          </a:ln>
-        </p:spPr>
-        <p:txBody>
-          <a:bodyPr rtlCol="0" anchor="ctr"/>
-          <a:lstStyle/>
-          <a:p>
-            <a:pPr algn="ctr"/>
-            <a:endParaRPr/>
-          </a:p>
-        </p:txBody>
-      </p:sp>
-      <p:sp>
-        <p:nvSpPr>
-          <p:cNvPr id="12" name="TextBox 11"/>
-          <p:cNvSpPr txBox="1"/>
-          <p:nvPr/>
-        </p:nvSpPr>
-        <p:spPr>
-          <a:xfrm>
-            <a:off x="5093208" y="868680"/>
-            <a:ext cx="3520440" cy="566928"/>
-          </a:xfrm>
-          <a:prstGeom prst="rect">
-            <a:avLst/>
-          </a:prstGeom>
-          <a:noFill/>
-        </p:spPr>
-        <p:txBody>
-          <a:bodyPr wrap="square" lIns="0" tIns="0" rIns="0" bIns="0" anchor="ctr">
-            <a:noAutofit/>
-          </a:bodyPr>
-          <a:lstStyle/>
-          <a:p>
-            <a:pPr algn="l">
-              <a:spcAft>
-                <a:spcPts val="0"/>
-              </a:spcAft>
-            </a:pPr>
-            <a:r>
-              <a:rPr sz="1300" b="0" i="0">
-                <a:solidFill>
-                  <a:srgbClr val="1F2A30"/>
-                </a:solidFill>
-                <a:latin typeface="Swis721 Cn BT"/>
-              </a:rPr>
-              <a:t>Lo revisó una matrona o un equipo con experiencia en el tema.</a:t>
-            </a:r>
-          </a:p>
-        </p:txBody>
-      </p:sp>
-      <p:sp>
-        <p:nvSpPr>
-          <p:cNvPr id="13" name="Rounded Rectangle 12"/>
-          <p:cNvSpPr/>
-          <p:nvPr/>
-        </p:nvSpPr>
-        <p:spPr>
-          <a:xfrm>
-            <a:off x="4617720" y="1600200"/>
-            <a:ext cx="329184" cy="329184"/>
-          </a:xfrm>
-          <a:prstGeom prst="roundRect">
-            <a:avLst>
-              <a:gd name="adj" fmla="val 16666"/>
-            </a:avLst>
-          </a:prstGeom>
-          <a:solidFill>
-            <a:srgbClr val="FFFFFF"/>
-          </a:solidFill>
-          <a:ln w="25400">
-            <a:solidFill>
-              <a:srgbClr val="003C58"/>
-            </a:solidFill>
-          </a:ln>
-        </p:spPr>
-        <p:txBody>
-          <a:bodyPr rtlCol="0" anchor="ctr"/>
-          <a:lstStyle/>
-          <a:p>
-            <a:pPr algn="ctr"/>
-            <a:endParaRPr/>
-          </a:p>
-        </p:txBody>
-      </p:sp>
-      <p:sp>
-        <p:nvSpPr>
-          <p:cNvPr id="14" name="TextBox 13"/>
-          <p:cNvSpPr txBox="1"/>
-          <p:nvPr/>
-        </p:nvSpPr>
-        <p:spPr>
-          <a:xfrm>
-            <a:off x="5093208" y="1527048"/>
-            <a:ext cx="3520440" cy="566928"/>
-          </a:xfrm>
-          <a:prstGeom prst="rect">
-            <a:avLst/>
-          </a:prstGeom>
-          <a:noFill/>
-        </p:spPr>
-        <p:txBody>
-          <a:bodyPr wrap="square" lIns="0" tIns="0" rIns="0" bIns="0" anchor="ctr">
-            <a:noAutofit/>
-          </a:bodyPr>
-          <a:lstStyle/>
-          <a:p>
-            <a:pPr algn="l">
-              <a:spcAft>
-                <a:spcPts val="0"/>
-              </a:spcAft>
-            </a:pPr>
-            <a:r>
-              <a:rPr sz="1300" b="0" i="0">
-                <a:solidFill>
-                  <a:srgbClr val="1F2A30"/>
-                </a:solidFill>
-                <a:latin typeface="Swis721 Cn BT"/>
-              </a:rPr>
-              <a:t>Cumple la estructura institucional del documento.</a:t>
-            </a:r>
-          </a:p>
-        </p:txBody>
-      </p:sp>
-      <p:sp>
-        <p:nvSpPr>
-          <p:cNvPr id="15" name="Rounded Rectangle 14"/>
-          <p:cNvSpPr/>
-          <p:nvPr/>
-        </p:nvSpPr>
-        <p:spPr>
-          <a:xfrm>
-            <a:off x="4617720" y="2258568"/>
-            <a:ext cx="329184" cy="329184"/>
-          </a:xfrm>
-          <a:prstGeom prst="roundRect">
-            <a:avLst>
-              <a:gd name="adj" fmla="val 16666"/>
-            </a:avLst>
-          </a:prstGeom>
-          <a:solidFill>
-            <a:srgbClr val="FFFFFF"/>
-          </a:solidFill>
-          <a:ln w="25400">
-            <a:solidFill>
-              <a:srgbClr val="003C58"/>
-            </a:solidFill>
-          </a:ln>
-        </p:spPr>
-        <p:txBody>
-          <a:bodyPr rtlCol="0" anchor="ctr"/>
-          <a:lstStyle/>
-          <a:p>
-            <a:pPr algn="ctr"/>
-            <a:endParaRPr/>
-          </a:p>
-        </p:txBody>
-      </p:sp>
-      <p:sp>
-        <p:nvSpPr>
-          <p:cNvPr id="16" name="TextBox 15"/>
-          <p:cNvSpPr txBox="1"/>
-          <p:nvPr/>
-        </p:nvSpPr>
-        <p:spPr>
-          <a:xfrm>
-            <a:off x="5093208" y="2185415"/>
-            <a:ext cx="3520440" cy="566928"/>
-          </a:xfrm>
-          <a:prstGeom prst="rect">
-            <a:avLst/>
-          </a:prstGeom>
-          <a:noFill/>
-        </p:spPr>
-        <p:txBody>
-          <a:bodyPr wrap="square" lIns="0" tIns="0" rIns="0" bIns="0" anchor="ctr">
-            <a:noAutofit/>
-          </a:bodyPr>
-          <a:lstStyle/>
-          <a:p>
-            <a:pPr algn="l">
-              <a:spcAft>
-                <a:spcPts val="0"/>
-              </a:spcAft>
-            </a:pPr>
-            <a:r>
-              <a:rPr sz="1300" b="0" i="0">
-                <a:solidFill>
-                  <a:srgbClr val="1F2A30"/>
-                </a:solidFill>
-                <a:latin typeface="Swis721 Cn BT"/>
-              </a:rPr>
-              <a:t>El lenguaje es adecuado a su público (usuarias, estudiantes, equipo).</a:t>
-            </a:r>
-          </a:p>
-        </p:txBody>
-      </p:sp>
-      <p:sp>
-        <p:nvSpPr>
-          <p:cNvPr id="17" name="Rounded Rectangle 16"/>
-          <p:cNvSpPr/>
-          <p:nvPr/>
-        </p:nvSpPr>
-        <p:spPr>
-          <a:xfrm>
-            <a:off x="4617720" y="2916936"/>
-            <a:ext cx="329184" cy="329184"/>
-          </a:xfrm>
-          <a:prstGeom prst="roundRect">
-            <a:avLst>
-              <a:gd name="adj" fmla="val 16666"/>
-            </a:avLst>
-          </a:prstGeom>
-          <a:solidFill>
-            <a:srgbClr val="FFFFFF"/>
-          </a:solidFill>
-          <a:ln w="25400">
-            <a:solidFill>
-              <a:srgbClr val="003C58"/>
-            </a:solidFill>
-          </a:ln>
-        </p:spPr>
-        <p:txBody>
-          <a:bodyPr rtlCol="0" anchor="ctr"/>
-          <a:lstStyle/>
-          <a:p>
-            <a:pPr algn="ctr"/>
-            <a:endParaRPr/>
-          </a:p>
-        </p:txBody>
-      </p:sp>
-      <p:sp>
-        <p:nvSpPr>
-          <p:cNvPr id="18" name="TextBox 17"/>
-          <p:cNvSpPr txBox="1"/>
-          <p:nvPr/>
-        </p:nvSpPr>
-        <p:spPr>
-          <a:xfrm>
-            <a:off x="5093208" y="2843784"/>
-            <a:ext cx="3520440" cy="566928"/>
-          </a:xfrm>
-          <a:prstGeom prst="rect">
-            <a:avLst/>
-          </a:prstGeom>
-          <a:noFill/>
-        </p:spPr>
-        <p:txBody>
-          <a:bodyPr wrap="square" lIns="0" tIns="0" rIns="0" bIns="0" anchor="ctr">
-            <a:noAutofit/>
-          </a:bodyPr>
-          <a:lstStyle/>
-          <a:p>
-            <a:pPr algn="l">
-              <a:spcAft>
-                <a:spcPts val="0"/>
-              </a:spcAft>
-            </a:pPr>
-            <a:r>
-              <a:rPr sz="1300" b="0" i="0">
-                <a:solidFill>
-                  <a:srgbClr val="1F2A30"/>
-                </a:solidFill>
-                <a:latin typeface="Swis721 Cn BT"/>
-              </a:rPr>
-              <a:t>Se registró plataforma, versión, fecha y prompt usado.</a:t>
-            </a:r>
-          </a:p>
-        </p:txBody>
-      </p:sp>
-      <p:sp>
-        <p:nvSpPr>
-          <p:cNvPr id="19" name="Rounded Rectangle 18"/>
-          <p:cNvSpPr/>
-          <p:nvPr/>
-        </p:nvSpPr>
-        <p:spPr>
-          <a:xfrm>
-            <a:off x="502920" y="3584448"/>
-            <a:ext cx="8138159" cy="484632"/>
-          </a:xfrm>
-          <a:prstGeom prst="roundRect">
-            <a:avLst>
-              <a:gd name="adj" fmla="val 18867"/>
-            </a:avLst>
-          </a:prstGeom>
-          <a:solidFill>
-            <a:srgbClr val="FFF3C4"/>
+            <a:srgbClr val="E8F0F4"/>
           </a:solidFill>
           <a:ln>
             <a:noFill/>
@@ -26894,14 +26443,68 @@
       </p:sp>
       <p:sp>
         <p:nvSpPr>
-          <p:cNvPr id="20" name="TextBox 19"/>
+          <p:cNvPr id="6" name="Oval 5"/>
+          <p:cNvSpPr/>
+          <p:nvPr/>
+        </p:nvSpPr>
+        <p:spPr>
+          <a:xfrm>
+            <a:off x="1097280" y="1097280"/>
+            <a:ext cx="731520" cy="731520"/>
+          </a:xfrm>
+          <a:prstGeom prst="ellipse">
+            <a:avLst/>
+          </a:prstGeom>
+          <a:solidFill>
+            <a:srgbClr val="BF210C"/>
+          </a:solidFill>
+          <a:ln>
+            <a:noFill/>
+          </a:ln>
+        </p:spPr>
+        <p:txBody>
+          <a:bodyPr rtlCol="0" anchor="ctr"/>
+          <a:lstStyle/>
+          <a:p>
+            <a:pPr algn="ctr"/>
+            <a:endParaRPr/>
+          </a:p>
+        </p:txBody>
+      </p:sp>
+      <p:pic>
+        <p:nvPicPr>
+          <p:cNvPr id="7" name="Picture 6" descr="MdPrivacyTip_blanco.png"/>
+          <p:cNvPicPr>
+            <a:picLocks noChangeAspect="1"/>
+          </p:cNvPicPr>
+          <p:nvPr/>
+        </p:nvPicPr>
+        <p:blipFill>
+          <a:blip r:embed="rId3"/>
+          <a:stretch>
+            <a:fillRect/>
+          </a:stretch>
+        </p:blipFill>
+        <p:spPr>
+          <a:xfrm>
+            <a:off x="1250899" y="1250899"/>
+            <a:ext cx="424281" cy="424281"/>
+          </a:xfrm>
+          <a:prstGeom prst="rect">
+            <a:avLst/>
+          </a:prstGeom>
+        </p:spPr>
+      </p:pic>
+      <p:sp>
+        <p:nvSpPr>
+          <p:cNvPr id="8" name="TextBox 7"/>
           <p:cNvSpPr txBox="1"/>
           <p:nvPr/>
         </p:nvSpPr>
         <p:spPr>
           <a:xfrm>
-            <a:off x="731520" y="3584448"/>
-            <a:ext cx="7680960" cy="484632"/>
+            <a:off x="612648" y="2011680"/>
+            <a:ext cx="1700784" cy="365760"/>
           </a:xfrm>
           <a:prstGeom prst="rect">
             <a:avLst/>
@@ -26909,7 +26512,7 @@
           <a:noFill/>
         </p:spPr>
         <p:txBody>
-          <a:bodyPr wrap="square" lIns="0" tIns="0" rIns="0" bIns="0" anchor="ctr">
+          <a:bodyPr wrap="square" lIns="0" tIns="0" rIns="0" bIns="0" anchor="t">
             <a:noAutofit/>
           </a:bodyPr>
           <a:lstStyle/>
@@ -26920,31 +26523,544 @@
               </a:spcAft>
             </a:pPr>
             <a:r>
-              <a:rPr sz="1400" b="0" i="0">
+              <a:rPr sz="1500" b="1" i="0">
+                <a:solidFill>
+                  <a:srgbClr val="003C58"/>
+                </a:solidFill>
+                <a:latin typeface="Swis721 Cn BT"/>
+              </a:rPr>
+              <a:t>Privacidad</a:t>
+            </a:r>
+          </a:p>
+        </p:txBody>
+      </p:sp>
+      <p:sp>
+        <p:nvSpPr>
+          <p:cNvPr id="9" name="TextBox 8"/>
+          <p:cNvSpPr txBox="1"/>
+          <p:nvPr/>
+        </p:nvSpPr>
+        <p:spPr>
+          <a:xfrm>
+            <a:off x="667512" y="2441448"/>
+            <a:ext cx="1591056" cy="1554480"/>
+          </a:xfrm>
+          <a:prstGeom prst="rect">
+            <a:avLst/>
+          </a:prstGeom>
+          <a:noFill/>
+        </p:spPr>
+        <p:txBody>
+          <a:bodyPr wrap="square" lIns="0" tIns="0" rIns="0" bIns="0" anchor="t">
+            <a:noAutofit/>
+          </a:bodyPr>
+          <a:lstStyle/>
+          <a:p>
+            <a:pPr algn="ctr">
+              <a:spcAft>
+                <a:spcPts val="0"/>
+              </a:spcAft>
+            </a:pPr>
+            <a:r>
+              <a:rPr sz="1200" b="0" i="0">
                 <a:solidFill>
                   <a:srgbClr val="1F2A30"/>
                 </a:solidFill>
                 <a:latin typeface="Swis721 Cn BT"/>
               </a:rPr>
-              <a:t>Si una casilla queda vacía, el producto </a:t>
-            </a:r>
-            <a:r>
-              <a:rPr sz="1400" b="1" i="0">
-                <a:solidFill>
-                  <a:srgbClr val="BF210C"/>
-                </a:solidFill>
-                <a:latin typeface="Swis721 Cn BT"/>
-              </a:rPr>
-              <a:t>sigue siendo un borrador</a:t>
-            </a:r>
-            <a:r>
-              <a:rPr sz="1400" b="0" i="0">
+              <a:t>Nunca datos identificables. Para información sensible, modelos locales o institucionales.</a:t>
+            </a:r>
+          </a:p>
+        </p:txBody>
+      </p:sp>
+      <p:sp>
+        <p:nvSpPr>
+          <p:cNvPr id="10" name="Rounded Rectangle 9"/>
+          <p:cNvSpPr/>
+          <p:nvPr/>
+        </p:nvSpPr>
+        <p:spPr>
+          <a:xfrm>
+            <a:off x="2564891" y="868680"/>
+            <a:ext cx="1920240" cy="3200400"/>
+          </a:xfrm>
+          <a:prstGeom prst="roundRect">
+            <a:avLst>
+              <a:gd name="adj" fmla="val 5714"/>
+            </a:avLst>
+          </a:prstGeom>
+          <a:solidFill>
+            <a:srgbClr val="E8F0F4"/>
+          </a:solidFill>
+          <a:ln>
+            <a:noFill/>
+          </a:ln>
+        </p:spPr>
+        <p:txBody>
+          <a:bodyPr rtlCol="0" anchor="ctr"/>
+          <a:lstStyle/>
+          <a:p>
+            <a:pPr algn="ctr"/>
+            <a:endParaRPr/>
+          </a:p>
+        </p:txBody>
+      </p:sp>
+      <p:sp>
+        <p:nvSpPr>
+          <p:cNvPr id="11" name="Oval 10"/>
+          <p:cNvSpPr/>
+          <p:nvPr/>
+        </p:nvSpPr>
+        <p:spPr>
+          <a:xfrm>
+            <a:off x="3159251" y="1097280"/>
+            <a:ext cx="731520" cy="731520"/>
+          </a:xfrm>
+          <a:prstGeom prst="ellipse">
+            <a:avLst/>
+          </a:prstGeom>
+          <a:solidFill>
+            <a:srgbClr val="003C58"/>
+          </a:solidFill>
+          <a:ln>
+            <a:noFill/>
+          </a:ln>
+        </p:spPr>
+        <p:txBody>
+          <a:bodyPr rtlCol="0" anchor="ctr"/>
+          <a:lstStyle/>
+          <a:p>
+            <a:pPr algn="ctr"/>
+            <a:endParaRPr/>
+          </a:p>
+        </p:txBody>
+      </p:sp>
+      <p:pic>
+        <p:nvPicPr>
+          <p:cNvPr id="12" name="Picture 11" descr="MdGavel_blanco.png"/>
+          <p:cNvPicPr>
+            <a:picLocks noChangeAspect="1"/>
+          </p:cNvPicPr>
+          <p:nvPr/>
+        </p:nvPicPr>
+        <p:blipFill>
+          <a:blip r:embed="rId4"/>
+          <a:stretch>
+            <a:fillRect/>
+          </a:stretch>
+        </p:blipFill>
+        <p:spPr>
+          <a:xfrm>
+            <a:off x="3312871" y="1250899"/>
+            <a:ext cx="424281" cy="424281"/>
+          </a:xfrm>
+          <a:prstGeom prst="rect">
+            <a:avLst/>
+          </a:prstGeom>
+        </p:spPr>
+      </p:pic>
+      <p:sp>
+        <p:nvSpPr>
+          <p:cNvPr id="13" name="TextBox 12"/>
+          <p:cNvSpPr txBox="1"/>
+          <p:nvPr/>
+        </p:nvSpPr>
+        <p:spPr>
+          <a:xfrm>
+            <a:off x="2674620" y="2011680"/>
+            <a:ext cx="1700784" cy="365760"/>
+          </a:xfrm>
+          <a:prstGeom prst="rect">
+            <a:avLst/>
+          </a:prstGeom>
+          <a:noFill/>
+        </p:spPr>
+        <p:txBody>
+          <a:bodyPr wrap="square" lIns="0" tIns="0" rIns="0" bIns="0" anchor="t">
+            <a:noAutofit/>
+          </a:bodyPr>
+          <a:lstStyle/>
+          <a:p>
+            <a:pPr algn="ctr">
+              <a:spcAft>
+                <a:spcPts val="0"/>
+              </a:spcAft>
+            </a:pPr>
+            <a:r>
+              <a:rPr sz="1500" b="1" i="0">
+                <a:solidFill>
+                  <a:srgbClr val="003C58"/>
+                </a:solidFill>
+                <a:latin typeface="Swis721 Cn BT"/>
+              </a:rPr>
+              <a:t>Responsabilidad</a:t>
+            </a:r>
+          </a:p>
+        </p:txBody>
+      </p:sp>
+      <p:sp>
+        <p:nvSpPr>
+          <p:cNvPr id="14" name="TextBox 13"/>
+          <p:cNvSpPr txBox="1"/>
+          <p:nvPr/>
+        </p:nvSpPr>
+        <p:spPr>
+          <a:xfrm>
+            <a:off x="2729484" y="2441448"/>
+            <a:ext cx="1591056" cy="1554480"/>
+          </a:xfrm>
+          <a:prstGeom prst="rect">
+            <a:avLst/>
+          </a:prstGeom>
+          <a:noFill/>
+        </p:spPr>
+        <p:txBody>
+          <a:bodyPr wrap="square" lIns="0" tIns="0" rIns="0" bIns="0" anchor="t">
+            <a:noAutofit/>
+          </a:bodyPr>
+          <a:lstStyle/>
+          <a:p>
+            <a:pPr algn="ctr">
+              <a:spcAft>
+                <a:spcPts val="0"/>
+              </a:spcAft>
+            </a:pPr>
+            <a:r>
+              <a:rPr sz="1200" b="0" i="0">
                 <a:solidFill>
                   <a:srgbClr val="1F2A30"/>
                 </a:solidFill>
                 <a:latin typeface="Swis721 Cn BT"/>
               </a:rPr>
-              <a:t>.</a:t>
+              <a:t>La IA no es autora ni responsable: la firma y el juicio clínico son humanos.</a:t>
+            </a:r>
+          </a:p>
+        </p:txBody>
+      </p:sp>
+      <p:sp>
+        <p:nvSpPr>
+          <p:cNvPr id="15" name="Rounded Rectangle 14"/>
+          <p:cNvSpPr/>
+          <p:nvPr/>
+        </p:nvSpPr>
+        <p:spPr>
+          <a:xfrm>
+            <a:off x="4626864" y="868680"/>
+            <a:ext cx="1920240" cy="3200400"/>
+          </a:xfrm>
+          <a:prstGeom prst="roundRect">
+            <a:avLst>
+              <a:gd name="adj" fmla="val 5714"/>
+            </a:avLst>
+          </a:prstGeom>
+          <a:solidFill>
+            <a:srgbClr val="E8F0F4"/>
+          </a:solidFill>
+          <a:ln>
+            <a:noFill/>
+          </a:ln>
+        </p:spPr>
+        <p:txBody>
+          <a:bodyPr rtlCol="0" anchor="ctr"/>
+          <a:lstStyle/>
+          <a:p>
+            <a:pPr algn="ctr"/>
+            <a:endParaRPr/>
+          </a:p>
+        </p:txBody>
+      </p:sp>
+      <p:sp>
+        <p:nvSpPr>
+          <p:cNvPr id="16" name="Oval 15"/>
+          <p:cNvSpPr/>
+          <p:nvPr/>
+        </p:nvSpPr>
+        <p:spPr>
+          <a:xfrm>
+            <a:off x="5221223" y="1097280"/>
+            <a:ext cx="731520" cy="731520"/>
+          </a:xfrm>
+          <a:prstGeom prst="ellipse">
+            <a:avLst/>
+          </a:prstGeom>
+          <a:solidFill>
+            <a:srgbClr val="06717E"/>
+          </a:solidFill>
+          <a:ln>
+            <a:noFill/>
+          </a:ln>
+        </p:spPr>
+        <p:txBody>
+          <a:bodyPr rtlCol="0" anchor="ctr"/>
+          <a:lstStyle/>
+          <a:p>
+            <a:pPr algn="ctr"/>
+            <a:endParaRPr/>
+          </a:p>
+        </p:txBody>
+      </p:sp>
+      <p:pic>
+        <p:nvPicPr>
+          <p:cNvPr id="17" name="Picture 16" descr="MdVisibility_blanco.png"/>
+          <p:cNvPicPr>
+            <a:picLocks noChangeAspect="1"/>
+          </p:cNvPicPr>
+          <p:nvPr/>
+        </p:nvPicPr>
+        <p:blipFill>
+          <a:blip r:embed="rId5"/>
+          <a:stretch>
+            <a:fillRect/>
+          </a:stretch>
+        </p:blipFill>
+        <p:spPr>
+          <a:xfrm>
+            <a:off x="5374843" y="1250899"/>
+            <a:ext cx="424281" cy="424281"/>
+          </a:xfrm>
+          <a:prstGeom prst="rect">
+            <a:avLst/>
+          </a:prstGeom>
+        </p:spPr>
+      </p:pic>
+      <p:sp>
+        <p:nvSpPr>
+          <p:cNvPr id="18" name="TextBox 17"/>
+          <p:cNvSpPr txBox="1"/>
+          <p:nvPr/>
+        </p:nvSpPr>
+        <p:spPr>
+          <a:xfrm>
+            <a:off x="4736592" y="2011680"/>
+            <a:ext cx="1700784" cy="365760"/>
+          </a:xfrm>
+          <a:prstGeom prst="rect">
+            <a:avLst/>
+          </a:prstGeom>
+          <a:noFill/>
+        </p:spPr>
+        <p:txBody>
+          <a:bodyPr wrap="square" lIns="0" tIns="0" rIns="0" bIns="0" anchor="t">
+            <a:noAutofit/>
+          </a:bodyPr>
+          <a:lstStyle/>
+          <a:p>
+            <a:pPr algn="ctr">
+              <a:spcAft>
+                <a:spcPts val="0"/>
+              </a:spcAft>
+            </a:pPr>
+            <a:r>
+              <a:rPr sz="1500" b="1" i="0">
+                <a:solidFill>
+                  <a:srgbClr val="003C58"/>
+                </a:solidFill>
+                <a:latin typeface="Swis721 Cn BT"/>
+              </a:rPr>
+              <a:t>Transparencia</a:t>
+            </a:r>
+          </a:p>
+        </p:txBody>
+      </p:sp>
+      <p:sp>
+        <p:nvSpPr>
+          <p:cNvPr id="19" name="TextBox 18"/>
+          <p:cNvSpPr txBox="1"/>
+          <p:nvPr/>
+        </p:nvSpPr>
+        <p:spPr>
+          <a:xfrm>
+            <a:off x="4791455" y="2441448"/>
+            <a:ext cx="1591056" cy="1554480"/>
+          </a:xfrm>
+          <a:prstGeom prst="rect">
+            <a:avLst/>
+          </a:prstGeom>
+          <a:noFill/>
+        </p:spPr>
+        <p:txBody>
+          <a:bodyPr wrap="square" lIns="0" tIns="0" rIns="0" bIns="0" anchor="t">
+            <a:noAutofit/>
+          </a:bodyPr>
+          <a:lstStyle/>
+          <a:p>
+            <a:pPr algn="ctr">
+              <a:spcAft>
+                <a:spcPts val="0"/>
+              </a:spcAft>
+            </a:pPr>
+            <a:r>
+              <a:rPr sz="1200" b="0" i="0">
+                <a:solidFill>
+                  <a:srgbClr val="1F2A30"/>
+                </a:solidFill>
+                <a:latin typeface="Swis721 Cn BT"/>
+              </a:rPr>
+              <a:t>Declara plataforma, versión, fecha y uso. En investigación, sigue TRIPOD-LLM.</a:t>
+            </a:r>
+          </a:p>
+        </p:txBody>
+      </p:sp>
+      <p:sp>
+        <p:nvSpPr>
+          <p:cNvPr id="20" name="Rounded Rectangle 19"/>
+          <p:cNvSpPr/>
+          <p:nvPr/>
+        </p:nvSpPr>
+        <p:spPr>
+          <a:xfrm>
+            <a:off x="6688836" y="868680"/>
+            <a:ext cx="1920240" cy="3200400"/>
+          </a:xfrm>
+          <a:prstGeom prst="roundRect">
+            <a:avLst>
+              <a:gd name="adj" fmla="val 5714"/>
+            </a:avLst>
+          </a:prstGeom>
+          <a:solidFill>
+            <a:srgbClr val="E8F0F4"/>
+          </a:solidFill>
+          <a:ln>
+            <a:noFill/>
+          </a:ln>
+        </p:spPr>
+        <p:txBody>
+          <a:bodyPr rtlCol="0" anchor="ctr"/>
+          <a:lstStyle/>
+          <a:p>
+            <a:pPr algn="ctr"/>
+            <a:endParaRPr/>
+          </a:p>
+        </p:txBody>
+      </p:sp>
+      <p:sp>
+        <p:nvSpPr>
+          <p:cNvPr id="21" name="Oval 20"/>
+          <p:cNvSpPr/>
+          <p:nvPr/>
+        </p:nvSpPr>
+        <p:spPr>
+          <a:xfrm>
+            <a:off x="7283196" y="1097280"/>
+            <a:ext cx="731520" cy="731520"/>
+          </a:xfrm>
+          <a:prstGeom prst="ellipse">
+            <a:avLst/>
+          </a:prstGeom>
+          <a:solidFill>
+            <a:srgbClr val="003C58"/>
+          </a:solidFill>
+          <a:ln>
+            <a:noFill/>
+          </a:ln>
+        </p:spPr>
+        <p:txBody>
+          <a:bodyPr rtlCol="0" anchor="ctr"/>
+          <a:lstStyle/>
+          <a:p>
+            <a:pPr algn="ctr"/>
+            <a:endParaRPr/>
+          </a:p>
+        </p:txBody>
+      </p:sp>
+      <p:pic>
+        <p:nvPicPr>
+          <p:cNvPr id="22" name="Picture 21" descr="MdBalance_blanco.png"/>
+          <p:cNvPicPr>
+            <a:picLocks noChangeAspect="1"/>
+          </p:cNvPicPr>
+          <p:nvPr/>
+        </p:nvPicPr>
+        <p:blipFill>
+          <a:blip r:embed="rId6"/>
+          <a:stretch>
+            <a:fillRect/>
+          </a:stretch>
+        </p:blipFill>
+        <p:spPr>
+          <a:xfrm>
+            <a:off x="7436815" y="1250899"/>
+            <a:ext cx="424281" cy="424281"/>
+          </a:xfrm>
+          <a:prstGeom prst="rect">
+            <a:avLst/>
+          </a:prstGeom>
+        </p:spPr>
+      </p:pic>
+      <p:sp>
+        <p:nvSpPr>
+          <p:cNvPr id="23" name="TextBox 22"/>
+          <p:cNvSpPr txBox="1"/>
+          <p:nvPr/>
+        </p:nvSpPr>
+        <p:spPr>
+          <a:xfrm>
+            <a:off x="6798564" y="2011680"/>
+            <a:ext cx="1700784" cy="365760"/>
+          </a:xfrm>
+          <a:prstGeom prst="rect">
+            <a:avLst/>
+          </a:prstGeom>
+          <a:noFill/>
+        </p:spPr>
+        <p:txBody>
+          <a:bodyPr wrap="square" lIns="0" tIns="0" rIns="0" bIns="0" anchor="t">
+            <a:noAutofit/>
+          </a:bodyPr>
+          <a:lstStyle/>
+          <a:p>
+            <a:pPr algn="ctr">
+              <a:spcAft>
+                <a:spcPts val="0"/>
+              </a:spcAft>
+            </a:pPr>
+            <a:r>
+              <a:rPr sz="1500" b="1" i="0">
+                <a:solidFill>
+                  <a:srgbClr val="003C58"/>
+                </a:solidFill>
+                <a:latin typeface="Swis721 Cn BT"/>
+              </a:rPr>
+              <a:t>Equidad</a:t>
+            </a:r>
+          </a:p>
+        </p:txBody>
+      </p:sp>
+      <p:sp>
+        <p:nvSpPr>
+          <p:cNvPr id="24" name="TextBox 23"/>
+          <p:cNvSpPr txBox="1"/>
+          <p:nvPr/>
+        </p:nvSpPr>
+        <p:spPr>
+          <a:xfrm>
+            <a:off x="6853427" y="2441448"/>
+            <a:ext cx="1591056" cy="1554480"/>
+          </a:xfrm>
+          <a:prstGeom prst="rect">
+            <a:avLst/>
+          </a:prstGeom>
+          <a:noFill/>
+        </p:spPr>
+        <p:txBody>
+          <a:bodyPr wrap="square" lIns="0" tIns="0" rIns="0" bIns="0" anchor="t">
+            <a:noAutofit/>
+          </a:bodyPr>
+          <a:lstStyle/>
+          <a:p>
+            <a:pPr algn="ctr">
+              <a:spcAft>
+                <a:spcPts val="0"/>
+              </a:spcAft>
+            </a:pPr>
+            <a:r>
+              <a:rPr sz="1200" b="0" i="0">
+                <a:solidFill>
+                  <a:srgbClr val="1F2A30"/>
+                </a:solidFill>
+                <a:latin typeface="Swis721 Cn BT"/>
+              </a:rPr>
+              <a:t>La IA reproduce sesgos de sus datos: revisa lenguaje, supuestos e interculturalidad.</a:t>
             </a:r>
           </a:p>
         </p:txBody>
@@ -26958,7 +27074,7 @@
 </file>
 
 <file path=ppt/slides/slide32.xml><?xml version="1.0" encoding="utf-8"?>
-<p:sld xmlns:a="http://schemas.openxmlformats.org/drawingml/2006/main" xmlns:r="http://schemas.openxmlformats.org/officeDocument/2006/relationships" xmlns:p="http://schemas.openxmlformats.org/presentationml/2006/main" show="0">
+<p:sld xmlns:a="http://schemas.openxmlformats.org/drawingml/2006/main" xmlns:r="http://schemas.openxmlformats.org/officeDocument/2006/relationships" xmlns:p="http://schemas.openxmlformats.org/presentationml/2006/main">
   <p:cSld>
     <p:spTree>
       <p:nvGrpSpPr>
@@ -26990,29 +27106,65 @@
           <a:lstStyle/>
           <a:p>
             <a:r>
-              <a:t>Materiales educativos: la IA hace el borrador, la docente el nivel</a:t>
-            </a:r>
-          </a:p>
-        </p:txBody>
-      </p:sp>
-      <p:sp>
-        <p:nvSpPr>
-          <p:cNvPr id="4" name="Text Placeholder 3"/>
-          <p:cNvSpPr>
-            <a:spLocks noGrp="1"/>
-          </p:cNvSpPr>
-          <p:nvPr>
-            <p:ph type="body" sz="quarter" idx="11"/>
-          </p:nvPr>
-        </p:nvSpPr>
-        <p:spPr>
-          <a:xfrm>
-            <a:off x="1618488" y="4480560"/>
-            <a:ext cx="4983480" cy="457200"/>
-          </a:xfrm>
-        </p:spPr>
-        <p:txBody>
-          <a:bodyPr/>
+              <a:t>Lista de cotejo antes de usar un producto generado con IA</a:t>
+            </a:r>
+          </a:p>
+        </p:txBody>
+      </p:sp>
+      <p:sp>
+        <p:nvSpPr>
+          <p:cNvPr id="3" name="Rounded Rectangle 2"/>
+          <p:cNvSpPr/>
+          <p:nvPr/>
+        </p:nvSpPr>
+        <p:spPr>
+          <a:xfrm>
+            <a:off x="502920" y="941832"/>
+            <a:ext cx="329184" cy="329184"/>
+          </a:xfrm>
+          <a:prstGeom prst="roundRect">
+            <a:avLst>
+              <a:gd name="adj" fmla="val 16666"/>
+            </a:avLst>
+          </a:prstGeom>
+          <a:solidFill>
+            <a:srgbClr val="FFFFFF"/>
+          </a:solidFill>
+          <a:ln w="25400">
+            <a:solidFill>
+              <a:srgbClr val="003C58"/>
+            </a:solidFill>
+          </a:ln>
+        </p:spPr>
+        <p:txBody>
+          <a:bodyPr rtlCol="0" anchor="ctr"/>
+          <a:lstStyle/>
+          <a:p>
+            <a:pPr algn="ctr"/>
+            <a:endParaRPr/>
+          </a:p>
+        </p:txBody>
+      </p:sp>
+      <p:sp>
+        <p:nvSpPr>
+          <p:cNvPr id="4" name="TextBox 3"/>
+          <p:cNvSpPr txBox="1"/>
+          <p:nvPr/>
+        </p:nvSpPr>
+        <p:spPr>
+          <a:xfrm>
+            <a:off x="978408" y="868680"/>
+            <a:ext cx="3520440" cy="566928"/>
+          </a:xfrm>
+          <a:prstGeom prst="rect">
+            <a:avLst/>
+          </a:prstGeom>
+          <a:noFill/>
+        </p:spPr>
+        <p:txBody>
+          <a:bodyPr wrap="square" lIns="0" tIns="0" rIns="0" bIns="0" anchor="ctr">
+            <a:noAutofit/>
+          </a:bodyPr>
           <a:lstStyle/>
           <a:p>
             <a:pPr algn="l">
@@ -27021,13 +27173,13 @@
               </a:spcAft>
             </a:pPr>
             <a:r>
-              <a:rPr sz="900" b="0" i="0">
-                <a:solidFill>
-                  <a:srgbClr val="003C58"/>
-                </a:solidFill>
-                <a:latin typeface="Swis721 Cn BT"/>
-              </a:rPr>
-              <a:t>Fuentes: [18] Yapıcı Coşkun et al., 2025 · [4] Kranz y Abele, 2024</a:t>
+              <a:rPr sz="1300" b="0" i="0">
+                <a:solidFill>
+                  <a:srgbClr val="1F2A30"/>
+                </a:solidFill>
+                <a:latin typeface="Swis721 Cn BT"/>
+              </a:rPr>
+              <a:t>Cada afirmación clínica tiene respaldo en una fuente oficial vigente (página).</a:t>
             </a:r>
           </a:p>
         </p:txBody>
@@ -27040,16 +27192,527 @@
         </p:nvSpPr>
         <p:spPr>
           <a:xfrm>
-            <a:off x="502920" y="868680"/>
-            <a:ext cx="1645920" cy="1508760"/>
+            <a:off x="502920" y="1600200"/>
+            <a:ext cx="329184" cy="329184"/>
           </a:xfrm>
           <a:prstGeom prst="roundRect">
             <a:avLst>
-              <a:gd name="adj" fmla="val 7272"/>
+              <a:gd name="adj" fmla="val 16666"/>
             </a:avLst>
           </a:prstGeom>
           <a:solidFill>
-            <a:srgbClr val="E8F0F4"/>
+            <a:srgbClr val="FFFFFF"/>
+          </a:solidFill>
+          <a:ln w="25400">
+            <a:solidFill>
+              <a:srgbClr val="003C58"/>
+            </a:solidFill>
+          </a:ln>
+        </p:spPr>
+        <p:txBody>
+          <a:bodyPr rtlCol="0" anchor="ctr"/>
+          <a:lstStyle/>
+          <a:p>
+            <a:pPr algn="ctr"/>
+            <a:endParaRPr/>
+          </a:p>
+        </p:txBody>
+      </p:sp>
+      <p:sp>
+        <p:nvSpPr>
+          <p:cNvPr id="6" name="TextBox 5"/>
+          <p:cNvSpPr txBox="1"/>
+          <p:nvPr/>
+        </p:nvSpPr>
+        <p:spPr>
+          <a:xfrm>
+            <a:off x="978408" y="1527048"/>
+            <a:ext cx="3520440" cy="566928"/>
+          </a:xfrm>
+          <a:prstGeom prst="rect">
+            <a:avLst/>
+          </a:prstGeom>
+          <a:noFill/>
+        </p:spPr>
+        <p:txBody>
+          <a:bodyPr wrap="square" lIns="0" tIns="0" rIns="0" bIns="0" anchor="ctr">
+            <a:noAutofit/>
+          </a:bodyPr>
+          <a:lstStyle/>
+          <a:p>
+            <a:pPr algn="l">
+              <a:spcAft>
+                <a:spcPts val="0"/>
+              </a:spcAft>
+            </a:pPr>
+            <a:r>
+              <a:rPr sz="1300" b="0" i="0">
+                <a:solidFill>
+                  <a:srgbClr val="1F2A30"/>
+                </a:solidFill>
+                <a:latin typeface="Swis721 Cn BT"/>
+              </a:rPr>
+              <a:t>Cada referencia existe y su DOI resuelve.</a:t>
+            </a:r>
+          </a:p>
+        </p:txBody>
+      </p:sp>
+      <p:sp>
+        <p:nvSpPr>
+          <p:cNvPr id="7" name="Rounded Rectangle 6"/>
+          <p:cNvSpPr/>
+          <p:nvPr/>
+        </p:nvSpPr>
+        <p:spPr>
+          <a:xfrm>
+            <a:off x="502920" y="2258568"/>
+            <a:ext cx="329184" cy="329184"/>
+          </a:xfrm>
+          <a:prstGeom prst="roundRect">
+            <a:avLst>
+              <a:gd name="adj" fmla="val 16666"/>
+            </a:avLst>
+          </a:prstGeom>
+          <a:solidFill>
+            <a:srgbClr val="FFFFFF"/>
+          </a:solidFill>
+          <a:ln w="25400">
+            <a:solidFill>
+              <a:srgbClr val="003C58"/>
+            </a:solidFill>
+          </a:ln>
+        </p:spPr>
+        <p:txBody>
+          <a:bodyPr rtlCol="0" anchor="ctr"/>
+          <a:lstStyle/>
+          <a:p>
+            <a:pPr algn="ctr"/>
+            <a:endParaRPr/>
+          </a:p>
+        </p:txBody>
+      </p:sp>
+      <p:sp>
+        <p:nvSpPr>
+          <p:cNvPr id="8" name="TextBox 7"/>
+          <p:cNvSpPr txBox="1"/>
+          <p:nvPr/>
+        </p:nvSpPr>
+        <p:spPr>
+          <a:xfrm>
+            <a:off x="978408" y="2185415"/>
+            <a:ext cx="3520440" cy="566928"/>
+          </a:xfrm>
+          <a:prstGeom prst="rect">
+            <a:avLst/>
+          </a:prstGeom>
+          <a:noFill/>
+        </p:spPr>
+        <p:txBody>
+          <a:bodyPr wrap="square" lIns="0" tIns="0" rIns="0" bIns="0" anchor="ctr">
+            <a:noAutofit/>
+          </a:bodyPr>
+          <a:lstStyle/>
+          <a:p>
+            <a:pPr algn="l">
+              <a:spcAft>
+                <a:spcPts val="0"/>
+              </a:spcAft>
+            </a:pPr>
+            <a:r>
+              <a:rPr sz="1300" b="0" i="0">
+                <a:solidFill>
+                  <a:srgbClr val="1F2A30"/>
+                </a:solidFill>
+                <a:latin typeface="Swis721 Cn BT"/>
+              </a:rPr>
+              <a:t>No se ingresaron datos identificables de pacientes.</a:t>
+            </a:r>
+          </a:p>
+        </p:txBody>
+      </p:sp>
+      <p:sp>
+        <p:nvSpPr>
+          <p:cNvPr id="9" name="Rounded Rectangle 8"/>
+          <p:cNvSpPr/>
+          <p:nvPr/>
+        </p:nvSpPr>
+        <p:spPr>
+          <a:xfrm>
+            <a:off x="502920" y="2916936"/>
+            <a:ext cx="329184" cy="329184"/>
+          </a:xfrm>
+          <a:prstGeom prst="roundRect">
+            <a:avLst>
+              <a:gd name="adj" fmla="val 16666"/>
+            </a:avLst>
+          </a:prstGeom>
+          <a:solidFill>
+            <a:srgbClr val="FFFFFF"/>
+          </a:solidFill>
+          <a:ln w="25400">
+            <a:solidFill>
+              <a:srgbClr val="003C58"/>
+            </a:solidFill>
+          </a:ln>
+        </p:spPr>
+        <p:txBody>
+          <a:bodyPr rtlCol="0" anchor="ctr"/>
+          <a:lstStyle/>
+          <a:p>
+            <a:pPr algn="ctr"/>
+            <a:endParaRPr/>
+          </a:p>
+        </p:txBody>
+      </p:sp>
+      <p:sp>
+        <p:nvSpPr>
+          <p:cNvPr id="10" name="TextBox 9"/>
+          <p:cNvSpPr txBox="1"/>
+          <p:nvPr/>
+        </p:nvSpPr>
+        <p:spPr>
+          <a:xfrm>
+            <a:off x="978408" y="2843784"/>
+            <a:ext cx="3520440" cy="566928"/>
+          </a:xfrm>
+          <a:prstGeom prst="rect">
+            <a:avLst/>
+          </a:prstGeom>
+          <a:noFill/>
+        </p:spPr>
+        <p:txBody>
+          <a:bodyPr wrap="square" lIns="0" tIns="0" rIns="0" bIns="0" anchor="ctr">
+            <a:noAutofit/>
+          </a:bodyPr>
+          <a:lstStyle/>
+          <a:p>
+            <a:pPr algn="l">
+              <a:spcAft>
+                <a:spcPts val="0"/>
+              </a:spcAft>
+            </a:pPr>
+            <a:r>
+              <a:rPr sz="1300" b="0" i="0">
+                <a:solidFill>
+                  <a:srgbClr val="1F2A30"/>
+                </a:solidFill>
+                <a:latin typeface="Swis721 Cn BT"/>
+              </a:rPr>
+              <a:t>El prompt se probó en al menos dos modelos o repeticiones.</a:t>
+            </a:r>
+          </a:p>
+        </p:txBody>
+      </p:sp>
+      <p:sp>
+        <p:nvSpPr>
+          <p:cNvPr id="11" name="Rounded Rectangle 10"/>
+          <p:cNvSpPr/>
+          <p:nvPr/>
+        </p:nvSpPr>
+        <p:spPr>
+          <a:xfrm>
+            <a:off x="4617720" y="941832"/>
+            <a:ext cx="329184" cy="329184"/>
+          </a:xfrm>
+          <a:prstGeom prst="roundRect">
+            <a:avLst>
+              <a:gd name="adj" fmla="val 16666"/>
+            </a:avLst>
+          </a:prstGeom>
+          <a:solidFill>
+            <a:srgbClr val="FFFFFF"/>
+          </a:solidFill>
+          <a:ln w="25400">
+            <a:solidFill>
+              <a:srgbClr val="003C58"/>
+            </a:solidFill>
+          </a:ln>
+        </p:spPr>
+        <p:txBody>
+          <a:bodyPr rtlCol="0" anchor="ctr"/>
+          <a:lstStyle/>
+          <a:p>
+            <a:pPr algn="ctr"/>
+            <a:endParaRPr/>
+          </a:p>
+        </p:txBody>
+      </p:sp>
+      <p:sp>
+        <p:nvSpPr>
+          <p:cNvPr id="12" name="TextBox 11"/>
+          <p:cNvSpPr txBox="1"/>
+          <p:nvPr/>
+        </p:nvSpPr>
+        <p:spPr>
+          <a:xfrm>
+            <a:off x="5093208" y="868680"/>
+            <a:ext cx="3520440" cy="566928"/>
+          </a:xfrm>
+          <a:prstGeom prst="rect">
+            <a:avLst/>
+          </a:prstGeom>
+          <a:noFill/>
+        </p:spPr>
+        <p:txBody>
+          <a:bodyPr wrap="square" lIns="0" tIns="0" rIns="0" bIns="0" anchor="ctr">
+            <a:noAutofit/>
+          </a:bodyPr>
+          <a:lstStyle/>
+          <a:p>
+            <a:pPr algn="l">
+              <a:spcAft>
+                <a:spcPts val="0"/>
+              </a:spcAft>
+            </a:pPr>
+            <a:r>
+              <a:rPr sz="1300" b="0" i="0">
+                <a:solidFill>
+                  <a:srgbClr val="1F2A30"/>
+                </a:solidFill>
+                <a:latin typeface="Swis721 Cn BT"/>
+              </a:rPr>
+              <a:t>Lo revisó una matrona o un equipo con experiencia en el tema.</a:t>
+            </a:r>
+          </a:p>
+        </p:txBody>
+      </p:sp>
+      <p:sp>
+        <p:nvSpPr>
+          <p:cNvPr id="13" name="Rounded Rectangle 12"/>
+          <p:cNvSpPr/>
+          <p:nvPr/>
+        </p:nvSpPr>
+        <p:spPr>
+          <a:xfrm>
+            <a:off x="4617720" y="1600200"/>
+            <a:ext cx="329184" cy="329184"/>
+          </a:xfrm>
+          <a:prstGeom prst="roundRect">
+            <a:avLst>
+              <a:gd name="adj" fmla="val 16666"/>
+            </a:avLst>
+          </a:prstGeom>
+          <a:solidFill>
+            <a:srgbClr val="FFFFFF"/>
+          </a:solidFill>
+          <a:ln w="25400">
+            <a:solidFill>
+              <a:srgbClr val="003C58"/>
+            </a:solidFill>
+          </a:ln>
+        </p:spPr>
+        <p:txBody>
+          <a:bodyPr rtlCol="0" anchor="ctr"/>
+          <a:lstStyle/>
+          <a:p>
+            <a:pPr algn="ctr"/>
+            <a:endParaRPr/>
+          </a:p>
+        </p:txBody>
+      </p:sp>
+      <p:sp>
+        <p:nvSpPr>
+          <p:cNvPr id="14" name="TextBox 13"/>
+          <p:cNvSpPr txBox="1"/>
+          <p:nvPr/>
+        </p:nvSpPr>
+        <p:spPr>
+          <a:xfrm>
+            <a:off x="5093208" y="1527048"/>
+            <a:ext cx="3520440" cy="566928"/>
+          </a:xfrm>
+          <a:prstGeom prst="rect">
+            <a:avLst/>
+          </a:prstGeom>
+          <a:noFill/>
+        </p:spPr>
+        <p:txBody>
+          <a:bodyPr wrap="square" lIns="0" tIns="0" rIns="0" bIns="0" anchor="ctr">
+            <a:noAutofit/>
+          </a:bodyPr>
+          <a:lstStyle/>
+          <a:p>
+            <a:pPr algn="l">
+              <a:spcAft>
+                <a:spcPts val="0"/>
+              </a:spcAft>
+            </a:pPr>
+            <a:r>
+              <a:rPr sz="1300" b="0" i="0">
+                <a:solidFill>
+                  <a:srgbClr val="1F2A30"/>
+                </a:solidFill>
+                <a:latin typeface="Swis721 Cn BT"/>
+              </a:rPr>
+              <a:t>Cumple la estructura institucional del documento.</a:t>
+            </a:r>
+          </a:p>
+        </p:txBody>
+      </p:sp>
+      <p:sp>
+        <p:nvSpPr>
+          <p:cNvPr id="15" name="Rounded Rectangle 14"/>
+          <p:cNvSpPr/>
+          <p:nvPr/>
+        </p:nvSpPr>
+        <p:spPr>
+          <a:xfrm>
+            <a:off x="4617720" y="2258568"/>
+            <a:ext cx="329184" cy="329184"/>
+          </a:xfrm>
+          <a:prstGeom prst="roundRect">
+            <a:avLst>
+              <a:gd name="adj" fmla="val 16666"/>
+            </a:avLst>
+          </a:prstGeom>
+          <a:solidFill>
+            <a:srgbClr val="FFFFFF"/>
+          </a:solidFill>
+          <a:ln w="25400">
+            <a:solidFill>
+              <a:srgbClr val="003C58"/>
+            </a:solidFill>
+          </a:ln>
+        </p:spPr>
+        <p:txBody>
+          <a:bodyPr rtlCol="0" anchor="ctr"/>
+          <a:lstStyle/>
+          <a:p>
+            <a:pPr algn="ctr"/>
+            <a:endParaRPr/>
+          </a:p>
+        </p:txBody>
+      </p:sp>
+      <p:sp>
+        <p:nvSpPr>
+          <p:cNvPr id="16" name="TextBox 15"/>
+          <p:cNvSpPr txBox="1"/>
+          <p:nvPr/>
+        </p:nvSpPr>
+        <p:spPr>
+          <a:xfrm>
+            <a:off x="5093208" y="2185415"/>
+            <a:ext cx="3520440" cy="566928"/>
+          </a:xfrm>
+          <a:prstGeom prst="rect">
+            <a:avLst/>
+          </a:prstGeom>
+          <a:noFill/>
+        </p:spPr>
+        <p:txBody>
+          <a:bodyPr wrap="square" lIns="0" tIns="0" rIns="0" bIns="0" anchor="ctr">
+            <a:noAutofit/>
+          </a:bodyPr>
+          <a:lstStyle/>
+          <a:p>
+            <a:pPr algn="l">
+              <a:spcAft>
+                <a:spcPts val="0"/>
+              </a:spcAft>
+            </a:pPr>
+            <a:r>
+              <a:rPr sz="1300" b="0" i="0">
+                <a:solidFill>
+                  <a:srgbClr val="1F2A30"/>
+                </a:solidFill>
+                <a:latin typeface="Swis721 Cn BT"/>
+              </a:rPr>
+              <a:t>El lenguaje es adecuado a su público (usuarias, estudiantes, equipo).</a:t>
+            </a:r>
+          </a:p>
+        </p:txBody>
+      </p:sp>
+      <p:sp>
+        <p:nvSpPr>
+          <p:cNvPr id="17" name="Rounded Rectangle 16"/>
+          <p:cNvSpPr/>
+          <p:nvPr/>
+        </p:nvSpPr>
+        <p:spPr>
+          <a:xfrm>
+            <a:off x="4617720" y="2916936"/>
+            <a:ext cx="329184" cy="329184"/>
+          </a:xfrm>
+          <a:prstGeom prst="roundRect">
+            <a:avLst>
+              <a:gd name="adj" fmla="val 16666"/>
+            </a:avLst>
+          </a:prstGeom>
+          <a:solidFill>
+            <a:srgbClr val="FFFFFF"/>
+          </a:solidFill>
+          <a:ln w="25400">
+            <a:solidFill>
+              <a:srgbClr val="003C58"/>
+            </a:solidFill>
+          </a:ln>
+        </p:spPr>
+        <p:txBody>
+          <a:bodyPr rtlCol="0" anchor="ctr"/>
+          <a:lstStyle/>
+          <a:p>
+            <a:pPr algn="ctr"/>
+            <a:endParaRPr/>
+          </a:p>
+        </p:txBody>
+      </p:sp>
+      <p:sp>
+        <p:nvSpPr>
+          <p:cNvPr id="18" name="TextBox 17"/>
+          <p:cNvSpPr txBox="1"/>
+          <p:nvPr/>
+        </p:nvSpPr>
+        <p:spPr>
+          <a:xfrm>
+            <a:off x="5093208" y="2843784"/>
+            <a:ext cx="3520440" cy="566928"/>
+          </a:xfrm>
+          <a:prstGeom prst="rect">
+            <a:avLst/>
+          </a:prstGeom>
+          <a:noFill/>
+        </p:spPr>
+        <p:txBody>
+          <a:bodyPr wrap="square" lIns="0" tIns="0" rIns="0" bIns="0" anchor="ctr">
+            <a:noAutofit/>
+          </a:bodyPr>
+          <a:lstStyle/>
+          <a:p>
+            <a:pPr algn="l">
+              <a:spcAft>
+                <a:spcPts val="0"/>
+              </a:spcAft>
+            </a:pPr>
+            <a:r>
+              <a:rPr sz="1300" b="0" i="0">
+                <a:solidFill>
+                  <a:srgbClr val="1F2A30"/>
+                </a:solidFill>
+                <a:latin typeface="Swis721 Cn BT"/>
+              </a:rPr>
+              <a:t>Se registró plataforma, versión, fecha y prompt usado.</a:t>
+            </a:r>
+          </a:p>
+        </p:txBody>
+      </p:sp>
+      <p:sp>
+        <p:nvSpPr>
+          <p:cNvPr id="19" name="Rounded Rectangle 18"/>
+          <p:cNvSpPr/>
+          <p:nvPr/>
+        </p:nvSpPr>
+        <p:spPr>
+          <a:xfrm>
+            <a:off x="502920" y="3584448"/>
+            <a:ext cx="8138159" cy="484632"/>
+          </a:xfrm>
+          <a:prstGeom prst="roundRect">
+            <a:avLst>
+              <a:gd name="adj" fmla="val 18867"/>
+            </a:avLst>
+          </a:prstGeom>
+          <a:solidFill>
+            <a:srgbClr val="FFF3C4"/>
           </a:solidFill>
           <a:ln>
             <a:noFill/>
@@ -27066,76 +27729,22 @@
       </p:sp>
       <p:sp>
         <p:nvSpPr>
-          <p:cNvPr id="6" name="Oval 5"/>
-          <p:cNvSpPr/>
-          <p:nvPr/>
-        </p:nvSpPr>
-        <p:spPr>
-          <a:xfrm>
-            <a:off x="1069848" y="1005839"/>
-            <a:ext cx="512064" cy="512064"/>
-          </a:xfrm>
-          <a:prstGeom prst="ellipse">
-            <a:avLst/>
-          </a:prstGeom>
-          <a:solidFill>
-            <a:srgbClr val="003C58"/>
-          </a:solidFill>
-          <a:ln>
-            <a:noFill/>
-          </a:ln>
-        </p:spPr>
-        <p:txBody>
-          <a:bodyPr rtlCol="0" anchor="ctr"/>
-          <a:lstStyle/>
-          <a:p>
-            <a:pPr algn="ctr"/>
-            <a:endParaRPr/>
-          </a:p>
-        </p:txBody>
-      </p:sp>
-      <p:pic>
-        <p:nvPicPr>
-          <p:cNvPr id="7" name="Picture 6" descr="MdTheaters_blanco.png"/>
-          <p:cNvPicPr>
-            <a:picLocks noChangeAspect="1"/>
-          </p:cNvPicPr>
-          <p:nvPr/>
-        </p:nvPicPr>
-        <p:blipFill>
-          <a:blip r:embed="rId3"/>
-          <a:stretch>
-            <a:fillRect/>
-          </a:stretch>
-        </p:blipFill>
-        <p:spPr>
-          <a:xfrm>
-            <a:off x="1177381" y="1113373"/>
-            <a:ext cx="296997" cy="296997"/>
+          <p:cNvPr id="20" name="TextBox 19"/>
+          <p:cNvSpPr txBox="1"/>
+          <p:nvPr/>
+        </p:nvSpPr>
+        <p:spPr>
+          <a:xfrm>
+            <a:off x="731520" y="3584448"/>
+            <a:ext cx="7680960" cy="484632"/>
           </a:xfrm>
           <a:prstGeom prst="rect">
             <a:avLst/>
           </a:prstGeom>
-        </p:spPr>
-      </p:pic>
-      <p:sp>
-        <p:nvSpPr>
-          <p:cNvPr id="8" name="TextBox 7"/>
-          <p:cNvSpPr txBox="1"/>
-          <p:nvPr/>
-        </p:nvSpPr>
-        <p:spPr>
-          <a:xfrm>
-            <a:off x="594360" y="1581912"/>
-            <a:ext cx="1463040" cy="292608"/>
-          </a:xfrm>
-          <a:prstGeom prst="rect">
-            <a:avLst/>
-          </a:prstGeom>
           <a:noFill/>
         </p:spPr>
         <p:txBody>
-          <a:bodyPr wrap="square" lIns="0" tIns="0" rIns="0" bIns="0" anchor="t">
+          <a:bodyPr wrap="square" lIns="0" tIns="0" rIns="0" bIns="0" anchor="ctr">
             <a:noAutofit/>
           </a:bodyPr>
           <a:lstStyle/>
@@ -27146,1007 +27755,31 @@
               </a:spcAft>
             </a:pPr>
             <a:r>
-              <a:rPr sz="1200" b="1" i="0">
-                <a:solidFill>
-                  <a:srgbClr val="003C58"/>
-                </a:solidFill>
-                <a:latin typeface="Swis721 Cn BT"/>
-              </a:rPr>
-              <a:t>Casos simulados</a:t>
-            </a:r>
-          </a:p>
-        </p:txBody>
-      </p:sp>
-      <p:sp>
-        <p:nvSpPr>
-          <p:cNvPr id="9" name="TextBox 8"/>
-          <p:cNvSpPr txBox="1"/>
-          <p:nvPr/>
-        </p:nvSpPr>
-        <p:spPr>
-          <a:xfrm>
-            <a:off x="594360" y="1856232"/>
-            <a:ext cx="1463040" cy="502920"/>
-          </a:xfrm>
-          <a:prstGeom prst="rect">
-            <a:avLst/>
-          </a:prstGeom>
-          <a:noFill/>
-        </p:spPr>
-        <p:txBody>
-          <a:bodyPr wrap="square" lIns="0" tIns="0" rIns="0" bIns="0" anchor="t">
-            <a:noAutofit/>
-          </a:bodyPr>
-          <a:lstStyle/>
-          <a:p>
-            <a:pPr algn="ctr">
-              <a:spcAft>
-                <a:spcPts val="0"/>
-              </a:spcAft>
-            </a:pPr>
-            <a:r>
-              <a:rPr sz="1050" b="0" i="0">
+              <a:rPr sz="1400" b="0" i="0">
                 <a:solidFill>
                   <a:srgbClr val="1F2A30"/>
                 </a:solidFill>
                 <a:latin typeface="Swis721 Cn BT"/>
               </a:rPr>
-              <a:t>con evolución y decisiones</a:t>
-            </a:r>
-          </a:p>
-        </p:txBody>
-      </p:sp>
-      <p:sp>
-        <p:nvSpPr>
-          <p:cNvPr id="10" name="Rounded Rectangle 9"/>
-          <p:cNvSpPr/>
-          <p:nvPr/>
-        </p:nvSpPr>
-        <p:spPr>
-          <a:xfrm>
-            <a:off x="2286000" y="868680"/>
-            <a:ext cx="1645920" cy="1508760"/>
-          </a:xfrm>
-          <a:prstGeom prst="roundRect">
-            <a:avLst>
-              <a:gd name="adj" fmla="val 7272"/>
-            </a:avLst>
-          </a:prstGeom>
-          <a:solidFill>
-            <a:srgbClr val="E8F0F4"/>
-          </a:solidFill>
-          <a:ln>
-            <a:noFill/>
-          </a:ln>
-        </p:spPr>
-        <p:txBody>
-          <a:bodyPr rtlCol="0" anchor="ctr"/>
-          <a:lstStyle/>
-          <a:p>
-            <a:pPr algn="ctr"/>
-            <a:endParaRPr/>
-          </a:p>
-        </p:txBody>
-      </p:sp>
-      <p:sp>
-        <p:nvSpPr>
-          <p:cNvPr id="11" name="Oval 10"/>
-          <p:cNvSpPr/>
-          <p:nvPr/>
-        </p:nvSpPr>
-        <p:spPr>
-          <a:xfrm>
-            <a:off x="2852928" y="1005839"/>
-            <a:ext cx="512064" cy="512064"/>
-          </a:xfrm>
-          <a:prstGeom prst="ellipse">
-            <a:avLst/>
-          </a:prstGeom>
-          <a:solidFill>
-            <a:srgbClr val="003C58"/>
-          </a:solidFill>
-          <a:ln>
-            <a:noFill/>
-          </a:ln>
-        </p:spPr>
-        <p:txBody>
-          <a:bodyPr rtlCol="0" anchor="ctr"/>
-          <a:lstStyle/>
-          <a:p>
-            <a:pPr algn="ctr"/>
-            <a:endParaRPr/>
-          </a:p>
-        </p:txBody>
-      </p:sp>
-      <p:pic>
-        <p:nvPicPr>
-          <p:cNvPr id="12" name="Picture 11" descr="MdQuiz_blanco.png"/>
-          <p:cNvPicPr>
-            <a:picLocks noChangeAspect="1"/>
-          </p:cNvPicPr>
-          <p:nvPr/>
-        </p:nvPicPr>
-        <p:blipFill>
-          <a:blip r:embed="rId4"/>
-          <a:stretch>
-            <a:fillRect/>
-          </a:stretch>
-        </p:blipFill>
-        <p:spPr>
-          <a:xfrm>
-            <a:off x="2960461" y="1113373"/>
-            <a:ext cx="296997" cy="296997"/>
-          </a:xfrm>
-          <a:prstGeom prst="rect">
-            <a:avLst/>
-          </a:prstGeom>
-        </p:spPr>
-      </p:pic>
-      <p:sp>
-        <p:nvSpPr>
-          <p:cNvPr id="13" name="TextBox 12"/>
-          <p:cNvSpPr txBox="1"/>
-          <p:nvPr/>
-        </p:nvSpPr>
-        <p:spPr>
-          <a:xfrm>
-            <a:off x="2377440" y="1581912"/>
-            <a:ext cx="1463040" cy="292608"/>
-          </a:xfrm>
-          <a:prstGeom prst="rect">
-            <a:avLst/>
-          </a:prstGeom>
-          <a:noFill/>
-        </p:spPr>
-        <p:txBody>
-          <a:bodyPr wrap="square" lIns="0" tIns="0" rIns="0" bIns="0" anchor="t">
-            <a:noAutofit/>
-          </a:bodyPr>
-          <a:lstStyle/>
-          <a:p>
-            <a:pPr algn="ctr">
-              <a:spcAft>
-                <a:spcPts val="0"/>
-              </a:spcAft>
-            </a:pPr>
-            <a:r>
-              <a:rPr sz="1200" b="1" i="0">
-                <a:solidFill>
-                  <a:srgbClr val="003C58"/>
-                </a:solidFill>
-                <a:latin typeface="Swis721 Cn BT"/>
-              </a:rPr>
-              <a:t>Evaluaciones</a:t>
-            </a:r>
-          </a:p>
-        </p:txBody>
-      </p:sp>
-      <p:sp>
-        <p:nvSpPr>
-          <p:cNvPr id="14" name="TextBox 13"/>
-          <p:cNvSpPr txBox="1"/>
-          <p:nvPr/>
-        </p:nvSpPr>
-        <p:spPr>
-          <a:xfrm>
-            <a:off x="2377440" y="1856232"/>
-            <a:ext cx="1463040" cy="502920"/>
-          </a:xfrm>
-          <a:prstGeom prst="rect">
-            <a:avLst/>
-          </a:prstGeom>
-          <a:noFill/>
-        </p:spPr>
-        <p:txBody>
-          <a:bodyPr wrap="square" lIns="0" tIns="0" rIns="0" bIns="0" anchor="t">
-            <a:noAutofit/>
-          </a:bodyPr>
-          <a:lstStyle/>
-          <a:p>
-            <a:pPr algn="ctr">
-              <a:spcAft>
-                <a:spcPts val="0"/>
-              </a:spcAft>
-            </a:pPr>
-            <a:r>
-              <a:rPr sz="1050" b="0" i="0">
+              <a:t>Si una casilla queda vacía, el producto </a:t>
+            </a:r>
+            <a:r>
+              <a:rPr sz="1400" b="1" i="0">
+                <a:solidFill>
+                  <a:srgbClr val="BF210C"/>
+                </a:solidFill>
+                <a:latin typeface="Swis721 Cn BT"/>
+              </a:rPr>
+              <a:t>sigue siendo un borrador</a:t>
+            </a:r>
+            <a:r>
+              <a:rPr sz="1400" b="0" i="0">
                 <a:solidFill>
                   <a:srgbClr val="1F2A30"/>
                 </a:solidFill>
                 <a:latin typeface="Swis721 Cn BT"/>
               </a:rPr>
-              <a:t>selección múltiple y concordancia de scripts</a:t>
-            </a:r>
-          </a:p>
-        </p:txBody>
-      </p:sp>
-      <p:sp>
-        <p:nvSpPr>
-          <p:cNvPr id="15" name="Rounded Rectangle 14"/>
-          <p:cNvSpPr/>
-          <p:nvPr/>
-        </p:nvSpPr>
-        <p:spPr>
-          <a:xfrm>
-            <a:off x="4069080" y="868680"/>
-            <a:ext cx="1645920" cy="1508760"/>
-          </a:xfrm>
-          <a:prstGeom prst="roundRect">
-            <a:avLst>
-              <a:gd name="adj" fmla="val 7272"/>
-            </a:avLst>
-          </a:prstGeom>
-          <a:solidFill>
-            <a:srgbClr val="E8F0F4"/>
-          </a:solidFill>
-          <a:ln>
-            <a:noFill/>
-          </a:ln>
-        </p:spPr>
-        <p:txBody>
-          <a:bodyPr rtlCol="0" anchor="ctr"/>
-          <a:lstStyle/>
-          <a:p>
-            <a:pPr algn="ctr"/>
-            <a:endParaRPr/>
-          </a:p>
-        </p:txBody>
-      </p:sp>
-      <p:sp>
-        <p:nvSpPr>
-          <p:cNvPr id="16" name="Oval 15"/>
-          <p:cNvSpPr/>
-          <p:nvPr/>
-        </p:nvSpPr>
-        <p:spPr>
-          <a:xfrm>
-            <a:off x="4636008" y="1005839"/>
-            <a:ext cx="512064" cy="512064"/>
-          </a:xfrm>
-          <a:prstGeom prst="ellipse">
-            <a:avLst/>
-          </a:prstGeom>
-          <a:solidFill>
-            <a:srgbClr val="003C58"/>
-          </a:solidFill>
-          <a:ln>
-            <a:noFill/>
-          </a:ln>
-        </p:spPr>
-        <p:txBody>
-          <a:bodyPr rtlCol="0" anchor="ctr"/>
-          <a:lstStyle/>
-          <a:p>
-            <a:pPr algn="ctr"/>
-            <a:endParaRPr/>
-          </a:p>
-        </p:txBody>
-      </p:sp>
-      <p:pic>
-        <p:nvPicPr>
-          <p:cNvPr id="17" name="Picture 16" descr="MdChecklist_blanco.png"/>
-          <p:cNvPicPr>
-            <a:picLocks noChangeAspect="1"/>
-          </p:cNvPicPr>
-          <p:nvPr/>
-        </p:nvPicPr>
-        <p:blipFill>
-          <a:blip r:embed="rId5"/>
-          <a:stretch>
-            <a:fillRect/>
-          </a:stretch>
-        </p:blipFill>
-        <p:spPr>
-          <a:xfrm>
-            <a:off x="4743541" y="1113373"/>
-            <a:ext cx="296997" cy="296997"/>
-          </a:xfrm>
-          <a:prstGeom prst="rect">
-            <a:avLst/>
-          </a:prstGeom>
-        </p:spPr>
-      </p:pic>
-      <p:sp>
-        <p:nvSpPr>
-          <p:cNvPr id="18" name="TextBox 17"/>
-          <p:cNvSpPr txBox="1"/>
-          <p:nvPr/>
-        </p:nvSpPr>
-        <p:spPr>
-          <a:xfrm>
-            <a:off x="4160520" y="1581912"/>
-            <a:ext cx="1463040" cy="292608"/>
-          </a:xfrm>
-          <a:prstGeom prst="rect">
-            <a:avLst/>
-          </a:prstGeom>
-          <a:noFill/>
-        </p:spPr>
-        <p:txBody>
-          <a:bodyPr wrap="square" lIns="0" tIns="0" rIns="0" bIns="0" anchor="t">
-            <a:noAutofit/>
-          </a:bodyPr>
-          <a:lstStyle/>
-          <a:p>
-            <a:pPr algn="ctr">
-              <a:spcAft>
-                <a:spcPts val="0"/>
-              </a:spcAft>
-            </a:pPr>
-            <a:r>
-              <a:rPr sz="1200" b="1" i="0">
-                <a:solidFill>
-                  <a:srgbClr val="003C58"/>
-                </a:solidFill>
-                <a:latin typeface="Swis721 Cn BT"/>
-              </a:rPr>
-              <a:t>Rúbricas y pautas</a:t>
-            </a:r>
-          </a:p>
-        </p:txBody>
-      </p:sp>
-      <p:sp>
-        <p:nvSpPr>
-          <p:cNvPr id="19" name="TextBox 18"/>
-          <p:cNvSpPr txBox="1"/>
-          <p:nvPr/>
-        </p:nvSpPr>
-        <p:spPr>
-          <a:xfrm>
-            <a:off x="4160520" y="1856232"/>
-            <a:ext cx="1463040" cy="502920"/>
-          </a:xfrm>
-          <a:prstGeom prst="rect">
-            <a:avLst/>
-          </a:prstGeom>
-          <a:noFill/>
-        </p:spPr>
-        <p:txBody>
-          <a:bodyPr wrap="square" lIns="0" tIns="0" rIns="0" bIns="0" anchor="t">
-            <a:noAutofit/>
-          </a:bodyPr>
-          <a:lstStyle/>
-          <a:p>
-            <a:pPr algn="ctr">
-              <a:spcAft>
-                <a:spcPts val="0"/>
-              </a:spcAft>
-            </a:pPr>
-            <a:r>
-              <a:rPr sz="1050" b="0" i="0">
-                <a:solidFill>
-                  <a:srgbClr val="1F2A30"/>
-                </a:solidFill>
-                <a:latin typeface="Swis721 Cn BT"/>
-              </a:rPr>
-              <a:t>con niveles de desempeño</a:t>
-            </a:r>
-          </a:p>
-        </p:txBody>
-      </p:sp>
-      <p:sp>
-        <p:nvSpPr>
-          <p:cNvPr id="20" name="Rounded Rectangle 19"/>
-          <p:cNvSpPr/>
-          <p:nvPr/>
-        </p:nvSpPr>
-        <p:spPr>
-          <a:xfrm>
-            <a:off x="502920" y="2514600"/>
-            <a:ext cx="1645920" cy="1508760"/>
-          </a:xfrm>
-          <a:prstGeom prst="roundRect">
-            <a:avLst>
-              <a:gd name="adj" fmla="val 7272"/>
-            </a:avLst>
-          </a:prstGeom>
-          <a:solidFill>
-            <a:srgbClr val="E8F0F4"/>
-          </a:solidFill>
-          <a:ln>
-            <a:noFill/>
-          </a:ln>
-        </p:spPr>
-        <p:txBody>
-          <a:bodyPr rtlCol="0" anchor="ctr"/>
-          <a:lstStyle/>
-          <a:p>
-            <a:pPr algn="ctr"/>
-            <a:endParaRPr/>
-          </a:p>
-        </p:txBody>
-      </p:sp>
-      <p:sp>
-        <p:nvSpPr>
-          <p:cNvPr id="21" name="Oval 20"/>
-          <p:cNvSpPr/>
-          <p:nvPr/>
-        </p:nvSpPr>
-        <p:spPr>
-          <a:xfrm>
-            <a:off x="1069848" y="2651760"/>
-            <a:ext cx="512064" cy="512064"/>
-          </a:xfrm>
-          <a:prstGeom prst="ellipse">
-            <a:avLst/>
-          </a:prstGeom>
-          <a:solidFill>
-            <a:srgbClr val="003C58"/>
-          </a:solidFill>
-          <a:ln>
-            <a:noFill/>
-          </a:ln>
-        </p:spPr>
-        <p:txBody>
-          <a:bodyPr rtlCol="0" anchor="ctr"/>
-          <a:lstStyle/>
-          <a:p>
-            <a:pPr algn="ctr"/>
-            <a:endParaRPr/>
-          </a:p>
-        </p:txBody>
-      </p:sp>
-      <p:pic>
-        <p:nvPicPr>
-          <p:cNvPr id="22" name="Picture 21" descr="MdRecordVoiceOver_blanco.png"/>
-          <p:cNvPicPr>
-            <a:picLocks noChangeAspect="1"/>
-          </p:cNvPicPr>
-          <p:nvPr/>
-        </p:nvPicPr>
-        <p:blipFill>
-          <a:blip r:embed="rId6"/>
-          <a:stretch>
-            <a:fillRect/>
-          </a:stretch>
-        </p:blipFill>
-        <p:spPr>
-          <a:xfrm>
-            <a:off x="1177381" y="2759293"/>
-            <a:ext cx="296997" cy="296997"/>
-          </a:xfrm>
-          <a:prstGeom prst="rect">
-            <a:avLst/>
-          </a:prstGeom>
-        </p:spPr>
-      </p:pic>
-      <p:sp>
-        <p:nvSpPr>
-          <p:cNvPr id="23" name="TextBox 22"/>
-          <p:cNvSpPr txBox="1"/>
-          <p:nvPr/>
-        </p:nvSpPr>
-        <p:spPr>
-          <a:xfrm>
-            <a:off x="594360" y="3227832"/>
-            <a:ext cx="1463040" cy="292608"/>
-          </a:xfrm>
-          <a:prstGeom prst="rect">
-            <a:avLst/>
-          </a:prstGeom>
-          <a:noFill/>
-        </p:spPr>
-        <p:txBody>
-          <a:bodyPr wrap="square" lIns="0" tIns="0" rIns="0" bIns="0" anchor="t">
-            <a:noAutofit/>
-          </a:bodyPr>
-          <a:lstStyle/>
-          <a:p>
-            <a:pPr algn="ctr">
-              <a:spcAft>
-                <a:spcPts val="0"/>
-              </a:spcAft>
-            </a:pPr>
-            <a:r>
-              <a:rPr sz="1200" b="1" i="0">
-                <a:solidFill>
-                  <a:srgbClr val="003C58"/>
-                </a:solidFill>
-                <a:latin typeface="Swis721 Cn BT"/>
-              </a:rPr>
-              <a:t>Guiones</a:t>
-            </a:r>
-          </a:p>
-        </p:txBody>
-      </p:sp>
-      <p:sp>
-        <p:nvSpPr>
-          <p:cNvPr id="24" name="TextBox 23"/>
-          <p:cNvSpPr txBox="1"/>
-          <p:nvPr/>
-        </p:nvSpPr>
-        <p:spPr>
-          <a:xfrm>
-            <a:off x="594360" y="3502152"/>
-            <a:ext cx="1463040" cy="502920"/>
-          </a:xfrm>
-          <a:prstGeom prst="rect">
-            <a:avLst/>
-          </a:prstGeom>
-          <a:noFill/>
-        </p:spPr>
-        <p:txBody>
-          <a:bodyPr wrap="square" lIns="0" tIns="0" rIns="0" bIns="0" anchor="t">
-            <a:noAutofit/>
-          </a:bodyPr>
-          <a:lstStyle/>
-          <a:p>
-            <a:pPr algn="ctr">
-              <a:spcAft>
-                <a:spcPts val="0"/>
-              </a:spcAft>
-            </a:pPr>
-            <a:r>
-              <a:rPr sz="1050" b="0" i="0">
-                <a:solidFill>
-                  <a:srgbClr val="1F2A30"/>
-                </a:solidFill>
-                <a:latin typeface="Swis721 Cn BT"/>
-              </a:rPr>
-              <a:t>de simulación: roles, diálogos y debriefing</a:t>
-            </a:r>
-          </a:p>
-        </p:txBody>
-      </p:sp>
-      <p:sp>
-        <p:nvSpPr>
-          <p:cNvPr id="25" name="Rounded Rectangle 24"/>
-          <p:cNvSpPr/>
-          <p:nvPr/>
-        </p:nvSpPr>
-        <p:spPr>
-          <a:xfrm>
-            <a:off x="2286000" y="2514600"/>
-            <a:ext cx="1645920" cy="1508760"/>
-          </a:xfrm>
-          <a:prstGeom prst="roundRect">
-            <a:avLst>
-              <a:gd name="adj" fmla="val 7272"/>
-            </a:avLst>
-          </a:prstGeom>
-          <a:solidFill>
-            <a:srgbClr val="E8F0F4"/>
-          </a:solidFill>
-          <a:ln>
-            <a:noFill/>
-          </a:ln>
-        </p:spPr>
-        <p:txBody>
-          <a:bodyPr rtlCol="0" anchor="ctr"/>
-          <a:lstStyle/>
-          <a:p>
-            <a:pPr algn="ctr"/>
-            <a:endParaRPr/>
-          </a:p>
-        </p:txBody>
-      </p:sp>
-      <p:sp>
-        <p:nvSpPr>
-          <p:cNvPr id="26" name="Oval 25"/>
-          <p:cNvSpPr/>
-          <p:nvPr/>
-        </p:nvSpPr>
-        <p:spPr>
-          <a:xfrm>
-            <a:off x="2852928" y="2651760"/>
-            <a:ext cx="512064" cy="512064"/>
-          </a:xfrm>
-          <a:prstGeom prst="ellipse">
-            <a:avLst/>
-          </a:prstGeom>
-          <a:solidFill>
-            <a:srgbClr val="BF210C"/>
-          </a:solidFill>
-          <a:ln>
-            <a:noFill/>
-          </a:ln>
-        </p:spPr>
-        <p:txBody>
-          <a:bodyPr rtlCol="0" anchor="ctr"/>
-          <a:lstStyle/>
-          <a:p>
-            <a:pPr algn="ctr"/>
-            <a:endParaRPr/>
-          </a:p>
-        </p:txBody>
-      </p:sp>
-      <p:pic>
-        <p:nvPicPr>
-          <p:cNvPr id="27" name="Picture 26" descr="MdCampaign_blanco.png"/>
-          <p:cNvPicPr>
-            <a:picLocks noChangeAspect="1"/>
-          </p:cNvPicPr>
-          <p:nvPr/>
-        </p:nvPicPr>
-        <p:blipFill>
-          <a:blip r:embed="rId7"/>
-          <a:stretch>
-            <a:fillRect/>
-          </a:stretch>
-        </p:blipFill>
-        <p:spPr>
-          <a:xfrm>
-            <a:off x="2960461" y="2759293"/>
-            <a:ext cx="296997" cy="296997"/>
-          </a:xfrm>
-          <a:prstGeom prst="rect">
-            <a:avLst/>
-          </a:prstGeom>
-        </p:spPr>
-      </p:pic>
-      <p:sp>
-        <p:nvSpPr>
-          <p:cNvPr id="28" name="TextBox 27"/>
-          <p:cNvSpPr txBox="1"/>
-          <p:nvPr/>
-        </p:nvSpPr>
-        <p:spPr>
-          <a:xfrm>
-            <a:off x="2377440" y="3227832"/>
-            <a:ext cx="1463040" cy="292608"/>
-          </a:xfrm>
-          <a:prstGeom prst="rect">
-            <a:avLst/>
-          </a:prstGeom>
-          <a:noFill/>
-        </p:spPr>
-        <p:txBody>
-          <a:bodyPr wrap="square" lIns="0" tIns="0" rIns="0" bIns="0" anchor="t">
-            <a:noAutofit/>
-          </a:bodyPr>
-          <a:lstStyle/>
-          <a:p>
-            <a:pPr algn="ctr">
-              <a:spcAft>
-                <a:spcPts val="0"/>
-              </a:spcAft>
-            </a:pPr>
-            <a:r>
-              <a:rPr sz="1200" b="1" i="0">
-                <a:solidFill>
-                  <a:srgbClr val="003C58"/>
-                </a:solidFill>
-                <a:latin typeface="Swis721 Cn BT"/>
-              </a:rPr>
-              <a:t>Folletos</a:t>
-            </a:r>
-          </a:p>
-        </p:txBody>
-      </p:sp>
-      <p:sp>
-        <p:nvSpPr>
-          <p:cNvPr id="29" name="TextBox 28"/>
-          <p:cNvSpPr txBox="1"/>
-          <p:nvPr/>
-        </p:nvSpPr>
-        <p:spPr>
-          <a:xfrm>
-            <a:off x="2377440" y="3502152"/>
-            <a:ext cx="1463040" cy="502920"/>
-          </a:xfrm>
-          <a:prstGeom prst="rect">
-            <a:avLst/>
-          </a:prstGeom>
-          <a:noFill/>
-        </p:spPr>
-        <p:txBody>
-          <a:bodyPr wrap="square" lIns="0" tIns="0" rIns="0" bIns="0" anchor="t">
-            <a:noAutofit/>
-          </a:bodyPr>
-          <a:lstStyle/>
-          <a:p>
-            <a:pPr algn="ctr">
-              <a:spcAft>
-                <a:spcPts val="0"/>
-              </a:spcAft>
-            </a:pPr>
-            <a:r>
-              <a:rPr sz="1050" b="0" i="0">
-                <a:solidFill>
-                  <a:srgbClr val="1F2A30"/>
-                </a:solidFill>
-                <a:latin typeface="Swis721 Cn BT"/>
-              </a:rPr>
-              <a:t>para usuarias, en lenguaje claro y pertinente</a:t>
-            </a:r>
-          </a:p>
-        </p:txBody>
-      </p:sp>
-      <p:sp>
-        <p:nvSpPr>
-          <p:cNvPr id="30" name="Rounded Rectangle 29"/>
-          <p:cNvSpPr/>
-          <p:nvPr/>
-        </p:nvSpPr>
-        <p:spPr>
-          <a:xfrm>
-            <a:off x="4069080" y="2514600"/>
-            <a:ext cx="1645920" cy="1508760"/>
-          </a:xfrm>
-          <a:prstGeom prst="roundRect">
-            <a:avLst>
-              <a:gd name="adj" fmla="val 7272"/>
-            </a:avLst>
-          </a:prstGeom>
-          <a:solidFill>
-            <a:srgbClr val="E8F0F4"/>
-          </a:solidFill>
-          <a:ln>
-            <a:noFill/>
-          </a:ln>
-        </p:spPr>
-        <p:txBody>
-          <a:bodyPr rtlCol="0" anchor="ctr"/>
-          <a:lstStyle/>
-          <a:p>
-            <a:pPr algn="ctr"/>
-            <a:endParaRPr/>
-          </a:p>
-        </p:txBody>
-      </p:sp>
-      <p:sp>
-        <p:nvSpPr>
-          <p:cNvPr id="31" name="Oval 30"/>
-          <p:cNvSpPr/>
-          <p:nvPr/>
-        </p:nvSpPr>
-        <p:spPr>
-          <a:xfrm>
-            <a:off x="4636008" y="2651760"/>
-            <a:ext cx="512064" cy="512064"/>
-          </a:xfrm>
-          <a:prstGeom prst="ellipse">
-            <a:avLst/>
-          </a:prstGeom>
-          <a:solidFill>
-            <a:srgbClr val="003C58"/>
-          </a:solidFill>
-          <a:ln>
-            <a:noFill/>
-          </a:ln>
-        </p:spPr>
-        <p:txBody>
-          <a:bodyPr rtlCol="0" anchor="ctr"/>
-          <a:lstStyle/>
-          <a:p>
-            <a:pPr algn="ctr"/>
-            <a:endParaRPr/>
-          </a:p>
-        </p:txBody>
-      </p:sp>
-      <p:pic>
-        <p:nvPicPr>
-          <p:cNvPr id="32" name="Picture 31" descr="MdMenuBook_blanco.png"/>
-          <p:cNvPicPr>
-            <a:picLocks noChangeAspect="1"/>
-          </p:cNvPicPr>
-          <p:nvPr/>
-        </p:nvPicPr>
-        <p:blipFill>
-          <a:blip r:embed="rId8"/>
-          <a:stretch>
-            <a:fillRect/>
-          </a:stretch>
-        </p:blipFill>
-        <p:spPr>
-          <a:xfrm>
-            <a:off x="4743541" y="2759293"/>
-            <a:ext cx="296997" cy="296997"/>
-          </a:xfrm>
-          <a:prstGeom prst="rect">
-            <a:avLst/>
-          </a:prstGeom>
-        </p:spPr>
-      </p:pic>
-      <p:sp>
-        <p:nvSpPr>
-          <p:cNvPr id="33" name="TextBox 32"/>
-          <p:cNvSpPr txBox="1"/>
-          <p:nvPr/>
-        </p:nvSpPr>
-        <p:spPr>
-          <a:xfrm>
-            <a:off x="4160520" y="3227832"/>
-            <a:ext cx="1463040" cy="292608"/>
-          </a:xfrm>
-          <a:prstGeom prst="rect">
-            <a:avLst/>
-          </a:prstGeom>
-          <a:noFill/>
-        </p:spPr>
-        <p:txBody>
-          <a:bodyPr wrap="square" lIns="0" tIns="0" rIns="0" bIns="0" anchor="t">
-            <a:noAutofit/>
-          </a:bodyPr>
-          <a:lstStyle/>
-          <a:p>
-            <a:pPr algn="ctr">
-              <a:spcAft>
-                <a:spcPts val="0"/>
-              </a:spcAft>
-            </a:pPr>
-            <a:r>
-              <a:rPr sz="1200" b="1" i="0">
-                <a:solidFill>
-                  <a:srgbClr val="003C58"/>
-                </a:solidFill>
-                <a:latin typeface="Swis721 Cn BT"/>
-              </a:rPr>
-              <a:t>Resúmenes</a:t>
-            </a:r>
-          </a:p>
-        </p:txBody>
-      </p:sp>
-      <p:sp>
-        <p:nvSpPr>
-          <p:cNvPr id="34" name="TextBox 33"/>
-          <p:cNvSpPr txBox="1"/>
-          <p:nvPr/>
-        </p:nvSpPr>
-        <p:spPr>
-          <a:xfrm>
-            <a:off x="4160520" y="3502152"/>
-            <a:ext cx="1463040" cy="502920"/>
-          </a:xfrm>
-          <a:prstGeom prst="rect">
-            <a:avLst/>
-          </a:prstGeom>
-          <a:noFill/>
-        </p:spPr>
-        <p:txBody>
-          <a:bodyPr wrap="square" lIns="0" tIns="0" rIns="0" bIns="0" anchor="t">
-            <a:noAutofit/>
-          </a:bodyPr>
-          <a:lstStyle/>
-          <a:p>
-            <a:pPr algn="ctr">
-              <a:spcAft>
-                <a:spcPts val="0"/>
-              </a:spcAft>
-            </a:pPr>
-            <a:r>
-              <a:rPr sz="1050" b="0" i="0">
-                <a:solidFill>
-                  <a:srgbClr val="1F2A30"/>
-                </a:solidFill>
-                <a:latin typeface="Swis721 Cn BT"/>
-              </a:rPr>
-              <a:t>mapas, glosarios y fichas de estudio</a:t>
-            </a:r>
-          </a:p>
-        </p:txBody>
-      </p:sp>
-      <p:sp>
-        <p:nvSpPr>
-          <p:cNvPr id="35" name="Rounded Rectangle 34"/>
-          <p:cNvSpPr/>
-          <p:nvPr/>
-        </p:nvSpPr>
-        <p:spPr>
-          <a:xfrm>
-            <a:off x="5943600" y="868680"/>
-            <a:ext cx="2697479" cy="3200400"/>
-          </a:xfrm>
-          <a:prstGeom prst="roundRect">
-            <a:avLst>
-              <a:gd name="adj" fmla="val 4067"/>
-            </a:avLst>
-          </a:prstGeom>
-          <a:solidFill>
-            <a:srgbClr val="003C58"/>
-          </a:solidFill>
-          <a:ln>
-            <a:noFill/>
-          </a:ln>
-        </p:spPr>
-        <p:txBody>
-          <a:bodyPr rtlCol="0" anchor="ctr"/>
-          <a:lstStyle/>
-          <a:p>
-            <a:pPr algn="ctr"/>
-            <a:endParaRPr/>
-          </a:p>
-        </p:txBody>
-      </p:sp>
-      <p:sp>
-        <p:nvSpPr>
-          <p:cNvPr id="36" name="TextBox 35"/>
-          <p:cNvSpPr txBox="1"/>
-          <p:nvPr/>
-        </p:nvSpPr>
-        <p:spPr>
-          <a:xfrm>
-            <a:off x="6144768" y="1005839"/>
-            <a:ext cx="2331720" cy="2971800"/>
-          </a:xfrm>
-          <a:prstGeom prst="rect">
-            <a:avLst/>
-          </a:prstGeom>
-          <a:noFill/>
-        </p:spPr>
-        <p:txBody>
-          <a:bodyPr wrap="square" lIns="0" tIns="0" rIns="0" bIns="0" anchor="t">
-            <a:noAutofit/>
-          </a:bodyPr>
-          <a:lstStyle/>
-          <a:p>
-            <a:pPr algn="l">
-              <a:spcAft>
-                <a:spcPts val="600"/>
-              </a:spcAft>
-            </a:pPr>
-            <a:r>
-              <a:rPr sz="1300" b="1" i="0">
-                <a:solidFill>
-                  <a:srgbClr val="F2B705"/>
-                </a:solidFill>
-                <a:latin typeface="Swis721 Cn BT"/>
-              </a:rPr>
-              <a:t>Lo que muestra la evidencia</a:t>
-            </a:r>
-          </a:p>
-          <a:p>
-            <a:pPr algn="l">
-              <a:spcAft>
-                <a:spcPts val="0"/>
-              </a:spcAft>
-            </a:pPr>
-            <a:r>
-              <a:rPr sz="2600" b="1" i="0">
-                <a:solidFill>
-                  <a:srgbClr val="FFFFFF"/>
-                </a:solidFill>
-                <a:latin typeface="Swis721 Cn BT"/>
-              </a:rPr>
-              <a:t>≈ 91 %</a:t>
-            </a:r>
-          </a:p>
-          <a:p>
-            <a:pPr algn="l">
-              <a:spcAft>
-                <a:spcPts val="800"/>
-              </a:spcAft>
-            </a:pPr>
-            <a:r>
-              <a:rPr sz="1100" b="0" i="0">
-                <a:solidFill>
-                  <a:srgbClr val="FFFFFF"/>
-                </a:solidFill>
-                <a:latin typeface="Swis721 Cn BT"/>
-              </a:rPr>
-              <a:t>de los ítems de ginecoobstetricia creados con ChatGPT-4o o Claude 3.5 Sonnet cumplió los criterios de calidad.</a:t>
-            </a:r>
-          </a:p>
-          <a:p>
-            <a:pPr algn="l">
-              <a:spcAft>
-                <a:spcPts val="0"/>
-              </a:spcAft>
-            </a:pPr>
-            <a:r>
-              <a:rPr sz="2600" b="1" i="0">
-                <a:solidFill>
-                  <a:srgbClr val="F2B705"/>
-                </a:solidFill>
-                <a:latin typeface="Swis721 Cn BT"/>
-              </a:rPr>
-              <a:t>71–76 %</a:t>
-            </a:r>
-          </a:p>
-          <a:p>
-            <a:pPr algn="l">
-              <a:spcAft>
-                <a:spcPts val="0"/>
-              </a:spcAft>
-            </a:pPr>
-            <a:r>
-              <a:rPr sz="1100" b="0" i="0">
-                <a:solidFill>
-                  <a:srgbClr val="FFFFFF"/>
-                </a:solidFill>
-                <a:latin typeface="Swis721 Cn BT"/>
-              </a:rPr>
-              <a:t>en el criterio más débil: dificultad adecuada para estudiantes. La docente ajusta el nivel.</a:t>
+              <a:t>.</a:t>
             </a:r>
           </a:p>
         </p:txBody>
@@ -28192,26 +27825,93 @@
           <a:lstStyle/>
           <a:p>
             <a:r>
-              <a:t>Dos prompts listos para adaptar a tu asignatura o servicio</a:t>
-            </a:r>
-          </a:p>
-        </p:txBody>
-      </p:sp>
-      <p:sp>
-        <p:nvSpPr>
-          <p:cNvPr id="3" name="Rounded Rectangle 2"/>
+              <a:t>Materiales educativos: la IA hace el borrador, la docente el nivel</a:t>
+            </a:r>
+          </a:p>
+        </p:txBody>
+      </p:sp>
+      <p:sp>
+        <p:nvSpPr>
+          <p:cNvPr id="4" name="Text Placeholder 3"/>
+          <p:cNvSpPr>
+            <a:spLocks noGrp="1"/>
+          </p:cNvSpPr>
+          <p:nvPr>
+            <p:ph type="body" sz="quarter" idx="11"/>
+          </p:nvPr>
+        </p:nvSpPr>
+        <p:spPr>
+          <a:xfrm>
+            <a:off x="1618488" y="4480560"/>
+            <a:ext cx="4983480" cy="457200"/>
+          </a:xfrm>
+        </p:spPr>
+        <p:txBody>
+          <a:bodyPr/>
+          <a:lstStyle/>
+          <a:p>
+            <a:pPr algn="l">
+              <a:spcAft>
+                <a:spcPts val="0"/>
+              </a:spcAft>
+            </a:pPr>
+            <a:r>
+              <a:rPr sz="900" b="0" i="0">
+                <a:solidFill>
+                  <a:srgbClr val="003C58"/>
+                </a:solidFill>
+                <a:latin typeface="Swis721 Cn BT"/>
+              </a:rPr>
+              <a:t>Fuentes: [18] Yapıcı Coşkun et al., 2025 · [4] Kranz y Abele, 2024</a:t>
+            </a:r>
+          </a:p>
+        </p:txBody>
+      </p:sp>
+      <p:sp>
+        <p:nvSpPr>
+          <p:cNvPr id="5" name="Rounded Rectangle 4"/>
           <p:cNvSpPr/>
           <p:nvPr/>
         </p:nvSpPr>
         <p:spPr>
           <a:xfrm>
             <a:off x="502920" y="868680"/>
-            <a:ext cx="3977639" cy="3200400"/>
+            <a:ext cx="1645920" cy="1508760"/>
           </a:xfrm>
           <a:prstGeom prst="roundRect">
             <a:avLst>
-              <a:gd name="adj" fmla="val 2857"/>
+              <a:gd name="adj" fmla="val 7272"/>
             </a:avLst>
+          </a:prstGeom>
+          <a:solidFill>
+            <a:srgbClr val="E8F0F4"/>
+          </a:solidFill>
+          <a:ln>
+            <a:noFill/>
+          </a:ln>
+        </p:spPr>
+        <p:txBody>
+          <a:bodyPr rtlCol="0" anchor="ctr"/>
+          <a:lstStyle/>
+          <a:p>
+            <a:pPr algn="ctr"/>
+            <a:endParaRPr/>
+          </a:p>
+        </p:txBody>
+      </p:sp>
+      <p:sp>
+        <p:nvSpPr>
+          <p:cNvPr id="6" name="Oval 5"/>
+          <p:cNvSpPr/>
+          <p:nvPr/>
+        </p:nvSpPr>
+        <p:spPr>
+          <a:xfrm>
+            <a:off x="1069848" y="1005839"/>
+            <a:ext cx="512064" cy="512064"/>
+          </a:xfrm>
+          <a:prstGeom prst="ellipse">
+            <a:avLst/>
           </a:prstGeom>
           <a:solidFill>
             <a:srgbClr val="003C58"/>
@@ -28229,193 +27929,153 @@
           </a:p>
         </p:txBody>
       </p:sp>
-      <p:sp>
-        <p:nvSpPr>
-          <p:cNvPr id="4" name="Rounded Rectangle 3"/>
+      <p:pic>
+        <p:nvPicPr>
+          <p:cNvPr id="7" name="Picture 6" descr="MdTheaters_blanco.png"/>
+          <p:cNvPicPr>
+            <a:picLocks noChangeAspect="1"/>
+          </p:cNvPicPr>
+          <p:nvPr/>
+        </p:nvPicPr>
+        <p:blipFill>
+          <a:blip r:embed="rId3"/>
+          <a:stretch>
+            <a:fillRect/>
+          </a:stretch>
+        </p:blipFill>
+        <p:spPr>
+          <a:xfrm>
+            <a:off x="1177381" y="1113373"/>
+            <a:ext cx="296997" cy="296997"/>
+          </a:xfrm>
+          <a:prstGeom prst="rect">
+            <a:avLst/>
+          </a:prstGeom>
+        </p:spPr>
+      </p:pic>
+      <p:sp>
+        <p:nvSpPr>
+          <p:cNvPr id="8" name="TextBox 7"/>
+          <p:cNvSpPr txBox="1"/>
+          <p:nvPr/>
+        </p:nvSpPr>
+        <p:spPr>
+          <a:xfrm>
+            <a:off x="594360" y="1581912"/>
+            <a:ext cx="1463040" cy="292608"/>
+          </a:xfrm>
+          <a:prstGeom prst="rect">
+            <a:avLst/>
+          </a:prstGeom>
+          <a:noFill/>
+        </p:spPr>
+        <p:txBody>
+          <a:bodyPr wrap="square" lIns="0" tIns="0" rIns="0" bIns="0" anchor="t">
+            <a:noAutofit/>
+          </a:bodyPr>
+          <a:lstStyle/>
+          <a:p>
+            <a:pPr algn="ctr">
+              <a:spcAft>
+                <a:spcPts val="0"/>
+              </a:spcAft>
+            </a:pPr>
+            <a:r>
+              <a:rPr sz="1200" b="1" i="0">
+                <a:solidFill>
+                  <a:srgbClr val="003C58"/>
+                </a:solidFill>
+                <a:latin typeface="Swis721 Cn BT"/>
+              </a:rPr>
+              <a:t>Casos simulados</a:t>
+            </a:r>
+          </a:p>
+        </p:txBody>
+      </p:sp>
+      <p:sp>
+        <p:nvSpPr>
+          <p:cNvPr id="9" name="TextBox 8"/>
+          <p:cNvSpPr txBox="1"/>
+          <p:nvPr/>
+        </p:nvSpPr>
+        <p:spPr>
+          <a:xfrm>
+            <a:off x="594360" y="1856232"/>
+            <a:ext cx="1463040" cy="502920"/>
+          </a:xfrm>
+          <a:prstGeom prst="rect">
+            <a:avLst/>
+          </a:prstGeom>
+          <a:noFill/>
+        </p:spPr>
+        <p:txBody>
+          <a:bodyPr wrap="square" lIns="0" tIns="0" rIns="0" bIns="0" anchor="t">
+            <a:noAutofit/>
+          </a:bodyPr>
+          <a:lstStyle/>
+          <a:p>
+            <a:pPr algn="ctr">
+              <a:spcAft>
+                <a:spcPts val="0"/>
+              </a:spcAft>
+            </a:pPr>
+            <a:r>
+              <a:rPr sz="1050" b="0" i="0">
+                <a:solidFill>
+                  <a:srgbClr val="1F2A30"/>
+                </a:solidFill>
+                <a:latin typeface="Swis721 Cn BT"/>
+              </a:rPr>
+              <a:t>con evolución y decisiones</a:t>
+            </a:r>
+          </a:p>
+        </p:txBody>
+      </p:sp>
+      <p:sp>
+        <p:nvSpPr>
+          <p:cNvPr id="10" name="Rounded Rectangle 9"/>
           <p:cNvSpPr/>
           <p:nvPr/>
         </p:nvSpPr>
         <p:spPr>
           <a:xfrm>
-            <a:off x="640080" y="1005839"/>
-            <a:ext cx="2651760" cy="292608"/>
+            <a:off x="2286000" y="868680"/>
+            <a:ext cx="1645920" cy="1508760"/>
           </a:xfrm>
           <a:prstGeom prst="roundRect">
             <a:avLst>
-              <a:gd name="adj" fmla="val 50000"/>
+              <a:gd name="adj" fmla="val 7272"/>
             </a:avLst>
           </a:prstGeom>
           <a:solidFill>
-            <a:srgbClr val="F2B705"/>
+            <a:srgbClr val="E8F0F4"/>
           </a:solidFill>
           <a:ln>
             <a:noFill/>
           </a:ln>
         </p:spPr>
         <p:txBody>
-          <a:bodyPr wrap="square" lIns="73152" tIns="73152" rIns="73152" bIns="73152" rtlCol="0" anchor="ctr">
-            <a:noAutofit/>
-          </a:bodyPr>
-          <a:lstStyle/>
-          <a:p>
-            <a:pPr algn="l">
-              <a:spcAft>
-                <a:spcPts val="0"/>
-              </a:spcAft>
-            </a:pPr>
-            <a:r>
-              <a:rPr sz="1100" b="1" i="0">
-                <a:solidFill>
-                  <a:srgbClr val="1F2A30"/>
-                </a:solidFill>
-                <a:latin typeface="Swis721 Cn BT"/>
-              </a:rPr>
-              <a:t>A · Caso simulado con evaluación</a:t>
-            </a:r>
-          </a:p>
-        </p:txBody>
-      </p:sp>
-      <p:sp>
-        <p:nvSpPr>
-          <p:cNvPr id="5" name="TextBox 4"/>
-          <p:cNvSpPr txBox="1"/>
-          <p:nvPr/>
-        </p:nvSpPr>
-        <p:spPr>
-          <a:xfrm>
-            <a:off x="667512" y="1417319"/>
-            <a:ext cx="3648456" cy="2542032"/>
-          </a:xfrm>
-          <a:prstGeom prst="rect">
-            <a:avLst/>
-          </a:prstGeom>
-          <a:noFill/>
-        </p:spPr>
-        <p:txBody>
-          <a:bodyPr wrap="square" lIns="0" tIns="0" rIns="0" bIns="0" anchor="t">
-            <a:noAutofit/>
-          </a:bodyPr>
-          <a:lstStyle/>
-          <a:p>
-            <a:pPr algn="l">
-              <a:spcAft>
-                <a:spcPts val="400"/>
-              </a:spcAft>
-            </a:pPr>
-            <a:r>
-              <a:rPr sz="1050" b="0" i="0">
-                <a:solidFill>
-                  <a:srgbClr val="FFFFFF"/>
-                </a:solidFill>
-                <a:latin typeface="Swis721 Cn BT"/>
-              </a:rPr>
-              <a:t>Actúa como docente de matronería con experiencia en simulación clínica.</a:t>
-            </a:r>
-          </a:p>
-          <a:p>
-            <a:pPr algn="l">
-              <a:spcAft>
-                <a:spcPts val="400"/>
-              </a:spcAft>
-            </a:pPr>
-            <a:r>
-              <a:rPr sz="1050" b="0" i="0">
-                <a:solidFill>
-                  <a:srgbClr val="FFFFFF"/>
-                </a:solidFill>
-                <a:latin typeface="Swis721 Cn BT"/>
-              </a:rPr>
-              <a:t>Mis estudiantes cursan [nivel] y el resultado de aprendizaje es [RA].</a:t>
-            </a:r>
-          </a:p>
-          <a:p>
-            <a:pPr algn="l">
-              <a:spcAft>
-                <a:spcPts val="400"/>
-              </a:spcAft>
-            </a:pPr>
-            <a:r>
-              <a:rPr sz="1050" b="0" i="0">
-                <a:solidFill>
-                  <a:srgbClr val="FFFFFF"/>
-                </a:solidFill>
-                <a:latin typeface="Swis721 Cn BT"/>
-              </a:rPr>
-              <a:t>Crea un caso clínico ficticio de puerperio con factores de riesgo de endometritis, en tres momentos de evolución. Incluye 5 preguntas de selección múltiple (una correcta, distractores plausibles y justificación), una rúbrica de 4 niveles y la clave.</a:t>
-            </a:r>
-          </a:p>
-          <a:p>
-            <a:pPr algn="l">
-              <a:spcAft>
-                <a:spcPts val="400"/>
-              </a:spcAft>
-            </a:pPr>
-            <a:r>
-              <a:rPr sz="1050" b="0" i="0">
-                <a:solidFill>
-                  <a:srgbClr val="FFFFFF"/>
-                </a:solidFill>
-                <a:latin typeface="Swis721 Cn BT"/>
-              </a:rPr>
-              <a:t>Basa todo en la guía adjunta y cita la página de cada respuesta.</a:t>
-            </a:r>
-          </a:p>
-        </p:txBody>
-      </p:sp>
-      <p:sp>
-        <p:nvSpPr>
-          <p:cNvPr id="6" name="TextBox 5"/>
-          <p:cNvSpPr txBox="1"/>
-          <p:nvPr/>
-        </p:nvSpPr>
-        <p:spPr>
-          <a:xfrm>
-            <a:off x="667512" y="3502152"/>
-            <a:ext cx="3648456" cy="457200"/>
-          </a:xfrm>
-          <a:prstGeom prst="rect">
-            <a:avLst/>
-          </a:prstGeom>
-          <a:noFill/>
-        </p:spPr>
-        <p:txBody>
-          <a:bodyPr wrap="square" lIns="0" tIns="0" rIns="0" bIns="0" anchor="b">
-            <a:noAutofit/>
-          </a:bodyPr>
-          <a:lstStyle/>
-          <a:p>
-            <a:pPr algn="l">
-              <a:spcAft>
-                <a:spcPts val="0"/>
-              </a:spcAft>
-            </a:pPr>
-            <a:r>
-              <a:rPr sz="1050" b="1" i="0">
-                <a:solidFill>
-                  <a:srgbClr val="F2B705"/>
-                </a:solidFill>
-                <a:latin typeface="Swis721 Cn BT"/>
-              </a:rPr>
-              <a:t>Verifica: dificultad, coherencia con el RA y páginas citadas.</a:t>
-            </a:r>
-          </a:p>
-        </p:txBody>
-      </p:sp>
-      <p:sp>
-        <p:nvSpPr>
-          <p:cNvPr id="7" name="Rounded Rectangle 6"/>
+          <a:bodyPr rtlCol="0" anchor="ctr"/>
+          <a:lstStyle/>
+          <a:p>
+            <a:pPr algn="ctr"/>
+            <a:endParaRPr/>
+          </a:p>
+        </p:txBody>
+      </p:sp>
+      <p:sp>
+        <p:nvSpPr>
+          <p:cNvPr id="11" name="Oval 10"/>
           <p:cNvSpPr/>
           <p:nvPr/>
         </p:nvSpPr>
         <p:spPr>
           <a:xfrm>
-            <a:off x="4663440" y="868680"/>
-            <a:ext cx="3977639" cy="3200400"/>
-          </a:xfrm>
-          <a:prstGeom prst="roundRect">
-            <a:avLst>
-              <a:gd name="adj" fmla="val 2857"/>
-            </a:avLst>
+            <a:off x="2852928" y="1005839"/>
+            <a:ext cx="512064" cy="512064"/>
+          </a:xfrm>
+          <a:prstGeom prst="ellipse">
+            <a:avLst/>
           </a:prstGeom>
           <a:solidFill>
             <a:srgbClr val="003C58"/>
@@ -28433,62 +28093,204 @@
           </a:p>
         </p:txBody>
       </p:sp>
-      <p:sp>
-        <p:nvSpPr>
-          <p:cNvPr id="8" name="Rounded Rectangle 7"/>
+      <p:pic>
+        <p:nvPicPr>
+          <p:cNvPr id="12" name="Picture 11" descr="MdQuiz_blanco.png"/>
+          <p:cNvPicPr>
+            <a:picLocks noChangeAspect="1"/>
+          </p:cNvPicPr>
+          <p:nvPr/>
+        </p:nvPicPr>
+        <p:blipFill>
+          <a:blip r:embed="rId4"/>
+          <a:stretch>
+            <a:fillRect/>
+          </a:stretch>
+        </p:blipFill>
+        <p:spPr>
+          <a:xfrm>
+            <a:off x="2960461" y="1113373"/>
+            <a:ext cx="296997" cy="296997"/>
+          </a:xfrm>
+          <a:prstGeom prst="rect">
+            <a:avLst/>
+          </a:prstGeom>
+        </p:spPr>
+      </p:pic>
+      <p:sp>
+        <p:nvSpPr>
+          <p:cNvPr id="13" name="TextBox 12"/>
+          <p:cNvSpPr txBox="1"/>
+          <p:nvPr/>
+        </p:nvSpPr>
+        <p:spPr>
+          <a:xfrm>
+            <a:off x="2377440" y="1581912"/>
+            <a:ext cx="1463040" cy="292608"/>
+          </a:xfrm>
+          <a:prstGeom prst="rect">
+            <a:avLst/>
+          </a:prstGeom>
+          <a:noFill/>
+        </p:spPr>
+        <p:txBody>
+          <a:bodyPr wrap="square" lIns="0" tIns="0" rIns="0" bIns="0" anchor="t">
+            <a:noAutofit/>
+          </a:bodyPr>
+          <a:lstStyle/>
+          <a:p>
+            <a:pPr algn="ctr">
+              <a:spcAft>
+                <a:spcPts val="0"/>
+              </a:spcAft>
+            </a:pPr>
+            <a:r>
+              <a:rPr sz="1200" b="1" i="0">
+                <a:solidFill>
+                  <a:srgbClr val="003C58"/>
+                </a:solidFill>
+                <a:latin typeface="Swis721 Cn BT"/>
+              </a:rPr>
+              <a:t>Evaluaciones</a:t>
+            </a:r>
+          </a:p>
+        </p:txBody>
+      </p:sp>
+      <p:sp>
+        <p:nvSpPr>
+          <p:cNvPr id="14" name="TextBox 13"/>
+          <p:cNvSpPr txBox="1"/>
+          <p:nvPr/>
+        </p:nvSpPr>
+        <p:spPr>
+          <a:xfrm>
+            <a:off x="2377440" y="1856232"/>
+            <a:ext cx="1463040" cy="502920"/>
+          </a:xfrm>
+          <a:prstGeom prst="rect">
+            <a:avLst/>
+          </a:prstGeom>
+          <a:noFill/>
+        </p:spPr>
+        <p:txBody>
+          <a:bodyPr wrap="square" lIns="0" tIns="0" rIns="0" bIns="0" anchor="t">
+            <a:noAutofit/>
+          </a:bodyPr>
+          <a:lstStyle/>
+          <a:p>
+            <a:pPr algn="ctr">
+              <a:spcAft>
+                <a:spcPts val="0"/>
+              </a:spcAft>
+            </a:pPr>
+            <a:r>
+              <a:rPr sz="1050" b="0" i="0">
+                <a:solidFill>
+                  <a:srgbClr val="1F2A30"/>
+                </a:solidFill>
+                <a:latin typeface="Swis721 Cn BT"/>
+              </a:rPr>
+              <a:t>selección múltiple y concordancia de scripts</a:t>
+            </a:r>
+          </a:p>
+        </p:txBody>
+      </p:sp>
+      <p:sp>
+        <p:nvSpPr>
+          <p:cNvPr id="15" name="Rounded Rectangle 14"/>
           <p:cNvSpPr/>
           <p:nvPr/>
         </p:nvSpPr>
         <p:spPr>
           <a:xfrm>
-            <a:off x="4800600" y="1005839"/>
-            <a:ext cx="2651760" cy="292608"/>
+            <a:off x="4069080" y="868680"/>
+            <a:ext cx="1645920" cy="1508760"/>
           </a:xfrm>
           <a:prstGeom prst="roundRect">
             <a:avLst>
-              <a:gd name="adj" fmla="val 50000"/>
+              <a:gd name="adj" fmla="val 7272"/>
             </a:avLst>
           </a:prstGeom>
           <a:solidFill>
-            <a:srgbClr val="F2B705"/>
+            <a:srgbClr val="E8F0F4"/>
           </a:solidFill>
           <a:ln>
             <a:noFill/>
           </a:ln>
         </p:spPr>
         <p:txBody>
-          <a:bodyPr wrap="square" lIns="73152" tIns="73152" rIns="73152" bIns="73152" rtlCol="0" anchor="ctr">
-            <a:noAutofit/>
-          </a:bodyPr>
-          <a:lstStyle/>
-          <a:p>
-            <a:pPr algn="l">
-              <a:spcAft>
-                <a:spcPts val="0"/>
-              </a:spcAft>
-            </a:pPr>
-            <a:r>
-              <a:rPr sz="1100" b="1" i="0">
-                <a:solidFill>
-                  <a:srgbClr val="1F2A30"/>
-                </a:solidFill>
-                <a:latin typeface="Swis721 Cn BT"/>
-              </a:rPr>
-              <a:t>B · Material para usuarias</a:t>
-            </a:r>
-          </a:p>
-        </p:txBody>
-      </p:sp>
-      <p:sp>
-        <p:nvSpPr>
-          <p:cNvPr id="9" name="TextBox 8"/>
+          <a:bodyPr rtlCol="0" anchor="ctr"/>
+          <a:lstStyle/>
+          <a:p>
+            <a:pPr algn="ctr"/>
+            <a:endParaRPr/>
+          </a:p>
+        </p:txBody>
+      </p:sp>
+      <p:sp>
+        <p:nvSpPr>
+          <p:cNvPr id="16" name="Oval 15"/>
+          <p:cNvSpPr/>
+          <p:nvPr/>
+        </p:nvSpPr>
+        <p:spPr>
+          <a:xfrm>
+            <a:off x="4636008" y="1005839"/>
+            <a:ext cx="512064" cy="512064"/>
+          </a:xfrm>
+          <a:prstGeom prst="ellipse">
+            <a:avLst/>
+          </a:prstGeom>
+          <a:solidFill>
+            <a:srgbClr val="003C58"/>
+          </a:solidFill>
+          <a:ln>
+            <a:noFill/>
+          </a:ln>
+        </p:spPr>
+        <p:txBody>
+          <a:bodyPr rtlCol="0" anchor="ctr"/>
+          <a:lstStyle/>
+          <a:p>
+            <a:pPr algn="ctr"/>
+            <a:endParaRPr/>
+          </a:p>
+        </p:txBody>
+      </p:sp>
+      <p:pic>
+        <p:nvPicPr>
+          <p:cNvPr id="17" name="Picture 16" descr="MdChecklist_blanco.png"/>
+          <p:cNvPicPr>
+            <a:picLocks noChangeAspect="1"/>
+          </p:cNvPicPr>
+          <p:nvPr/>
+        </p:nvPicPr>
+        <p:blipFill>
+          <a:blip r:embed="rId5"/>
+          <a:stretch>
+            <a:fillRect/>
+          </a:stretch>
+        </p:blipFill>
+        <p:spPr>
+          <a:xfrm>
+            <a:off x="4743541" y="1113373"/>
+            <a:ext cx="296997" cy="296997"/>
+          </a:xfrm>
+          <a:prstGeom prst="rect">
+            <a:avLst/>
+          </a:prstGeom>
+        </p:spPr>
+      </p:pic>
+      <p:sp>
+        <p:nvSpPr>
+          <p:cNvPr id="18" name="TextBox 17"/>
           <p:cNvSpPr txBox="1"/>
           <p:nvPr/>
         </p:nvSpPr>
         <p:spPr>
           <a:xfrm>
-            <a:off x="4828031" y="1417319"/>
-            <a:ext cx="3648456" cy="2542032"/>
+            <a:off x="4160520" y="1581912"/>
+            <a:ext cx="1463040" cy="292608"/>
           </a:xfrm>
           <a:prstGeom prst="rect">
             <a:avLst/>
@@ -28501,97 +28303,33 @@
           </a:bodyPr>
           <a:lstStyle/>
           <a:p>
-            <a:pPr algn="l">
-              <a:spcAft>
-                <a:spcPts val="400"/>
-              </a:spcAft>
-            </a:pPr>
-            <a:r>
-              <a:rPr sz="1050" b="0" i="0">
-                <a:solidFill>
-                  <a:srgbClr val="FFFFFF"/>
-                </a:solidFill>
-                <a:latin typeface="Swis721 Cn BT"/>
-              </a:rPr>
-              <a:t>Actúa como matrona educadora de atención primaria.</a:t>
-            </a:r>
-          </a:p>
-          <a:p>
-            <a:pPr algn="l">
-              <a:spcAft>
-                <a:spcPts val="400"/>
-              </a:spcAft>
-            </a:pPr>
-            <a:r>
-              <a:rPr sz="1050" b="0" i="0">
-                <a:solidFill>
-                  <a:srgbClr val="FFFFFF"/>
-                </a:solidFill>
-                <a:latin typeface="Swis721 Cn BT"/>
-              </a:rPr>
-              <a:t>Redacta un folleto sobre signos de alarma en el puerperio para mujeres que acaban de tener a su bebé.</a:t>
-            </a:r>
-          </a:p>
-          <a:p>
-            <a:pPr algn="l">
-              <a:spcAft>
-                <a:spcPts val="400"/>
-              </a:spcAft>
-            </a:pPr>
-            <a:r>
-              <a:rPr sz="1050" b="0" i="0">
-                <a:solidFill>
-                  <a:srgbClr val="FFFFFF"/>
-                </a:solidFill>
-                <a:latin typeface="Swis721 Cn BT"/>
-              </a:rPr>
-              <a:t>Lenguaje claro, español de Chile, frases cortas, sin tecnicismos (o explicados), nivel de lectura de 6.º básico.</a:t>
-            </a:r>
-          </a:p>
-          <a:p>
-            <a:pPr algn="l">
-              <a:spcAft>
-                <a:spcPts val="400"/>
-              </a:spcAft>
-            </a:pPr>
-            <a:r>
-              <a:rPr sz="1050" b="0" i="0">
-                <a:solidFill>
-                  <a:srgbClr val="FFFFFF"/>
-                </a:solidFill>
-                <a:latin typeface="Swis721 Cn BT"/>
-              </a:rPr>
-              <a:t>Formato: título, 5 signos de alarma con qué hacer y un espacio para el teléfono local.</a:t>
-            </a:r>
-          </a:p>
-          <a:p>
-            <a:pPr algn="l">
-              <a:spcAft>
-                <a:spcPts val="400"/>
-              </a:spcAft>
-            </a:pPr>
-            <a:r>
-              <a:rPr sz="1050" b="0" i="0">
-                <a:solidFill>
-                  <a:srgbClr val="FFFFFF"/>
-                </a:solidFill>
-                <a:latin typeface="Swis721 Cn BT"/>
-              </a:rPr>
-              <a:t>Usa solo la guía adjunta y no incluyas indicaciones de medicamentos.</a:t>
-            </a:r>
-          </a:p>
-        </p:txBody>
-      </p:sp>
-      <p:sp>
-        <p:nvSpPr>
-          <p:cNvPr id="10" name="TextBox 9"/>
+            <a:pPr algn="ctr">
+              <a:spcAft>
+                <a:spcPts val="0"/>
+              </a:spcAft>
+            </a:pPr>
+            <a:r>
+              <a:rPr sz="1200" b="1" i="0">
+                <a:solidFill>
+                  <a:srgbClr val="003C58"/>
+                </a:solidFill>
+                <a:latin typeface="Swis721 Cn BT"/>
+              </a:rPr>
+              <a:t>Rúbricas y pautas</a:t>
+            </a:r>
+          </a:p>
+        </p:txBody>
+      </p:sp>
+      <p:sp>
+        <p:nvSpPr>
+          <p:cNvPr id="19" name="TextBox 18"/>
           <p:cNvSpPr txBox="1"/>
           <p:nvPr/>
         </p:nvSpPr>
         <p:spPr>
           <a:xfrm>
-            <a:off x="4828031" y="3502152"/>
-            <a:ext cx="3648456" cy="457200"/>
+            <a:off x="4160520" y="1856232"/>
+            <a:ext cx="1463040" cy="502920"/>
           </a:xfrm>
           <a:prstGeom prst="rect">
             <a:avLst/>
@@ -28599,24 +28337,651 @@
           <a:noFill/>
         </p:spPr>
         <p:txBody>
-          <a:bodyPr wrap="square" lIns="0" tIns="0" rIns="0" bIns="0" anchor="b">
+          <a:bodyPr wrap="square" lIns="0" tIns="0" rIns="0" bIns="0" anchor="t">
             <a:noAutofit/>
           </a:bodyPr>
           <a:lstStyle/>
           <a:p>
+            <a:pPr algn="ctr">
+              <a:spcAft>
+                <a:spcPts val="0"/>
+              </a:spcAft>
+            </a:pPr>
+            <a:r>
+              <a:rPr sz="1050" b="0" i="0">
+                <a:solidFill>
+                  <a:srgbClr val="1F2A30"/>
+                </a:solidFill>
+                <a:latin typeface="Swis721 Cn BT"/>
+              </a:rPr>
+              <a:t>con niveles de desempeño</a:t>
+            </a:r>
+          </a:p>
+        </p:txBody>
+      </p:sp>
+      <p:sp>
+        <p:nvSpPr>
+          <p:cNvPr id="20" name="Rounded Rectangle 19"/>
+          <p:cNvSpPr/>
+          <p:nvPr/>
+        </p:nvSpPr>
+        <p:spPr>
+          <a:xfrm>
+            <a:off x="502920" y="2514600"/>
+            <a:ext cx="1645920" cy="1508760"/>
+          </a:xfrm>
+          <a:prstGeom prst="roundRect">
+            <a:avLst>
+              <a:gd name="adj" fmla="val 7272"/>
+            </a:avLst>
+          </a:prstGeom>
+          <a:solidFill>
+            <a:srgbClr val="E8F0F4"/>
+          </a:solidFill>
+          <a:ln>
+            <a:noFill/>
+          </a:ln>
+        </p:spPr>
+        <p:txBody>
+          <a:bodyPr rtlCol="0" anchor="ctr"/>
+          <a:lstStyle/>
+          <a:p>
+            <a:pPr algn="ctr"/>
+            <a:endParaRPr/>
+          </a:p>
+        </p:txBody>
+      </p:sp>
+      <p:sp>
+        <p:nvSpPr>
+          <p:cNvPr id="21" name="Oval 20"/>
+          <p:cNvSpPr/>
+          <p:nvPr/>
+        </p:nvSpPr>
+        <p:spPr>
+          <a:xfrm>
+            <a:off x="1069848" y="2651760"/>
+            <a:ext cx="512064" cy="512064"/>
+          </a:xfrm>
+          <a:prstGeom prst="ellipse">
+            <a:avLst/>
+          </a:prstGeom>
+          <a:solidFill>
+            <a:srgbClr val="003C58"/>
+          </a:solidFill>
+          <a:ln>
+            <a:noFill/>
+          </a:ln>
+        </p:spPr>
+        <p:txBody>
+          <a:bodyPr rtlCol="0" anchor="ctr"/>
+          <a:lstStyle/>
+          <a:p>
+            <a:pPr algn="ctr"/>
+            <a:endParaRPr/>
+          </a:p>
+        </p:txBody>
+      </p:sp>
+      <p:pic>
+        <p:nvPicPr>
+          <p:cNvPr id="22" name="Picture 21" descr="MdRecordVoiceOver_blanco.png"/>
+          <p:cNvPicPr>
+            <a:picLocks noChangeAspect="1"/>
+          </p:cNvPicPr>
+          <p:nvPr/>
+        </p:nvPicPr>
+        <p:blipFill>
+          <a:blip r:embed="rId6"/>
+          <a:stretch>
+            <a:fillRect/>
+          </a:stretch>
+        </p:blipFill>
+        <p:spPr>
+          <a:xfrm>
+            <a:off x="1177381" y="2759293"/>
+            <a:ext cx="296997" cy="296997"/>
+          </a:xfrm>
+          <a:prstGeom prst="rect">
+            <a:avLst/>
+          </a:prstGeom>
+        </p:spPr>
+      </p:pic>
+      <p:sp>
+        <p:nvSpPr>
+          <p:cNvPr id="23" name="TextBox 22"/>
+          <p:cNvSpPr txBox="1"/>
+          <p:nvPr/>
+        </p:nvSpPr>
+        <p:spPr>
+          <a:xfrm>
+            <a:off x="594360" y="3227832"/>
+            <a:ext cx="1463040" cy="292608"/>
+          </a:xfrm>
+          <a:prstGeom prst="rect">
+            <a:avLst/>
+          </a:prstGeom>
+          <a:noFill/>
+        </p:spPr>
+        <p:txBody>
+          <a:bodyPr wrap="square" lIns="0" tIns="0" rIns="0" bIns="0" anchor="t">
+            <a:noAutofit/>
+          </a:bodyPr>
+          <a:lstStyle/>
+          <a:p>
+            <a:pPr algn="ctr">
+              <a:spcAft>
+                <a:spcPts val="0"/>
+              </a:spcAft>
+            </a:pPr>
+            <a:r>
+              <a:rPr sz="1200" b="1" i="0">
+                <a:solidFill>
+                  <a:srgbClr val="003C58"/>
+                </a:solidFill>
+                <a:latin typeface="Swis721 Cn BT"/>
+              </a:rPr>
+              <a:t>Guiones</a:t>
+            </a:r>
+          </a:p>
+        </p:txBody>
+      </p:sp>
+      <p:sp>
+        <p:nvSpPr>
+          <p:cNvPr id="24" name="TextBox 23"/>
+          <p:cNvSpPr txBox="1"/>
+          <p:nvPr/>
+        </p:nvSpPr>
+        <p:spPr>
+          <a:xfrm>
+            <a:off x="594360" y="3502152"/>
+            <a:ext cx="1463040" cy="502920"/>
+          </a:xfrm>
+          <a:prstGeom prst="rect">
+            <a:avLst/>
+          </a:prstGeom>
+          <a:noFill/>
+        </p:spPr>
+        <p:txBody>
+          <a:bodyPr wrap="square" lIns="0" tIns="0" rIns="0" bIns="0" anchor="t">
+            <a:noAutofit/>
+          </a:bodyPr>
+          <a:lstStyle/>
+          <a:p>
+            <a:pPr algn="ctr">
+              <a:spcAft>
+                <a:spcPts val="0"/>
+              </a:spcAft>
+            </a:pPr>
+            <a:r>
+              <a:rPr sz="1050" b="0" i="0">
+                <a:solidFill>
+                  <a:srgbClr val="1F2A30"/>
+                </a:solidFill>
+                <a:latin typeface="Swis721 Cn BT"/>
+              </a:rPr>
+              <a:t>de simulación: roles, diálogos y debriefing</a:t>
+            </a:r>
+          </a:p>
+        </p:txBody>
+      </p:sp>
+      <p:sp>
+        <p:nvSpPr>
+          <p:cNvPr id="25" name="Rounded Rectangle 24"/>
+          <p:cNvSpPr/>
+          <p:nvPr/>
+        </p:nvSpPr>
+        <p:spPr>
+          <a:xfrm>
+            <a:off x="2286000" y="2514600"/>
+            <a:ext cx="1645920" cy="1508760"/>
+          </a:xfrm>
+          <a:prstGeom prst="roundRect">
+            <a:avLst>
+              <a:gd name="adj" fmla="val 7272"/>
+            </a:avLst>
+          </a:prstGeom>
+          <a:solidFill>
+            <a:srgbClr val="E8F0F4"/>
+          </a:solidFill>
+          <a:ln>
+            <a:noFill/>
+          </a:ln>
+        </p:spPr>
+        <p:txBody>
+          <a:bodyPr rtlCol="0" anchor="ctr"/>
+          <a:lstStyle/>
+          <a:p>
+            <a:pPr algn="ctr"/>
+            <a:endParaRPr/>
+          </a:p>
+        </p:txBody>
+      </p:sp>
+      <p:sp>
+        <p:nvSpPr>
+          <p:cNvPr id="26" name="Oval 25"/>
+          <p:cNvSpPr/>
+          <p:nvPr/>
+        </p:nvSpPr>
+        <p:spPr>
+          <a:xfrm>
+            <a:off x="2852928" y="2651760"/>
+            <a:ext cx="512064" cy="512064"/>
+          </a:xfrm>
+          <a:prstGeom prst="ellipse">
+            <a:avLst/>
+          </a:prstGeom>
+          <a:solidFill>
+            <a:srgbClr val="BF210C"/>
+          </a:solidFill>
+          <a:ln>
+            <a:noFill/>
+          </a:ln>
+        </p:spPr>
+        <p:txBody>
+          <a:bodyPr rtlCol="0" anchor="ctr"/>
+          <a:lstStyle/>
+          <a:p>
+            <a:pPr algn="ctr"/>
+            <a:endParaRPr/>
+          </a:p>
+        </p:txBody>
+      </p:sp>
+      <p:pic>
+        <p:nvPicPr>
+          <p:cNvPr id="27" name="Picture 26" descr="MdCampaign_blanco.png"/>
+          <p:cNvPicPr>
+            <a:picLocks noChangeAspect="1"/>
+          </p:cNvPicPr>
+          <p:nvPr/>
+        </p:nvPicPr>
+        <p:blipFill>
+          <a:blip r:embed="rId7"/>
+          <a:stretch>
+            <a:fillRect/>
+          </a:stretch>
+        </p:blipFill>
+        <p:spPr>
+          <a:xfrm>
+            <a:off x="2960461" y="2759293"/>
+            <a:ext cx="296997" cy="296997"/>
+          </a:xfrm>
+          <a:prstGeom prst="rect">
+            <a:avLst/>
+          </a:prstGeom>
+        </p:spPr>
+      </p:pic>
+      <p:sp>
+        <p:nvSpPr>
+          <p:cNvPr id="28" name="TextBox 27"/>
+          <p:cNvSpPr txBox="1"/>
+          <p:nvPr/>
+        </p:nvSpPr>
+        <p:spPr>
+          <a:xfrm>
+            <a:off x="2377440" y="3227832"/>
+            <a:ext cx="1463040" cy="292608"/>
+          </a:xfrm>
+          <a:prstGeom prst="rect">
+            <a:avLst/>
+          </a:prstGeom>
+          <a:noFill/>
+        </p:spPr>
+        <p:txBody>
+          <a:bodyPr wrap="square" lIns="0" tIns="0" rIns="0" bIns="0" anchor="t">
+            <a:noAutofit/>
+          </a:bodyPr>
+          <a:lstStyle/>
+          <a:p>
+            <a:pPr algn="ctr">
+              <a:spcAft>
+                <a:spcPts val="0"/>
+              </a:spcAft>
+            </a:pPr>
+            <a:r>
+              <a:rPr sz="1200" b="1" i="0">
+                <a:solidFill>
+                  <a:srgbClr val="003C58"/>
+                </a:solidFill>
+                <a:latin typeface="Swis721 Cn BT"/>
+              </a:rPr>
+              <a:t>Folletos</a:t>
+            </a:r>
+          </a:p>
+        </p:txBody>
+      </p:sp>
+      <p:sp>
+        <p:nvSpPr>
+          <p:cNvPr id="29" name="TextBox 28"/>
+          <p:cNvSpPr txBox="1"/>
+          <p:nvPr/>
+        </p:nvSpPr>
+        <p:spPr>
+          <a:xfrm>
+            <a:off x="2377440" y="3502152"/>
+            <a:ext cx="1463040" cy="502920"/>
+          </a:xfrm>
+          <a:prstGeom prst="rect">
+            <a:avLst/>
+          </a:prstGeom>
+          <a:noFill/>
+        </p:spPr>
+        <p:txBody>
+          <a:bodyPr wrap="square" lIns="0" tIns="0" rIns="0" bIns="0" anchor="t">
+            <a:noAutofit/>
+          </a:bodyPr>
+          <a:lstStyle/>
+          <a:p>
+            <a:pPr algn="ctr">
+              <a:spcAft>
+                <a:spcPts val="0"/>
+              </a:spcAft>
+            </a:pPr>
+            <a:r>
+              <a:rPr sz="1050" b="0" i="0">
+                <a:solidFill>
+                  <a:srgbClr val="1F2A30"/>
+                </a:solidFill>
+                <a:latin typeface="Swis721 Cn BT"/>
+              </a:rPr>
+              <a:t>para usuarias, en lenguaje claro y pertinente</a:t>
+            </a:r>
+          </a:p>
+        </p:txBody>
+      </p:sp>
+      <p:sp>
+        <p:nvSpPr>
+          <p:cNvPr id="30" name="Rounded Rectangle 29"/>
+          <p:cNvSpPr/>
+          <p:nvPr/>
+        </p:nvSpPr>
+        <p:spPr>
+          <a:xfrm>
+            <a:off x="4069080" y="2514600"/>
+            <a:ext cx="1645920" cy="1508760"/>
+          </a:xfrm>
+          <a:prstGeom prst="roundRect">
+            <a:avLst>
+              <a:gd name="adj" fmla="val 7272"/>
+            </a:avLst>
+          </a:prstGeom>
+          <a:solidFill>
+            <a:srgbClr val="E8F0F4"/>
+          </a:solidFill>
+          <a:ln>
+            <a:noFill/>
+          </a:ln>
+        </p:spPr>
+        <p:txBody>
+          <a:bodyPr rtlCol="0" anchor="ctr"/>
+          <a:lstStyle/>
+          <a:p>
+            <a:pPr algn="ctr"/>
+            <a:endParaRPr/>
+          </a:p>
+        </p:txBody>
+      </p:sp>
+      <p:sp>
+        <p:nvSpPr>
+          <p:cNvPr id="31" name="Oval 30"/>
+          <p:cNvSpPr/>
+          <p:nvPr/>
+        </p:nvSpPr>
+        <p:spPr>
+          <a:xfrm>
+            <a:off x="4636008" y="2651760"/>
+            <a:ext cx="512064" cy="512064"/>
+          </a:xfrm>
+          <a:prstGeom prst="ellipse">
+            <a:avLst/>
+          </a:prstGeom>
+          <a:solidFill>
+            <a:srgbClr val="003C58"/>
+          </a:solidFill>
+          <a:ln>
+            <a:noFill/>
+          </a:ln>
+        </p:spPr>
+        <p:txBody>
+          <a:bodyPr rtlCol="0" anchor="ctr"/>
+          <a:lstStyle/>
+          <a:p>
+            <a:pPr algn="ctr"/>
+            <a:endParaRPr/>
+          </a:p>
+        </p:txBody>
+      </p:sp>
+      <p:pic>
+        <p:nvPicPr>
+          <p:cNvPr id="32" name="Picture 31" descr="MdMenuBook_blanco.png"/>
+          <p:cNvPicPr>
+            <a:picLocks noChangeAspect="1"/>
+          </p:cNvPicPr>
+          <p:nvPr/>
+        </p:nvPicPr>
+        <p:blipFill>
+          <a:blip r:embed="rId8"/>
+          <a:stretch>
+            <a:fillRect/>
+          </a:stretch>
+        </p:blipFill>
+        <p:spPr>
+          <a:xfrm>
+            <a:off x="4743541" y="2759293"/>
+            <a:ext cx="296997" cy="296997"/>
+          </a:xfrm>
+          <a:prstGeom prst="rect">
+            <a:avLst/>
+          </a:prstGeom>
+        </p:spPr>
+      </p:pic>
+      <p:sp>
+        <p:nvSpPr>
+          <p:cNvPr id="33" name="TextBox 32"/>
+          <p:cNvSpPr txBox="1"/>
+          <p:nvPr/>
+        </p:nvSpPr>
+        <p:spPr>
+          <a:xfrm>
+            <a:off x="4160520" y="3227832"/>
+            <a:ext cx="1463040" cy="292608"/>
+          </a:xfrm>
+          <a:prstGeom prst="rect">
+            <a:avLst/>
+          </a:prstGeom>
+          <a:noFill/>
+        </p:spPr>
+        <p:txBody>
+          <a:bodyPr wrap="square" lIns="0" tIns="0" rIns="0" bIns="0" anchor="t">
+            <a:noAutofit/>
+          </a:bodyPr>
+          <a:lstStyle/>
+          <a:p>
+            <a:pPr algn="ctr">
+              <a:spcAft>
+                <a:spcPts val="0"/>
+              </a:spcAft>
+            </a:pPr>
+            <a:r>
+              <a:rPr sz="1200" b="1" i="0">
+                <a:solidFill>
+                  <a:srgbClr val="003C58"/>
+                </a:solidFill>
+                <a:latin typeface="Swis721 Cn BT"/>
+              </a:rPr>
+              <a:t>Resúmenes</a:t>
+            </a:r>
+          </a:p>
+        </p:txBody>
+      </p:sp>
+      <p:sp>
+        <p:nvSpPr>
+          <p:cNvPr id="34" name="TextBox 33"/>
+          <p:cNvSpPr txBox="1"/>
+          <p:nvPr/>
+        </p:nvSpPr>
+        <p:spPr>
+          <a:xfrm>
+            <a:off x="4160520" y="3502152"/>
+            <a:ext cx="1463040" cy="502920"/>
+          </a:xfrm>
+          <a:prstGeom prst="rect">
+            <a:avLst/>
+          </a:prstGeom>
+          <a:noFill/>
+        </p:spPr>
+        <p:txBody>
+          <a:bodyPr wrap="square" lIns="0" tIns="0" rIns="0" bIns="0" anchor="t">
+            <a:noAutofit/>
+          </a:bodyPr>
+          <a:lstStyle/>
+          <a:p>
+            <a:pPr algn="ctr">
+              <a:spcAft>
+                <a:spcPts val="0"/>
+              </a:spcAft>
+            </a:pPr>
+            <a:r>
+              <a:rPr sz="1050" b="0" i="0">
+                <a:solidFill>
+                  <a:srgbClr val="1F2A30"/>
+                </a:solidFill>
+                <a:latin typeface="Swis721 Cn BT"/>
+              </a:rPr>
+              <a:t>mapas, glosarios y fichas de estudio</a:t>
+            </a:r>
+          </a:p>
+        </p:txBody>
+      </p:sp>
+      <p:sp>
+        <p:nvSpPr>
+          <p:cNvPr id="35" name="Rounded Rectangle 34"/>
+          <p:cNvSpPr/>
+          <p:nvPr/>
+        </p:nvSpPr>
+        <p:spPr>
+          <a:xfrm>
+            <a:off x="5943600" y="868680"/>
+            <a:ext cx="2697479" cy="3200400"/>
+          </a:xfrm>
+          <a:prstGeom prst="roundRect">
+            <a:avLst>
+              <a:gd name="adj" fmla="val 4067"/>
+            </a:avLst>
+          </a:prstGeom>
+          <a:solidFill>
+            <a:srgbClr val="003C58"/>
+          </a:solidFill>
+          <a:ln>
+            <a:noFill/>
+          </a:ln>
+        </p:spPr>
+        <p:txBody>
+          <a:bodyPr rtlCol="0" anchor="ctr"/>
+          <a:lstStyle/>
+          <a:p>
+            <a:pPr algn="ctr"/>
+            <a:endParaRPr/>
+          </a:p>
+        </p:txBody>
+      </p:sp>
+      <p:sp>
+        <p:nvSpPr>
+          <p:cNvPr id="36" name="TextBox 35"/>
+          <p:cNvSpPr txBox="1"/>
+          <p:nvPr/>
+        </p:nvSpPr>
+        <p:spPr>
+          <a:xfrm>
+            <a:off x="6144768" y="1005839"/>
+            <a:ext cx="2331720" cy="2971800"/>
+          </a:xfrm>
+          <a:prstGeom prst="rect">
+            <a:avLst/>
+          </a:prstGeom>
+          <a:noFill/>
+        </p:spPr>
+        <p:txBody>
+          <a:bodyPr wrap="square" lIns="0" tIns="0" rIns="0" bIns="0" anchor="t">
+            <a:noAutofit/>
+          </a:bodyPr>
+          <a:lstStyle/>
+          <a:p>
             <a:pPr algn="l">
               <a:spcAft>
-                <a:spcPts val="0"/>
-              </a:spcAft>
-            </a:pPr>
-            <a:r>
-              <a:rPr sz="1050" b="1" i="0">
+                <a:spcPts val="600"/>
+              </a:spcAft>
+            </a:pPr>
+            <a:r>
+              <a:rPr sz="1300" b="1" i="0">
                 <a:solidFill>
                   <a:srgbClr val="F2B705"/>
                 </a:solidFill>
                 <a:latin typeface="Swis721 Cn BT"/>
               </a:rPr>
-              <a:t>Verifica: signos de alarma según la guía y lectura con una usuaria real.</a:t>
+              <a:t>Lo que muestra la evidencia</a:t>
+            </a:r>
+          </a:p>
+          <a:p>
+            <a:pPr algn="l">
+              <a:spcAft>
+                <a:spcPts val="0"/>
+              </a:spcAft>
+            </a:pPr>
+            <a:r>
+              <a:rPr sz="2600" b="1" i="0">
+                <a:solidFill>
+                  <a:srgbClr val="FFFFFF"/>
+                </a:solidFill>
+                <a:latin typeface="Swis721 Cn BT"/>
+              </a:rPr>
+              <a:t>≈ 91 %</a:t>
+            </a:r>
+          </a:p>
+          <a:p>
+            <a:pPr algn="l">
+              <a:spcAft>
+                <a:spcPts val="800"/>
+              </a:spcAft>
+            </a:pPr>
+            <a:r>
+              <a:rPr sz="1100" b="0" i="0">
+                <a:solidFill>
+                  <a:srgbClr val="FFFFFF"/>
+                </a:solidFill>
+                <a:latin typeface="Swis721 Cn BT"/>
+              </a:rPr>
+              <a:t>de los ítems de ginecoobstetricia creados con ChatGPT-4o o Claude 3.5 Sonnet cumplió los criterios de calidad.</a:t>
+            </a:r>
+          </a:p>
+          <a:p>
+            <a:pPr algn="l">
+              <a:spcAft>
+                <a:spcPts val="0"/>
+              </a:spcAft>
+            </a:pPr>
+            <a:r>
+              <a:rPr sz="2600" b="1" i="0">
+                <a:solidFill>
+                  <a:srgbClr val="F2B705"/>
+                </a:solidFill>
+                <a:latin typeface="Swis721 Cn BT"/>
+              </a:rPr>
+              <a:t>71–76 %</a:t>
+            </a:r>
+          </a:p>
+          <a:p>
+            <a:pPr algn="l">
+              <a:spcAft>
+                <a:spcPts val="0"/>
+              </a:spcAft>
+            </a:pPr>
+            <a:r>
+              <a:rPr sz="1100" b="0" i="0">
+                <a:solidFill>
+                  <a:srgbClr val="FFFFFF"/>
+                </a:solidFill>
+                <a:latin typeface="Swis721 Cn BT"/>
+              </a:rPr>
+              <a:t>en el criterio más débil: dificultad adecuada para estudiantes. La docente ajusta el nivel.</a:t>
             </a:r>
           </a:p>
         </p:txBody>
@@ -28630,7 +28995,7 @@
 </file>
 
 <file path=ppt/slides/slide34.xml><?xml version="1.0" encoding="utf-8"?>
-<p:sld xmlns:a="http://schemas.openxmlformats.org/drawingml/2006/main" xmlns:r="http://schemas.openxmlformats.org/officeDocument/2006/relationships" xmlns:p="http://schemas.openxmlformats.org/presentationml/2006/main">
+<p:sld xmlns:a="http://schemas.openxmlformats.org/drawingml/2006/main" xmlns:r="http://schemas.openxmlformats.org/officeDocument/2006/relationships" xmlns:p="http://schemas.openxmlformats.org/presentationml/2006/main" show="0">
   <p:cSld>
     <p:spTree>
       <p:nvGrpSpPr>
@@ -28662,21 +29027,99 @@
           <a:lstStyle/>
           <a:p>
             <a:r>
-              <a:t>Referencias (1 de 3)</a:t>
-            </a:r>
-          </a:p>
-        </p:txBody>
-      </p:sp>
-      <p:sp>
-        <p:nvSpPr>
-          <p:cNvPr id="3" name="TextBox 2"/>
+              <a:t>Dos prompts listos para adaptar a tu asignatura o servicio</a:t>
+            </a:r>
+          </a:p>
+        </p:txBody>
+      </p:sp>
+      <p:sp>
+        <p:nvSpPr>
+          <p:cNvPr id="3" name="Rounded Rectangle 2"/>
+          <p:cNvSpPr/>
+          <p:nvPr/>
+        </p:nvSpPr>
+        <p:spPr>
+          <a:xfrm>
+            <a:off x="502920" y="868680"/>
+            <a:ext cx="3977639" cy="3200400"/>
+          </a:xfrm>
+          <a:prstGeom prst="roundRect">
+            <a:avLst>
+              <a:gd name="adj" fmla="val 2857"/>
+            </a:avLst>
+          </a:prstGeom>
+          <a:solidFill>
+            <a:srgbClr val="003C58"/>
+          </a:solidFill>
+          <a:ln>
+            <a:noFill/>
+          </a:ln>
+        </p:spPr>
+        <p:txBody>
+          <a:bodyPr rtlCol="0" anchor="ctr"/>
+          <a:lstStyle/>
+          <a:p>
+            <a:pPr algn="ctr"/>
+            <a:endParaRPr/>
+          </a:p>
+        </p:txBody>
+      </p:sp>
+      <p:sp>
+        <p:nvSpPr>
+          <p:cNvPr id="4" name="Rounded Rectangle 3"/>
+          <p:cNvSpPr/>
+          <p:nvPr/>
+        </p:nvSpPr>
+        <p:spPr>
+          <a:xfrm>
+            <a:off x="640080" y="1005839"/>
+            <a:ext cx="2651760" cy="292608"/>
+          </a:xfrm>
+          <a:prstGeom prst="roundRect">
+            <a:avLst>
+              <a:gd name="adj" fmla="val 50000"/>
+            </a:avLst>
+          </a:prstGeom>
+          <a:solidFill>
+            <a:srgbClr val="F2B705"/>
+          </a:solidFill>
+          <a:ln>
+            <a:noFill/>
+          </a:ln>
+        </p:spPr>
+        <p:txBody>
+          <a:bodyPr wrap="square" lIns="73152" tIns="73152" rIns="73152" bIns="73152" rtlCol="0" anchor="ctr">
+            <a:noAutofit/>
+          </a:bodyPr>
+          <a:lstStyle/>
+          <a:p>
+            <a:pPr algn="l">
+              <a:spcAft>
+                <a:spcPts val="0"/>
+              </a:spcAft>
+            </a:pPr>
+            <a:r>
+              <a:rPr sz="1100" b="1" i="0">
+                <a:solidFill>
+                  <a:srgbClr val="1F2A30"/>
+                </a:solidFill>
+                <a:latin typeface="Swis721 Cn BT"/>
+              </a:rPr>
+              <a:t>A · Caso simulado con evaluación</a:t>
+            </a:r>
+          </a:p>
+        </p:txBody>
+      </p:sp>
+      <p:sp>
+        <p:nvSpPr>
+          <p:cNvPr id="5" name="TextBox 4"/>
           <p:cNvSpPr txBox="1"/>
           <p:nvPr/>
         </p:nvSpPr>
         <p:spPr>
           <a:xfrm>
-            <a:off x="502920" y="777240"/>
-            <a:ext cx="8138159" cy="3383280"/>
+            <a:off x="667512" y="1417319"/>
+            <a:ext cx="3648456" cy="2542032"/>
           </a:xfrm>
           <a:prstGeom prst="rect">
             <a:avLst/>
@@ -28695,15 +29138,203 @@
               </a:spcAft>
             </a:pPr>
             <a:r>
-              <a:rPr sz="1000" b="0" i="0">
+              <a:rPr sz="1050" b="0" i="0">
+                <a:solidFill>
+                  <a:srgbClr val="FFFFFF"/>
+                </a:solidFill>
+                <a:latin typeface="Swis721 Cn BT"/>
+              </a:rPr>
+              <a:t>Actúa como docente de matronería con experiencia en simulación clínica.</a:t>
+            </a:r>
+          </a:p>
+          <a:p>
+            <a:pPr algn="l">
+              <a:spcAft>
+                <a:spcPts val="400"/>
+              </a:spcAft>
+            </a:pPr>
+            <a:r>
+              <a:rPr sz="1050" b="0" i="0">
+                <a:solidFill>
+                  <a:srgbClr val="FFFFFF"/>
+                </a:solidFill>
+                <a:latin typeface="Swis721 Cn BT"/>
+              </a:rPr>
+              <a:t>Mis estudiantes cursan [nivel] y el resultado de aprendizaje es [RA].</a:t>
+            </a:r>
+          </a:p>
+          <a:p>
+            <a:pPr algn="l">
+              <a:spcAft>
+                <a:spcPts val="400"/>
+              </a:spcAft>
+            </a:pPr>
+            <a:r>
+              <a:rPr sz="1050" b="0" i="0">
+                <a:solidFill>
+                  <a:srgbClr val="FFFFFF"/>
+                </a:solidFill>
+                <a:latin typeface="Swis721 Cn BT"/>
+              </a:rPr>
+              <a:t>Crea un caso clínico ficticio de puerperio con factores de riesgo de endometritis, en tres momentos de evolución. Incluye 5 preguntas de selección múltiple (una correcta, distractores plausibles y justificación), una rúbrica de 4 niveles y la clave.</a:t>
+            </a:r>
+          </a:p>
+          <a:p>
+            <a:pPr algn="l">
+              <a:spcAft>
+                <a:spcPts val="400"/>
+              </a:spcAft>
+            </a:pPr>
+            <a:r>
+              <a:rPr sz="1050" b="0" i="0">
+                <a:solidFill>
+                  <a:srgbClr val="FFFFFF"/>
+                </a:solidFill>
+                <a:latin typeface="Swis721 Cn BT"/>
+              </a:rPr>
+              <a:t>Basa todo en la guía adjunta y cita la página de cada respuesta.</a:t>
+            </a:r>
+          </a:p>
+        </p:txBody>
+      </p:sp>
+      <p:sp>
+        <p:nvSpPr>
+          <p:cNvPr id="6" name="TextBox 5"/>
+          <p:cNvSpPr txBox="1"/>
+          <p:nvPr/>
+        </p:nvSpPr>
+        <p:spPr>
+          <a:xfrm>
+            <a:off x="667512" y="3502152"/>
+            <a:ext cx="3648456" cy="457200"/>
+          </a:xfrm>
+          <a:prstGeom prst="rect">
+            <a:avLst/>
+          </a:prstGeom>
+          <a:noFill/>
+        </p:spPr>
+        <p:txBody>
+          <a:bodyPr wrap="square" lIns="0" tIns="0" rIns="0" bIns="0" anchor="b">
+            <a:noAutofit/>
+          </a:bodyPr>
+          <a:lstStyle/>
+          <a:p>
+            <a:pPr algn="l">
+              <a:spcAft>
+                <a:spcPts val="0"/>
+              </a:spcAft>
+            </a:pPr>
+            <a:r>
+              <a:rPr sz="1050" b="1" i="0">
+                <a:solidFill>
+                  <a:srgbClr val="F2B705"/>
+                </a:solidFill>
+                <a:latin typeface="Swis721 Cn BT"/>
+              </a:rPr>
+              <a:t>Verifica: dificultad, coherencia con el RA y páginas citadas.</a:t>
+            </a:r>
+          </a:p>
+        </p:txBody>
+      </p:sp>
+      <p:sp>
+        <p:nvSpPr>
+          <p:cNvPr id="7" name="Rounded Rectangle 6"/>
+          <p:cNvSpPr/>
+          <p:nvPr/>
+        </p:nvSpPr>
+        <p:spPr>
+          <a:xfrm>
+            <a:off x="4663440" y="868680"/>
+            <a:ext cx="3977639" cy="3200400"/>
+          </a:xfrm>
+          <a:prstGeom prst="roundRect">
+            <a:avLst>
+              <a:gd name="adj" fmla="val 2857"/>
+            </a:avLst>
+          </a:prstGeom>
+          <a:solidFill>
+            <a:srgbClr val="003C58"/>
+          </a:solidFill>
+          <a:ln>
+            <a:noFill/>
+          </a:ln>
+        </p:spPr>
+        <p:txBody>
+          <a:bodyPr rtlCol="0" anchor="ctr"/>
+          <a:lstStyle/>
+          <a:p>
+            <a:pPr algn="ctr"/>
+            <a:endParaRPr/>
+          </a:p>
+        </p:txBody>
+      </p:sp>
+      <p:sp>
+        <p:nvSpPr>
+          <p:cNvPr id="8" name="Rounded Rectangle 7"/>
+          <p:cNvSpPr/>
+          <p:nvPr/>
+        </p:nvSpPr>
+        <p:spPr>
+          <a:xfrm>
+            <a:off x="4800600" y="1005839"/>
+            <a:ext cx="2651760" cy="292608"/>
+          </a:xfrm>
+          <a:prstGeom prst="roundRect">
+            <a:avLst>
+              <a:gd name="adj" fmla="val 50000"/>
+            </a:avLst>
+          </a:prstGeom>
+          <a:solidFill>
+            <a:srgbClr val="F2B705"/>
+          </a:solidFill>
+          <a:ln>
+            <a:noFill/>
+          </a:ln>
+        </p:spPr>
+        <p:txBody>
+          <a:bodyPr wrap="square" lIns="73152" tIns="73152" rIns="73152" bIns="73152" rtlCol="0" anchor="ctr">
+            <a:noAutofit/>
+          </a:bodyPr>
+          <a:lstStyle/>
+          <a:p>
+            <a:pPr algn="l">
+              <a:spcAft>
+                <a:spcPts val="0"/>
+              </a:spcAft>
+            </a:pPr>
+            <a:r>
+              <a:rPr sz="1100" b="1" i="0">
                 <a:solidFill>
                   <a:srgbClr val="1F2A30"/>
                 </a:solidFill>
                 <a:latin typeface="Swis721 Cn BT"/>
               </a:rPr>
-              <a:t>1. Giaxi P, Vivilaki V, Sarella A, Harizopoulou V, Gourounti K. Artificial intelligence and machine learning: an updated systematic review of their role in obstetrics and midwifery. Cureus. 2025;17(3):e80394. doi:10.7759/cureus.80394</a:t>
-            </a:r>
-          </a:p>
+              <a:t>B · Material para usuarias</a:t>
+            </a:r>
+          </a:p>
+        </p:txBody>
+      </p:sp>
+      <p:sp>
+        <p:nvSpPr>
+          <p:cNvPr id="9" name="TextBox 8"/>
+          <p:cNvSpPr txBox="1"/>
+          <p:nvPr/>
+        </p:nvSpPr>
+        <p:spPr>
+          <a:xfrm>
+            <a:off x="4828031" y="1417319"/>
+            <a:ext cx="3648456" cy="2542032"/>
+          </a:xfrm>
+          <a:prstGeom prst="rect">
+            <a:avLst/>
+          </a:prstGeom>
+          <a:noFill/>
+        </p:spPr>
+        <p:txBody>
+          <a:bodyPr wrap="square" lIns="0" tIns="0" rIns="0" bIns="0" anchor="t">
+            <a:noAutofit/>
+          </a:bodyPr>
+          <a:lstStyle/>
           <a:p>
             <a:pPr algn="l">
               <a:spcAft>
@@ -28711,13 +29342,13 @@
               </a:spcAft>
             </a:pPr>
             <a:r>
-              <a:rPr sz="1000" b="0" i="0">
-                <a:solidFill>
-                  <a:srgbClr val="1F2A30"/>
-                </a:solidFill>
-                <a:latin typeface="Swis721 Cn BT"/>
-              </a:rPr>
-              <a:t>2. Giaxi P, Vivilaki V, Sarella A, Gourounti K. Artificial intelligence in midwifery: a scoping review of current applications, future prospects, and midwives' perspectives. Healthcare (Basel). 2025;13(8):942. doi:10.3390/healthcare13080942</a:t>
+              <a:rPr sz="1050" b="0" i="0">
+                <a:solidFill>
+                  <a:srgbClr val="FFFFFF"/>
+                </a:solidFill>
+                <a:latin typeface="Swis721 Cn BT"/>
+              </a:rPr>
+              <a:t>Actúa como matrona educadora de atención primaria.</a:t>
             </a:r>
           </a:p>
           <a:p>
@@ -28727,13 +29358,13 @@
               </a:spcAft>
             </a:pPr>
             <a:r>
-              <a:rPr sz="1000" b="0" i="0">
-                <a:solidFill>
-                  <a:srgbClr val="1F2A30"/>
-                </a:solidFill>
-                <a:latin typeface="Swis721 Cn BT"/>
-              </a:rPr>
-              <a:t>3. Unlu Bidik N. Theoretical and clinical learning experiences and expectations of midwifery students using the artificial intelligence tool ChatGPT: a qualitative study. Eur J Educ. 2025;60(1):e12848. doi:10.1111/ejed.12848</a:t>
+              <a:rPr sz="1050" b="0" i="0">
+                <a:solidFill>
+                  <a:srgbClr val="FFFFFF"/>
+                </a:solidFill>
+                <a:latin typeface="Swis721 Cn BT"/>
+              </a:rPr>
+              <a:t>Redacta un folleto sobre signos de alarma en el puerperio para mujeres que acaban de tener a su bebé.</a:t>
             </a:r>
           </a:p>
           <a:p>
@@ -28743,13 +29374,13 @@
               </a:spcAft>
             </a:pPr>
             <a:r>
-              <a:rPr sz="1000" b="0" i="0">
-                <a:solidFill>
-                  <a:srgbClr val="1F2A30"/>
-                </a:solidFill>
-                <a:latin typeface="Swis721 Cn BT"/>
-              </a:rPr>
-              <a:t>4. Kranz A, Abele H. The impact of artificial intelligence (AI) on midwifery education: a scoping review. Healthcare (Basel). 2024;12(11):1082. doi:10.3390/healthcare12111082</a:t>
+              <a:rPr sz="1050" b="0" i="0">
+                <a:solidFill>
+                  <a:srgbClr val="FFFFFF"/>
+                </a:solidFill>
+                <a:latin typeface="Swis721 Cn BT"/>
+              </a:rPr>
+              <a:t>Lenguaje claro, español de Chile, frases cortas, sin tecnicismos (o explicados), nivel de lectura de 6.º básico.</a:t>
             </a:r>
           </a:p>
           <a:p>
@@ -28759,13 +29390,13 @@
               </a:spcAft>
             </a:pPr>
             <a:r>
-              <a:rPr sz="1000" b="0" i="0">
-                <a:solidFill>
-                  <a:srgbClr val="1F2A30"/>
-                </a:solidFill>
-                <a:latin typeface="Swis721 Cn BT"/>
-              </a:rPr>
-              <a:t>5. McCulloch WS, Pitts W. A logical calculus of the ideas immanent in nervous activity. Bull Math Biophys. 1943;5(4):115-33. doi:10.1007/BF02478259</a:t>
+              <a:rPr sz="1050" b="0" i="0">
+                <a:solidFill>
+                  <a:srgbClr val="FFFFFF"/>
+                </a:solidFill>
+                <a:latin typeface="Swis721 Cn BT"/>
+              </a:rPr>
+              <a:t>Formato: título, 5 signos de alarma con qué hacer y un espacio para el teléfono local.</a:t>
             </a:r>
           </a:p>
           <a:p>
@@ -28775,45 +29406,52 @@
               </a:spcAft>
             </a:pPr>
             <a:r>
-              <a:rPr sz="1000" b="0" i="0">
-                <a:solidFill>
-                  <a:srgbClr val="1F2A30"/>
-                </a:solidFill>
-                <a:latin typeface="Swis721 Cn BT"/>
-              </a:rPr>
-              <a:t>6. LeCun Y, Bengio Y, Hinton G. Deep learning. Nature. 2015;521(7553):436-44. doi:10.1038/nature14539</a:t>
-            </a:r>
-          </a:p>
+              <a:rPr sz="1050" b="0" i="0">
+                <a:solidFill>
+                  <a:srgbClr val="FFFFFF"/>
+                </a:solidFill>
+                <a:latin typeface="Swis721 Cn BT"/>
+              </a:rPr>
+              <a:t>Usa solo la guía adjunta y no incluyas indicaciones de medicamentos.</a:t>
+            </a:r>
+          </a:p>
+        </p:txBody>
+      </p:sp>
+      <p:sp>
+        <p:nvSpPr>
+          <p:cNvPr id="10" name="TextBox 9"/>
+          <p:cNvSpPr txBox="1"/>
+          <p:nvPr/>
+        </p:nvSpPr>
+        <p:spPr>
+          <a:xfrm>
+            <a:off x="4828031" y="3502152"/>
+            <a:ext cx="3648456" cy="457200"/>
+          </a:xfrm>
+          <a:prstGeom prst="rect">
+            <a:avLst/>
+          </a:prstGeom>
+          <a:noFill/>
+        </p:spPr>
+        <p:txBody>
+          <a:bodyPr wrap="square" lIns="0" tIns="0" rIns="0" bIns="0" anchor="b">
+            <a:noAutofit/>
+          </a:bodyPr>
+          <a:lstStyle/>
           <a:p>
             <a:pPr algn="l">
               <a:spcAft>
-                <a:spcPts val="400"/>
-              </a:spcAft>
-            </a:pPr>
-            <a:r>
-              <a:rPr sz="1000" b="0" i="0">
-                <a:solidFill>
-                  <a:srgbClr val="1F2A30"/>
-                </a:solidFill>
-                <a:latin typeface="Swis721 Cn BT"/>
-              </a:rPr>
-              <a:t>7. Omiye JA, Gui H, Rezaei SJ, Zou J, Daneshjou R. Large language models in medicine: the potentials and pitfalls: a narrative review. Ann Intern Med. 2024;177(2):210-20. doi:10.7326/M23-2772</a:t>
-            </a:r>
-          </a:p>
-          <a:p>
-            <a:pPr algn="l">
-              <a:spcAft>
-                <a:spcPts val="400"/>
-              </a:spcAft>
-            </a:pPr>
-            <a:r>
-              <a:rPr sz="1000" b="0" i="0">
-                <a:solidFill>
-                  <a:srgbClr val="1F2A30"/>
-                </a:solidFill>
-                <a:latin typeface="Swis721 Cn BT"/>
-              </a:rPr>
-              <a:t>8. Vaswani A, Shazeer N, Parmar N, Uszkoreit J, Jones L, Gomez AN, et al. Attention is all you need [preprint]. arXiv. 2017. doi:10.48550/arXiv.1706.03762</a:t>
+                <a:spcPts val="0"/>
+              </a:spcAft>
+            </a:pPr>
+            <a:r>
+              <a:rPr sz="1050" b="1" i="0">
+                <a:solidFill>
+                  <a:srgbClr val="F2B705"/>
+                </a:solidFill>
+                <a:latin typeface="Swis721 Cn BT"/>
+              </a:rPr>
+              <a:t>Verifica: signos de alarma según la guía y lectura con una usuaria real.</a:t>
             </a:r>
           </a:p>
         </p:txBody>
@@ -28859,7 +29497,7 @@
           <a:lstStyle/>
           <a:p>
             <a:r>
-              <a:t>Referencias (2 de 3)</a:t>
+              <a:t>Referencias (1 de 3)</a:t>
             </a:r>
           </a:p>
         </p:txBody>
@@ -28898,7 +29536,7 @@
                 </a:solidFill>
                 <a:latin typeface="Swis721 Cn BT"/>
               </a:rPr>
-              <a:t>9. Chelli M, Descamps J, Lavoué V, Trojani C, Azar M, Deckert M, et al. Hallucination rates and reference accuracy of ChatGPT and Bard for systematic reviews: comparative analysis. J Med Internet Res. 2024;26:e53164. doi:10.2196/53164</a:t>
+              <a:t>1. Giaxi P, Vivilaki V, Sarella A, Harizopoulou V, Gourounti K. Artificial intelligence and machine learning: an updated systematic review of their role in obstetrics and midwifery. Cureus. 2025;17(3):e80394. doi:10.7759/cureus.80394</a:t>
             </a:r>
           </a:p>
           <a:p>
@@ -28914,7 +29552,7 @@
                 </a:solidFill>
                 <a:latin typeface="Swis721 Cn BT"/>
               </a:rPr>
-              <a:t>10. Ayala-Yáñez R, Grünebaum A, Chervenak FA. Integrating generative AI in perinatology: applications for literature review. J Perinat Med. 2026;54(1):17-22. doi:10.1515/jpm-2025-0392. Epub 2025 Sep 23</a:t>
+              <a:t>2. Giaxi P, Vivilaki V, Sarella A, Gourounti K. Artificial intelligence in midwifery: a scoping review of current applications, future prospects, and midwives' perspectives. Healthcare (Basel). 2025;13(8):942. doi:10.3390/healthcare13080942</a:t>
             </a:r>
           </a:p>
           <a:p>
@@ -28930,7 +29568,7 @@
                 </a:solidFill>
                 <a:latin typeface="Swis721 Cn BT"/>
               </a:rPr>
-              <a:t>11. Ouyang L, Wu J, Jiang X, Almeida D, Wainwright CL, Mishkin P, et al. Training language models to follow instructions with human feedback [preprint]. arXiv. 2022. doi:10.48550/arXiv.2203.02155</a:t>
+              <a:t>3. Unlu Bidik N. Theoretical and clinical learning experiences and expectations of midwifery students using the artificial intelligence tool ChatGPT: a qualitative study. Eur J Educ. 2025;60(1):e12848. doi:10.1111/ejed.12848</a:t>
             </a:r>
           </a:p>
           <a:p>
@@ -28946,7 +29584,7 @@
                 </a:solidFill>
                 <a:latin typeface="Swis721 Cn BT"/>
               </a:rPr>
-              <a:t>12. Singhal K, Tu T, Gottweis J, Sayres R, Wulczyn E, Amin M, et al. Toward expert-level medical question answering with large language models. Nat Med. 2025;31(3):943-50. doi:10.1038/s41591-024-03423-7</a:t>
+              <a:t>4. Kranz A, Abele H. The impact of artificial intelligence (AI) on midwifery education: a scoping review. Healthcare (Basel). 2024;12(11):1082. doi:10.3390/healthcare12111082</a:t>
             </a:r>
           </a:p>
           <a:p>
@@ -28962,7 +29600,7 @@
                 </a:solidFill>
                 <a:latin typeface="Swis721 Cn BT"/>
               </a:rPr>
-              <a:t>13. Guo D, Yang D, Zhang H, Song J, Wang P, Zhu Q, et al. DeepSeek-R1 incentivizes reasoning in LLMs through reinforcement learning. Nature. 2025;645(8081):633-8. doi:10.1038/s41586-025-09422-z</a:t>
+              <a:t>5. McCulloch WS, Pitts W. A logical calculus of the ideas immanent in nervous activity. Bull Math Biophys. 1943;5(4):115-33. doi:10.1007/BF02478259</a:t>
             </a:r>
           </a:p>
           <a:p>
@@ -28978,7 +29616,7 @@
                 </a:solidFill>
                 <a:latin typeface="Swis721 Cn BT"/>
               </a:rPr>
-              <a:t>14. Gemini Team, Google. Gemini: a family of highly capable multimodal models [preprint]. arXiv. 2023. doi:10.48550/arXiv.2312.11805</a:t>
+              <a:t>6. LeCun Y, Bengio Y, Hinton G. Deep learning. Nature. 2015;521(7553):436-44. doi:10.1038/nature14539</a:t>
             </a:r>
           </a:p>
           <a:p>
@@ -28994,7 +29632,7 @@
                 </a:solidFill>
                 <a:latin typeface="Swis721 Cn BT"/>
               </a:rPr>
-              <a:t>15. Bai Y, Kadavath S, Kundu S, Askell A, Kernion J, Jones A, et al. Constitutional AI: harmlessness from AI feedback [preprint]. arXiv. 2022. doi:10.48550/arXiv.2212.08073</a:t>
+              <a:t>7. Omiye JA, Gui H, Rezaei SJ, Zou J, Daneshjou R. Large language models in medicine: the potentials and pitfalls: a narrative review. Ann Intern Med. 2024;177(2):210-20. doi:10.7326/M23-2772</a:t>
             </a:r>
           </a:p>
           <a:p>
@@ -29010,7 +29648,7 @@
                 </a:solidFill>
                 <a:latin typeface="Swis721 Cn BT"/>
               </a:rPr>
-              <a:t>16. Riedemann L, Labonne M, Gilbert S. The path forward for large language models in medicine is open. NPJ Digit Med. 2024;7(1):339. doi:10.1038/s41746-024-01344-w</a:t>
+              <a:t>8. Vaswani A, Shazeer N, Parmar N, Uszkoreit J, Jones L, Gomez AN, et al. Attention is all you need [preprint]. arXiv. 2017. doi:10.48550/arXiv.1706.03762</a:t>
             </a:r>
           </a:p>
         </p:txBody>
@@ -29056,7 +29694,7 @@
           <a:lstStyle/>
           <a:p>
             <a:r>
-              <a:t>Referencias (3 de 3)</a:t>
+              <a:t>Referencias (2 de 3)</a:t>
             </a:r>
           </a:p>
         </p:txBody>
@@ -29095,7 +29733,7 @@
                 </a:solidFill>
                 <a:latin typeface="Swis721 Cn BT"/>
               </a:rPr>
-              <a:t>17. Wang W, Zhou Y, Fu J, Hu K. Evaluating the performance of DeepSeek-R1 and DeepSeek-V3 versus OpenAI models in the Chinese National Medical Licensing Examination: cross-sectional comparative study. JMIR Med Educ. 2025;11:e73469. doi:10.2196/73469</a:t>
+              <a:t>9. Chelli M, Descamps J, Lavoué V, Trojani C, Azar M, Deckert M, et al. Hallucination rates and reference accuracy of ChatGPT and Bard for systematic reviews: comparative analysis. J Med Internet Res. 2024;26:e53164. doi:10.2196/53164</a:t>
             </a:r>
           </a:p>
           <a:p>
@@ -29111,7 +29749,7 @@
                 </a:solidFill>
                 <a:latin typeface="Swis721 Cn BT"/>
               </a:rPr>
-              <a:t>18. Yapıcı Coşkun Z, Kıyak YS, Coşkun Ö, Budakoğlu Iİ, Özdemir Ö. Large language models for generating script concordance test in obstetrics and gynecology: ChatGPT and Claude. Med Teach. 2025;47(11):1767-71. doi:10.1080/0142159X.2025.2497888</a:t>
+              <a:t>10. Ayala-Yáñez R, Grünebaum A, Chervenak FA. Integrating generative AI in perinatology: applications for literature review. J Perinat Med. 2026;54(1):17-22. doi:10.1515/jpm-2025-0392. Epub 2025 Sep 23</a:t>
             </a:r>
           </a:p>
           <a:p>
@@ -29127,7 +29765,7 @@
                 </a:solidFill>
                 <a:latin typeface="Swis721 Cn BT"/>
               </a:rPr>
-              <a:t>19. Chen L, Zaharia M, Zou J. How is ChatGPT's behavior changing over time? Harv Data Sci Rev. 2024;6(2). doi:10.1162/99608f92.5317da47</a:t>
+              <a:t>11. Ouyang L, Wu J, Jiang X, Almeida D, Wainwright CL, Mishkin P, et al. Training language models to follow instructions with human feedback [preprint]. arXiv. 2022. doi:10.48550/arXiv.2203.02155</a:t>
             </a:r>
           </a:p>
           <a:p>
@@ -29143,7 +29781,7 @@
                 </a:solidFill>
                 <a:latin typeface="Swis721 Cn BT"/>
               </a:rPr>
-              <a:t>20. Amugongo LM, Mascheroni P, Brooks S, Doering S, Seidel J. Retrieval augmented generation for large language models in healthcare: a systematic review. PLOS Digit Health. 2025;4(6):e0000877. doi:10.1371/journal.pdig.0000877</a:t>
+              <a:t>12. Singhal K, Tu T, Gottweis J, Sayres R, Wulczyn E, Amin M, et al. Toward expert-level medical question answering with large language models. Nat Med. 2025;31(3):943-50. doi:10.1038/s41591-024-03423-7</a:t>
             </a:r>
           </a:p>
           <a:p>
@@ -29159,7 +29797,7 @@
                 </a:solidFill>
                 <a:latin typeface="Swis721 Cn BT"/>
               </a:rPr>
-              <a:t>21. Liu J, Liu F, Wang C, Liu S. Prompt engineering in clinical practice: tutorial for clinicians. J Med Internet Res. 2025;27:e72644. doi:10.2196/72644</a:t>
+              <a:t>13. Guo D, Yang D, Zhang H, Song J, Wang P, Zhu Q, et al. DeepSeek-R1 incentivizes reasoning in LLMs through reinforcement learning. Nature. 2025;645(8081):633-8. doi:10.1038/s41586-025-09422-z</a:t>
             </a:r>
           </a:p>
           <a:p>
@@ -29175,7 +29813,7 @@
                 </a:solidFill>
                 <a:latin typeface="Swis721 Cn BT"/>
               </a:rPr>
-              <a:t>22. Gallifant J, Afshar M, Ameen S, Aphinyanaphongs Y, Chen S, Cacciamani G, et al. The TRIPOD-LLM reporting guideline for studies using large language models. Nat Med. 2025;31(1):60-9. doi:10.1038/s41591-024-03425-5</a:t>
+              <a:t>14. Gemini Team, Google. Gemini: a family of highly capable multimodal models [preprint]. arXiv. 2023. doi:10.48550/arXiv.2312.11805</a:t>
             </a:r>
           </a:p>
           <a:p>
@@ -29191,7 +29829,7 @@
                 </a:solidFill>
                 <a:latin typeface="Swis721 Cn BT"/>
               </a:rPr>
-              <a:t>23. Meskó B. Prompt engineering as an important emerging skill for medical professionals: tutorial. J Med Internet Res. 2023;25:e50638. doi:10.2196/50638</a:t>
+              <a:t>15. Bai Y, Kadavath S, Kundu S, Askell A, Kernion J, Jones A, et al. Constitutional AI: harmlessness from AI feedback [preprint]. arXiv. 2022. doi:10.48550/arXiv.2212.08073</a:t>
             </a:r>
           </a:p>
           <a:p>
@@ -29207,7 +29845,7 @@
                 </a:solidFill>
                 <a:latin typeface="Swis721 Cn BT"/>
               </a:rPr>
-              <a:t>24. Zaghir J, Naguib M, Bjelogrlic M, Névéol A, Tannier X, Lovis C. Prompt engineering paradigms for medical applications: scoping review. J Med Internet Res. 2024;26:e60501. doi:10.2196/60501</a:t>
+              <a:t>16. Riedemann L, Labonne M, Gilbert S. The path forward for large language models in medicine is open. NPJ Digit Med. 2024;7(1):339. doi:10.1038/s41746-024-01344-w</a:t>
             </a:r>
           </a:p>
         </p:txBody>
@@ -29221,6 +29859,203 @@
 </file>
 
 <file path=ppt/slides/slide37.xml><?xml version="1.0" encoding="utf-8"?>
+<p:sld xmlns:a="http://schemas.openxmlformats.org/drawingml/2006/main" xmlns:r="http://schemas.openxmlformats.org/officeDocument/2006/relationships" xmlns:p="http://schemas.openxmlformats.org/presentationml/2006/main">
+  <p:cSld>
+    <p:spTree>
+      <p:nvGrpSpPr>
+        <p:cNvPr id="1" name=""/>
+        <p:cNvGrpSpPr/>
+        <p:nvPr/>
+      </p:nvGrpSpPr>
+      <p:grpSpPr>
+        <a:xfrm>
+          <a:off x="0" y="0"/>
+          <a:ext cx="0" cy="0"/>
+          <a:chOff x="0" y="0"/>
+          <a:chExt cx="0" cy="0"/>
+        </a:xfrm>
+      </p:grpSpPr>
+      <p:sp>
+        <p:nvSpPr>
+          <p:cNvPr id="2" name="Title 1"/>
+          <p:cNvSpPr>
+            <a:spLocks noGrp="1"/>
+          </p:cNvSpPr>
+          <p:nvPr>
+            <p:ph type="title"/>
+          </p:nvPr>
+        </p:nvSpPr>
+        <p:spPr/>
+        <p:txBody>
+          <a:bodyPr/>
+          <a:lstStyle/>
+          <a:p>
+            <a:r>
+              <a:t>Referencias (3 de 3)</a:t>
+            </a:r>
+          </a:p>
+        </p:txBody>
+      </p:sp>
+      <p:sp>
+        <p:nvSpPr>
+          <p:cNvPr id="3" name="TextBox 2"/>
+          <p:cNvSpPr txBox="1"/>
+          <p:nvPr/>
+        </p:nvSpPr>
+        <p:spPr>
+          <a:xfrm>
+            <a:off x="502920" y="777240"/>
+            <a:ext cx="8138159" cy="3383280"/>
+          </a:xfrm>
+          <a:prstGeom prst="rect">
+            <a:avLst/>
+          </a:prstGeom>
+          <a:noFill/>
+        </p:spPr>
+        <p:txBody>
+          <a:bodyPr wrap="square" lIns="0" tIns="0" rIns="0" bIns="0" anchor="t">
+            <a:noAutofit/>
+          </a:bodyPr>
+          <a:lstStyle/>
+          <a:p>
+            <a:pPr algn="l">
+              <a:spcAft>
+                <a:spcPts val="400"/>
+              </a:spcAft>
+            </a:pPr>
+            <a:r>
+              <a:rPr sz="1000" b="0" i="0">
+                <a:solidFill>
+                  <a:srgbClr val="1F2A30"/>
+                </a:solidFill>
+                <a:latin typeface="Swis721 Cn BT"/>
+              </a:rPr>
+              <a:t>17. Wang W, Zhou Y, Fu J, Hu K. Evaluating the performance of DeepSeek-R1 and DeepSeek-V3 versus OpenAI models in the Chinese National Medical Licensing Examination: cross-sectional comparative study. JMIR Med Educ. 2025;11:e73469. doi:10.2196/73469</a:t>
+            </a:r>
+          </a:p>
+          <a:p>
+            <a:pPr algn="l">
+              <a:spcAft>
+                <a:spcPts val="400"/>
+              </a:spcAft>
+            </a:pPr>
+            <a:r>
+              <a:rPr sz="1000" b="0" i="0">
+                <a:solidFill>
+                  <a:srgbClr val="1F2A30"/>
+                </a:solidFill>
+                <a:latin typeface="Swis721 Cn BT"/>
+              </a:rPr>
+              <a:t>18. Yapıcı Coşkun Z, Kıyak YS, Coşkun Ö, Budakoğlu Iİ, Özdemir Ö. Large language models for generating script concordance test in obstetrics and gynecology: ChatGPT and Claude. Med Teach. 2025;47(11):1767-71. doi:10.1080/0142159X.2025.2497888</a:t>
+            </a:r>
+          </a:p>
+          <a:p>
+            <a:pPr algn="l">
+              <a:spcAft>
+                <a:spcPts val="400"/>
+              </a:spcAft>
+            </a:pPr>
+            <a:r>
+              <a:rPr sz="1000" b="0" i="0">
+                <a:solidFill>
+                  <a:srgbClr val="1F2A30"/>
+                </a:solidFill>
+                <a:latin typeface="Swis721 Cn BT"/>
+              </a:rPr>
+              <a:t>19. Chen L, Zaharia M, Zou J. How is ChatGPT's behavior changing over time? Harv Data Sci Rev. 2024;6(2). doi:10.1162/99608f92.5317da47</a:t>
+            </a:r>
+          </a:p>
+          <a:p>
+            <a:pPr algn="l">
+              <a:spcAft>
+                <a:spcPts val="400"/>
+              </a:spcAft>
+            </a:pPr>
+            <a:r>
+              <a:rPr sz="1000" b="0" i="0">
+                <a:solidFill>
+                  <a:srgbClr val="1F2A30"/>
+                </a:solidFill>
+                <a:latin typeface="Swis721 Cn BT"/>
+              </a:rPr>
+              <a:t>20. Amugongo LM, Mascheroni P, Brooks S, Doering S, Seidel J. Retrieval augmented generation for large language models in healthcare: a systematic review. PLOS Digit Health. 2025;4(6):e0000877. doi:10.1371/journal.pdig.0000877</a:t>
+            </a:r>
+          </a:p>
+          <a:p>
+            <a:pPr algn="l">
+              <a:spcAft>
+                <a:spcPts val="400"/>
+              </a:spcAft>
+            </a:pPr>
+            <a:r>
+              <a:rPr sz="1000" b="0" i="0">
+                <a:solidFill>
+                  <a:srgbClr val="1F2A30"/>
+                </a:solidFill>
+                <a:latin typeface="Swis721 Cn BT"/>
+              </a:rPr>
+              <a:t>21. Liu J, Liu F, Wang C, Liu S. Prompt engineering in clinical practice: tutorial for clinicians. J Med Internet Res. 2025;27:e72644. doi:10.2196/72644</a:t>
+            </a:r>
+          </a:p>
+          <a:p>
+            <a:pPr algn="l">
+              <a:spcAft>
+                <a:spcPts val="400"/>
+              </a:spcAft>
+            </a:pPr>
+            <a:r>
+              <a:rPr sz="1000" b="0" i="0">
+                <a:solidFill>
+                  <a:srgbClr val="1F2A30"/>
+                </a:solidFill>
+                <a:latin typeface="Swis721 Cn BT"/>
+              </a:rPr>
+              <a:t>22. Gallifant J, Afshar M, Ameen S, Aphinyanaphongs Y, Chen S, Cacciamani G, et al. The TRIPOD-LLM reporting guideline for studies using large language models. Nat Med. 2025;31(1):60-9. doi:10.1038/s41591-024-03425-5</a:t>
+            </a:r>
+          </a:p>
+          <a:p>
+            <a:pPr algn="l">
+              <a:spcAft>
+                <a:spcPts val="400"/>
+              </a:spcAft>
+            </a:pPr>
+            <a:r>
+              <a:rPr sz="1000" b="0" i="0">
+                <a:solidFill>
+                  <a:srgbClr val="1F2A30"/>
+                </a:solidFill>
+                <a:latin typeface="Swis721 Cn BT"/>
+              </a:rPr>
+              <a:t>23. Meskó B. Prompt engineering as an important emerging skill for medical professionals: tutorial. J Med Internet Res. 2023;25:e50638. doi:10.2196/50638</a:t>
+            </a:r>
+          </a:p>
+          <a:p>
+            <a:pPr algn="l">
+              <a:spcAft>
+                <a:spcPts val="400"/>
+              </a:spcAft>
+            </a:pPr>
+            <a:r>
+              <a:rPr sz="1000" b="0" i="0">
+                <a:solidFill>
+                  <a:srgbClr val="1F2A30"/>
+                </a:solidFill>
+                <a:latin typeface="Swis721 Cn BT"/>
+              </a:rPr>
+              <a:t>24. Zaghir J, Naguib M, Bjelogrlic M, Névéol A, Tannier X, Lovis C. Prompt engineering paradigms for medical applications: scoping review. J Med Internet Res. 2024;26:e60501. doi:10.2196/60501</a:t>
+            </a:r>
+          </a:p>
+        </p:txBody>
+      </p:sp>
+    </p:spTree>
+  </p:cSld>
+  <p:clrMapOvr>
+    <a:masterClrMapping/>
+  </p:clrMapOvr>
+</p:sld>
+</file>
+
+<file path=ppt/slides/slide38.xml><?xml version="1.0" encoding="utf-8"?>
 <p:sld xmlns:a="http://schemas.openxmlformats.org/drawingml/2006/main" xmlns:r="http://schemas.openxmlformats.org/officeDocument/2006/relationships" xmlns:p="http://schemas.openxmlformats.org/presentationml/2006/main">
   <p:cSld>
     <p:spTree>
@@ -31362,14 +32197,65 @@
               </a:spcAft>
             </a:pPr>
             <a:r>
-              <a:rPr sz="1050" b="0" i="0">
+              <a:rPr sz="1050" b="0" i="0" dirty="0">
                 <a:solidFill>
                   <a:srgbClr val="003C58"/>
                 </a:solidFill>
                 <a:latin typeface="Swis721 Cn BT"/>
               </a:rPr>
-              <a:t>FCF con desaceleraciones tardías</a:t>
-            </a:r>
+              <a:t>F</a:t>
+            </a:r>
+            <a:r>
+              <a:rPr lang="es-419" sz="1050" b="0" i="0" dirty="0">
+                <a:solidFill>
+                  <a:srgbClr val="003C58"/>
+                </a:solidFill>
+                <a:latin typeface="Swis721 Cn BT"/>
+              </a:rPr>
+              <a:t>rec. Cardiaca fetal</a:t>
+            </a:r>
+            <a:r>
+              <a:rPr sz="1050" b="0" i="0" dirty="0">
+                <a:solidFill>
+                  <a:srgbClr val="003C58"/>
+                </a:solidFill>
+                <a:latin typeface="Swis721 Cn BT"/>
+              </a:rPr>
+              <a:t> con </a:t>
+            </a:r>
+            <a:r>
+              <a:rPr sz="1050" b="0" i="0" dirty="0" err="1">
+                <a:solidFill>
+                  <a:srgbClr val="003C58"/>
+                </a:solidFill>
+                <a:latin typeface="Swis721 Cn BT"/>
+              </a:rPr>
+              <a:t>desaceleraciones</a:t>
+            </a:r>
+            <a:r>
+              <a:rPr sz="1050" b="0" i="0" dirty="0">
+                <a:solidFill>
+                  <a:srgbClr val="003C58"/>
+                </a:solidFill>
+                <a:latin typeface="Swis721 Cn BT"/>
+              </a:rPr>
+              <a:t> </a:t>
+            </a:r>
+            <a:r>
+              <a:rPr sz="1050" b="0" i="0" dirty="0" err="1">
+                <a:solidFill>
+                  <a:srgbClr val="003C58"/>
+                </a:solidFill>
+                <a:latin typeface="Swis721 Cn BT"/>
+              </a:rPr>
+              <a:t>tardías</a:t>
+            </a:r>
+            <a:endParaRPr sz="1050" b="0" i="0" dirty="0">
+              <a:solidFill>
+                <a:srgbClr val="003C58"/>
+              </a:solidFill>
+              <a:latin typeface="Swis721 Cn BT"/>
+            </a:endParaRPr>
           </a:p>
           <a:p>
             <a:pPr algn="l">
@@ -31378,7 +32264,7 @@
               </a:spcAft>
             </a:pPr>
             <a:r>
-              <a:rPr sz="1200" b="1" i="0">
+              <a:rPr sz="1200" b="1" i="0" dirty="0">
                 <a:solidFill>
                   <a:srgbClr val="BF210C"/>
                 </a:solidFill>
@@ -37839,6 +38725,17 @@
 </file>
 
 <file path=customXml/item1.xml><?xml version="1.0" encoding="utf-8"?>
+<p:properties xmlns:p="http://schemas.microsoft.com/office/2006/metadata/properties" xmlns:xsi="http://www.w3.org/2001/XMLSchema-instance" xmlns:pc="http://schemas.microsoft.com/office/infopath/2007/PartnerControls">
+  <documentManagement>
+    <TaxCatchAll xmlns="39f852db-6116-43f0-a01a-f747f551a9b7" xsi:nil="true"/>
+    <lcf76f155ced4ddcb4097134ff3c332f xmlns="58e3b983-b9c9-4a9a-8434-0fe099e73c0e">
+      <Terms xmlns="http://schemas.microsoft.com/office/infopath/2007/PartnerControls"/>
+    </lcf76f155ced4ddcb4097134ff3c332f>
+  </documentManagement>
+</p:properties>
+</file>
+
+<file path=customXml/item2.xml><?xml version="1.0" encoding="utf-8"?>
 <ct:contentTypeSchema xmlns:ct="http://schemas.microsoft.com/office/2006/metadata/contentType" xmlns:ma="http://schemas.microsoft.com/office/2006/metadata/properties/metaAttributes" ct:_="" ma:_="" ma:contentTypeName="Documento" ma:contentTypeID="0x0101006319FEBDE55BBC4C9423A487D4FB469E" ma:contentTypeVersion="17" ma:contentTypeDescription="Crear nuevo documento." ma:contentTypeScope="" ma:versionID="a5e4daa5fc68ecd23cbab21b5f616142">
   <xsd:schema xmlns:xsd="http://www.w3.org/2001/XMLSchema" xmlns:xs="http://www.w3.org/2001/XMLSchema" xmlns:p="http://schemas.microsoft.com/office/2006/metadata/properties" xmlns:ns2="58e3b983-b9c9-4a9a-8434-0fe099e73c0e" xmlns:ns3="39f852db-6116-43f0-a01a-f747f551a9b7" targetNamespace="http://schemas.microsoft.com/office/2006/metadata/properties" ma:root="true" ma:fieldsID="50fd15d83f0830bfa0f4239ae3043ea0" ns2:_="" ns3:_="">
     <xsd:import namespace="58e3b983-b9c9-4a9a-8434-0fe099e73c0e"/>
@@ -38087,7 +38984,7 @@
 </ct:contentTypeSchema>
 </file>
 
-<file path=customXml/item2.xml><?xml version="1.0" encoding="utf-8"?>
+<file path=customXml/item3.xml><?xml version="1.0" encoding="utf-8"?>
 <?mso-contentType ?>
 <FormTemplates xmlns="http://schemas.microsoft.com/sharepoint/v3/contenttype/forms">
   <Display>DocumentLibraryForm</Display>
@@ -38096,18 +38993,24 @@
 </FormTemplates>
 </file>
 
-<file path=customXml/item3.xml><?xml version="1.0" encoding="utf-8"?>
-<p:properties xmlns:p="http://schemas.microsoft.com/office/2006/metadata/properties" xmlns:xsi="http://www.w3.org/2001/XMLSchema-instance" xmlns:pc="http://schemas.microsoft.com/office/infopath/2007/PartnerControls">
-  <documentManagement>
-    <TaxCatchAll xmlns="39f852db-6116-43f0-a01a-f747f551a9b7" xsi:nil="true"/>
-    <lcf76f155ced4ddcb4097134ff3c332f xmlns="58e3b983-b9c9-4a9a-8434-0fe099e73c0e">
-      <Terms xmlns="http://schemas.microsoft.com/office/infopath/2007/PartnerControls"/>
-    </lcf76f155ced4ddcb4097134ff3c332f>
-  </documentManagement>
-</p:properties>
+<file path=customXml/itemProps1.xml><?xml version="1.0" encoding="utf-8"?>
+<ds:datastoreItem xmlns:ds="http://schemas.openxmlformats.org/officeDocument/2006/customXml" ds:itemID="{F864ECA2-A753-4D45-B299-F9626E461873}">
+  <ds:schemaRefs>
+    <ds:schemaRef ds:uri="58e3b983-b9c9-4a9a-8434-0fe099e73c0e"/>
+    <ds:schemaRef ds:uri="http://purl.org/dc/elements/1.1/"/>
+    <ds:schemaRef ds:uri="http://purl.org/dc/terms/"/>
+    <ds:schemaRef ds:uri="http://purl.org/dc/dcmitype/"/>
+    <ds:schemaRef ds:uri="http://schemas.microsoft.com/office/infopath/2007/PartnerControls"/>
+    <ds:schemaRef ds:uri="http://schemas.microsoft.com/office/2006/documentManagement/types"/>
+    <ds:schemaRef ds:uri="http://schemas.openxmlformats.org/package/2006/metadata/core-properties"/>
+    <ds:schemaRef ds:uri="39f852db-6116-43f0-a01a-f747f551a9b7"/>
+    <ds:schemaRef ds:uri="http://schemas.microsoft.com/office/2006/metadata/properties"/>
+    <ds:schemaRef ds:uri="http://www.w3.org/XML/1998/namespace"/>
+  </ds:schemaRefs>
+</ds:datastoreItem>
 </file>
 
-<file path=customXml/itemProps1.xml><?xml version="1.0" encoding="utf-8"?>
+<file path=customXml/itemProps2.xml><?xml version="1.0" encoding="utf-8"?>
 <ds:datastoreItem xmlns:ds="http://schemas.openxmlformats.org/officeDocument/2006/customXml" ds:itemID="{BD3E1CB7-CB00-4B00-AA07-6BE50C641F46}">
   <ds:schemaRefs>
     <ds:schemaRef ds:uri="http://schemas.microsoft.com/office/2006/metadata/contentType"/>
@@ -38126,27 +39029,10 @@
 </ds:datastoreItem>
 </file>
 
-<file path=customXml/itemProps2.xml><?xml version="1.0" encoding="utf-8"?>
+<file path=customXml/itemProps3.xml><?xml version="1.0" encoding="utf-8"?>
 <ds:datastoreItem xmlns:ds="http://schemas.openxmlformats.org/officeDocument/2006/customXml" ds:itemID="{B6FF4F38-7A2A-471E-A58C-16BD05A1D01B}">
   <ds:schemaRefs>
     <ds:schemaRef ds:uri="http://schemas.microsoft.com/sharepoint/v3/contenttype/forms"/>
   </ds:schemaRefs>
 </ds:datastoreItem>
-</file>
-
-<file path=customXml/itemProps3.xml><?xml version="1.0" encoding="utf-8"?>
-<ds:datastoreItem xmlns:ds="http://schemas.openxmlformats.org/officeDocument/2006/customXml" ds:itemID="{F864ECA2-A753-4D45-B299-F9626E461873}">
-  <ds:schemaRefs>
-    <ds:schemaRef ds:uri="58e3b983-b9c9-4a9a-8434-0fe099e73c0e"/>
-    <ds:schemaRef ds:uri="http://purl.org/dc/elements/1.1/"/>
-    <ds:schemaRef ds:uri="http://purl.org/dc/terms/"/>
-    <ds:schemaRef ds:uri="http://purl.org/dc/dcmitype/"/>
-    <ds:schemaRef ds:uri="http://schemas.microsoft.com/office/infopath/2007/PartnerControls"/>
-    <ds:schemaRef ds:uri="http://schemas.microsoft.com/office/2006/documentManagement/types"/>
-    <ds:schemaRef ds:uri="http://schemas.openxmlformats.org/package/2006/metadata/core-properties"/>
-    <ds:schemaRef ds:uri="39f852db-6116-43f0-a01a-f747f551a9b7"/>
-    <ds:schemaRef ds:uri="http://schemas.microsoft.com/office/2006/metadata/properties"/>
-    <ds:schemaRef ds:uri="http://www.w3.org/XML/1998/namespace"/>
-  </ds:schemaRefs>
-</ds:datastoreItem>
 </file>